--- a/docs/Spandan_Hackathon_Pitch.pptx
+++ b/docs/Spandan_Hackathon_Pitch.pptx
@@ -15,6 +15,13 @@
     <p:sldId id="263" r:id="rId14"/>
     <p:sldId id="264" r:id="rId15"/>
     <p:sldId id="265" r:id="rId16"/>
+    <p:sldId id="266" r:id="rId17"/>
+    <p:sldId id="267" r:id="rId18"/>
+    <p:sldId id="268" r:id="rId19"/>
+    <p:sldId id="269" r:id="rId20"/>
+    <p:sldId id="270" r:id="rId21"/>
+    <p:sldId id="271" r:id="rId22"/>
+    <p:sldId id="272" r:id="rId23"/>
   </p:sldIdLst>
   <p:sldSz cx="12191695" cy="6858000" type="screen4x3"/>
   <p:notesSz cx="6858000" cy="9144000"/>
@@ -3113,8 +3120,8 @@
         </p:nvSpPr>
         <p:spPr>
           <a:xfrm>
-            <a:off x="0" y="6309360"/>
-            <a:ext cx="12191695" cy="548640"/>
+            <a:off x="0" y="6291072"/>
+            <a:ext cx="12191695" cy="566928"/>
           </a:xfrm>
           <a:prstGeom prst="rect">
             <a:avLst/>
@@ -3156,8 +3163,8 @@
         </p:nvSpPr>
         <p:spPr>
           <a:xfrm>
-            <a:off x="731520" y="1463040"/>
-            <a:ext cx="10515600" cy="2926080"/>
+            <a:off x="640080" y="1234440"/>
+            <a:ext cx="10972800" cy="3840480"/>
           </a:xfrm>
           <a:prstGeom prst="rect">
             <a:avLst/>
@@ -3171,7 +3178,7 @@
           <a:lstStyle/>
           <a:p>
             <a:pPr algn="ctr">
-              <a:defRPr sz="6000" b="1">
+              <a:defRPr sz="5800" b="1">
                 <a:solidFill>
                   <a:srgbClr val="FFFFFF"/>
                 </a:solidFill>
@@ -3184,9 +3191,9 @@
           <a:p>
             <a:pPr algn="ctr">
               <a:spcBef>
-                <a:spcPts val="1400"/>
+                <a:spcPts val="1200"/>
               </a:spcBef>
-              <a:defRPr sz="2600">
+              <a:defRPr sz="2600" b="0">
                 <a:solidFill>
                   <a:srgbClr val="FFFFFF"/>
                 </a:solidFill>
@@ -3199,16 +3206,16 @@
           <a:p>
             <a:pPr algn="ctr">
               <a:spcBef>
-                <a:spcPts val="2200"/>
+                <a:spcPts val="1800"/>
               </a:spcBef>
-              <a:defRPr sz="1700">
+              <a:defRPr sz="1700" b="0">
                 <a:solidFill>
                   <a:srgbClr val="FFDDDD"/>
                 </a:solidFill>
               </a:defRPr>
             </a:pPr>
             <a:r>
-              <a:t>Blood Warriors Hackathon · Team 066</a:t>
+              <a:t>Blood Warriors Hackathon  |  Team 066  |  Top 15 Finalist</a:t>
             </a:r>
           </a:p>
           <a:p>
@@ -3216,14 +3223,14 @@
               <a:spcBef>
                 <a:spcPts val="800"/>
               </a:spcBef>
-              <a:defRPr sz="1500">
+              <a:defRPr sz="1500" b="0">
                 <a:solidFill>
                   <a:srgbClr val="FFDDDD"/>
                 </a:solidFill>
               </a:defRPr>
             </a:pPr>
             <a:r>
-              <a:t>स्पंदन · the heartbeat that keeps care in rhythm</a:t>
+              <a:t>स्पंदन — the heartbeat that keeps care in rhythm</a:t>
             </a:r>
           </a:p>
         </p:txBody>
@@ -3237,6 +3244,2793 @@
 </file>
 
 <file path=ppt/slides/slide10.xml><?xml version="1.0" encoding="utf-8"?>
+<p:sld xmlns:a="http://schemas.openxmlformats.org/drawingml/2006/main" xmlns:p="http://schemas.openxmlformats.org/presentationml/2006/main" xmlns:r="http://schemas.openxmlformats.org/officeDocument/2006/relationships">
+  <p:cSld>
+    <p:bg>
+      <p:bgPr>
+        <a:solidFill>
+          <a:srgbClr val="F8F9FB"/>
+        </a:solidFill>
+        <a:effectLst/>
+      </p:bgPr>
+    </p:bg>
+    <p:spTree>
+      <p:nvGrpSpPr>
+        <p:cNvPr id="1" name=""/>
+        <p:cNvGrpSpPr/>
+        <p:nvPr/>
+      </p:nvGrpSpPr>
+      <p:grpSpPr/>
+      <p:sp>
+        <p:nvSpPr>
+          <p:cNvPr id="2" name="Rectangle 1"/>
+          <p:cNvSpPr/>
+          <p:nvPr/>
+        </p:nvSpPr>
+        <p:spPr>
+          <a:xfrm>
+            <a:off x="0" y="0"/>
+            <a:ext cx="12191695" cy="109728"/>
+          </a:xfrm>
+          <a:prstGeom prst="rect">
+            <a:avLst/>
+          </a:prstGeom>
+          <a:solidFill>
+            <a:srgbClr val="C8102E"/>
+          </a:solidFill>
+          <a:ln>
+            <a:noFill/>
+          </a:ln>
+        </p:spPr>
+        <p:style>
+          <a:lnRef idx="1">
+            <a:schemeClr val="accent1"/>
+          </a:lnRef>
+          <a:fillRef idx="3">
+            <a:schemeClr val="accent1"/>
+          </a:fillRef>
+          <a:effectRef idx="2">
+            <a:schemeClr val="accent1"/>
+          </a:effectRef>
+          <a:fontRef idx="minor">
+            <a:schemeClr val="lt1"/>
+          </a:fontRef>
+        </p:style>
+        <p:txBody>
+          <a:bodyPr rtlCol="0" anchor="ctr"/>
+          <a:lstStyle/>
+          <a:p>
+            <a:pPr algn="ctr"/>
+          </a:p>
+        </p:txBody>
+      </p:sp>
+      <p:sp>
+        <p:nvSpPr>
+          <p:cNvPr id="3" name="TextBox 2"/>
+          <p:cNvSpPr txBox="1"/>
+          <p:nvPr/>
+        </p:nvSpPr>
+        <p:spPr>
+          <a:xfrm>
+            <a:off x="594360" y="457200"/>
+            <a:ext cx="11155680" cy="1051560"/>
+          </a:xfrm>
+          <a:prstGeom prst="rect">
+            <a:avLst/>
+          </a:prstGeom>
+          <a:noFill/>
+        </p:spPr>
+        <p:txBody>
+          <a:bodyPr wrap="none">
+            <a:spAutoFit/>
+          </a:bodyPr>
+          <a:lstStyle/>
+          <a:p>
+            <a:pPr>
+              <a:defRPr sz="3400" b="1">
+                <a:solidFill>
+                  <a:srgbClr val="C8102E"/>
+                </a:solidFill>
+              </a:defRPr>
+            </a:pPr>
+            <a:r>
+              <a:t>Real emails, real replies</a:t>
+            </a:r>
+          </a:p>
+          <a:p>
+            <a:pPr>
+              <a:spcBef>
+                <a:spcPts val="400"/>
+              </a:spcBef>
+              <a:defRPr sz="1500">
+                <a:solidFill>
+                  <a:srgbClr val="5A6068"/>
+                </a:solidFill>
+              </a:defRPr>
+            </a:pPr>
+            <a:r>
+              <a:t>Not a UI mock — a full delivery pipeline</a:t>
+            </a:r>
+          </a:p>
+        </p:txBody>
+      </p:sp>
+      <p:sp>
+        <p:nvSpPr>
+          <p:cNvPr id="4" name="TextBox 3"/>
+          <p:cNvSpPr txBox="1"/>
+          <p:nvPr/>
+        </p:nvSpPr>
+        <p:spPr>
+          <a:xfrm>
+            <a:off x="640080" y="1417320"/>
+            <a:ext cx="10881360" cy="5029200"/>
+          </a:xfrm>
+          <a:prstGeom prst="rect">
+            <a:avLst/>
+          </a:prstGeom>
+          <a:noFill/>
+        </p:spPr>
+        <p:txBody>
+          <a:bodyPr wrap="square">
+            <a:spAutoFit/>
+          </a:bodyPr>
+          <a:lstStyle/>
+          <a:p>
+            <a:pPr>
+              <a:lnSpc>
+                <a:spcPct val="125000"/>
+              </a:lnSpc>
+              <a:spcAft>
+                <a:spcPts val="1400"/>
+              </a:spcAft>
+              <a:defRPr sz="1700">
+                <a:solidFill>
+                  <a:srgbClr val="22222B"/>
+                </a:solidFill>
+              </a:defRPr>
+            </a:pPr>
+            <a:r>
+              <a:t>When the agent decides to contact a donor, it writes the message to DynamoDB, builds an HTML email with patient details, and sends via SMTP to MailPit (demo) or Amazon SES (production) — same code path, one env var to switch.</a:t>
+            </a:r>
+          </a:p>
+          <a:p>
+            <a:pPr>
+              <a:lnSpc>
+                <a:spcPct val="125000"/>
+              </a:lnSpc>
+              <a:spcAft>
+                <a:spcPts val="1400"/>
+              </a:spcAft>
+              <a:defRPr sz="1700">
+                <a:solidFill>
+                  <a:srgbClr val="22222B"/>
+                </a:solidFill>
+              </a:defRPr>
+            </a:pPr>
+            <a:r>
+              <a:t>Each email contains signed magic-link buttons for YES and NO. Donors click without logging in; HMAC tokens prevent tampering.</a:t>
+            </a:r>
+          </a:p>
+          <a:p>
+            <a:pPr>
+              <a:lnSpc>
+                <a:spcPct val="125000"/>
+              </a:lnSpc>
+              <a:spcAft>
+                <a:spcPts val="1400"/>
+              </a:spcAft>
+              <a:defRPr sz="1700">
+                <a:solidFill>
+                  <a:srgbClr val="22222B"/>
+                </a:solidFill>
+              </a:defRPr>
+            </a:pPr>
+            <a:r>
+              <a:t>The reply lands in DynamoDB as an inbound message; the agent classifies intent and either confirms the donation or emails the next-ranked donor.</a:t>
+            </a:r>
+          </a:p>
+          <a:p>
+            <a:pPr>
+              <a:lnSpc>
+                <a:spcPct val="125000"/>
+              </a:lnSpc>
+              <a:spcAft>
+                <a:spcPts val="1400"/>
+              </a:spcAft>
+              <a:defRPr sz="1700">
+                <a:solidFill>
+                  <a:srgbClr val="22222B"/>
+                </a:solidFill>
+              </a:defRPr>
+            </a:pPr>
+            <a:r>
+              <a:t>Judges see the full loop in MailPit at http://98.84.159.117/mail — multilingual HTML, real SMTP, real state updates.</a:t>
+            </a:r>
+          </a:p>
+        </p:txBody>
+      </p:sp>
+    </p:spTree>
+  </p:cSld>
+  <p:clrMapOvr>
+    <a:masterClrMapping/>
+  </p:clrMapOvr>
+</p:sld>
+</file>
+
+<file path=ppt/slides/slide11.xml><?xml version="1.0" encoding="utf-8"?>
+<p:sld xmlns:a="http://schemas.openxmlformats.org/drawingml/2006/main" xmlns:p="http://schemas.openxmlformats.org/presentationml/2006/main" xmlns:r="http://schemas.openxmlformats.org/officeDocument/2006/relationships">
+  <p:cSld>
+    <p:bg>
+      <p:bgPr>
+        <a:solidFill>
+          <a:srgbClr val="F8F9FB"/>
+        </a:solidFill>
+        <a:effectLst/>
+      </p:bgPr>
+    </p:bg>
+    <p:spTree>
+      <p:nvGrpSpPr>
+        <p:cNvPr id="1" name=""/>
+        <p:cNvGrpSpPr/>
+        <p:nvPr/>
+      </p:nvGrpSpPr>
+      <p:grpSpPr/>
+      <p:sp>
+        <p:nvSpPr>
+          <p:cNvPr id="2" name="Rectangle 1"/>
+          <p:cNvSpPr/>
+          <p:nvPr/>
+        </p:nvSpPr>
+        <p:spPr>
+          <a:xfrm>
+            <a:off x="0" y="0"/>
+            <a:ext cx="12191695" cy="109728"/>
+          </a:xfrm>
+          <a:prstGeom prst="rect">
+            <a:avLst/>
+          </a:prstGeom>
+          <a:solidFill>
+            <a:srgbClr val="C8102E"/>
+          </a:solidFill>
+          <a:ln>
+            <a:noFill/>
+          </a:ln>
+        </p:spPr>
+        <p:style>
+          <a:lnRef idx="1">
+            <a:schemeClr val="accent1"/>
+          </a:lnRef>
+          <a:fillRef idx="3">
+            <a:schemeClr val="accent1"/>
+          </a:fillRef>
+          <a:effectRef idx="2">
+            <a:schemeClr val="accent1"/>
+          </a:effectRef>
+          <a:fontRef idx="minor">
+            <a:schemeClr val="lt1"/>
+          </a:fontRef>
+        </p:style>
+        <p:txBody>
+          <a:bodyPr rtlCol="0" anchor="ctr"/>
+          <a:lstStyle/>
+          <a:p>
+            <a:pPr algn="ctr"/>
+          </a:p>
+        </p:txBody>
+      </p:sp>
+      <p:sp>
+        <p:nvSpPr>
+          <p:cNvPr id="3" name="TextBox 2"/>
+          <p:cNvSpPr txBox="1"/>
+          <p:nvPr/>
+        </p:nvSpPr>
+        <p:spPr>
+          <a:xfrm>
+            <a:off x="594360" y="457200"/>
+            <a:ext cx="11155680" cy="1051560"/>
+          </a:xfrm>
+          <a:prstGeom prst="rect">
+            <a:avLst/>
+          </a:prstGeom>
+          <a:noFill/>
+        </p:spPr>
+        <p:txBody>
+          <a:bodyPr wrap="none">
+            <a:spAutoFit/>
+          </a:bodyPr>
+          <a:lstStyle/>
+          <a:p>
+            <a:pPr>
+              <a:defRPr sz="3400" b="1">
+                <a:solidFill>
+                  <a:srgbClr val="C8102E"/>
+                </a:solidFill>
+              </a:defRPr>
+            </a:pPr>
+            <a:r>
+              <a:t>Agent lifecycle</a:t>
+            </a:r>
+          </a:p>
+          <a:p>
+            <a:pPr>
+              <a:spcBef>
+                <a:spcPts val="400"/>
+              </a:spcBef>
+              <a:defRPr sz="1500">
+                <a:solidFill>
+                  <a:srgbClr val="5A6068"/>
+                </a:solidFill>
+              </a:defRPr>
+            </a:pPr>
+            <a:r>
+              <a:t>Sequential pacing with emergency override</a:t>
+            </a:r>
+          </a:p>
+        </p:txBody>
+      </p:sp>
+      <p:sp>
+        <p:nvSpPr>
+          <p:cNvPr id="4" name="Rounded Rectangle 3"/>
+          <p:cNvSpPr/>
+          <p:nvPr/>
+        </p:nvSpPr>
+        <p:spPr>
+          <a:xfrm>
+            <a:off x="594360" y="1353312"/>
+            <a:ext cx="1417320" cy="530352"/>
+          </a:xfrm>
+          <a:prstGeom prst="roundRect">
+            <a:avLst/>
+          </a:prstGeom>
+          <a:solidFill>
+            <a:srgbClr val="C8102E"/>
+          </a:solidFill>
+          <a:ln>
+            <a:noFill/>
+          </a:ln>
+        </p:spPr>
+        <p:style>
+          <a:lnRef idx="1">
+            <a:schemeClr val="accent1"/>
+          </a:lnRef>
+          <a:fillRef idx="3">
+            <a:schemeClr val="accent1"/>
+          </a:fillRef>
+          <a:effectRef idx="2">
+            <a:schemeClr val="accent1"/>
+          </a:effectRef>
+          <a:fontRef idx="minor">
+            <a:schemeClr val="lt1"/>
+          </a:fontRef>
+        </p:style>
+        <p:txBody>
+          <a:bodyPr rtlCol="0" anchor="ctr"/>
+          <a:lstStyle/>
+          <a:p>
+            <a:pPr algn="ctr">
+              <a:defRPr sz="1200" b="1">
+                <a:solidFill>
+                  <a:srgbClr val="FFFFFF"/>
+                </a:solidFill>
+              </a:defRPr>
+            </a:pPr>
+            <a:r>
+              <a:t>Wake</a:t>
+            </a:r>
+          </a:p>
+        </p:txBody>
+      </p:sp>
+      <p:sp>
+        <p:nvSpPr>
+          <p:cNvPr id="5" name="TextBox 4"/>
+          <p:cNvSpPr txBox="1"/>
+          <p:nvPr/>
+        </p:nvSpPr>
+        <p:spPr>
+          <a:xfrm>
+            <a:off x="2148840" y="1399032"/>
+            <a:ext cx="9418320" cy="502920"/>
+          </a:xfrm>
+          <a:prstGeom prst="rect">
+            <a:avLst/>
+          </a:prstGeom>
+          <a:noFill/>
+        </p:spPr>
+        <p:txBody>
+          <a:bodyPr wrap="none">
+            <a:spAutoFit/>
+          </a:bodyPr>
+          <a:lstStyle/>
+          <a:p>
+            <a:pPr>
+              <a:defRPr sz="1500">
+                <a:solidFill>
+                  <a:srgbClr val="22222B"/>
+                </a:solidFill>
+              </a:defRPr>
+            </a:pPr>
+            <a:r>
+              <a:t>Background thread every ~30s; process pending replies first.</a:t>
+            </a:r>
+          </a:p>
+        </p:txBody>
+      </p:sp>
+      <p:sp>
+        <p:nvSpPr>
+          <p:cNvPr id="6" name="Rounded Rectangle 5"/>
+          <p:cNvSpPr/>
+          <p:nvPr/>
+        </p:nvSpPr>
+        <p:spPr>
+          <a:xfrm>
+            <a:off x="594360" y="2066543"/>
+            <a:ext cx="1417320" cy="530352"/>
+          </a:xfrm>
+          <a:prstGeom prst="roundRect">
+            <a:avLst/>
+          </a:prstGeom>
+          <a:solidFill>
+            <a:srgbClr val="22222B"/>
+          </a:solidFill>
+          <a:ln>
+            <a:noFill/>
+          </a:ln>
+        </p:spPr>
+        <p:style>
+          <a:lnRef idx="1">
+            <a:schemeClr val="accent1"/>
+          </a:lnRef>
+          <a:fillRef idx="3">
+            <a:schemeClr val="accent1"/>
+          </a:fillRef>
+          <a:effectRef idx="2">
+            <a:schemeClr val="accent1"/>
+          </a:effectRef>
+          <a:fontRef idx="minor">
+            <a:schemeClr val="lt1"/>
+          </a:fontRef>
+        </p:style>
+        <p:txBody>
+          <a:bodyPr rtlCol="0" anchor="ctr"/>
+          <a:lstStyle/>
+          <a:p>
+            <a:pPr algn="ctr">
+              <a:defRPr sz="1200" b="1">
+                <a:solidFill>
+                  <a:srgbClr val="FFFFFF"/>
+                </a:solidFill>
+              </a:defRPr>
+            </a:pPr>
+            <a:r>
+              <a:t>Select</a:t>
+            </a:r>
+          </a:p>
+        </p:txBody>
+      </p:sp>
+      <p:sp>
+        <p:nvSpPr>
+          <p:cNvPr id="7" name="TextBox 6"/>
+          <p:cNvSpPr txBox="1"/>
+          <p:nvPr/>
+        </p:nvSpPr>
+        <p:spPr>
+          <a:xfrm>
+            <a:off x="2148840" y="2112263"/>
+            <a:ext cx="9418320" cy="502920"/>
+          </a:xfrm>
+          <a:prstGeom prst="rect">
+            <a:avLst/>
+          </a:prstGeom>
+          <a:noFill/>
+        </p:spPr>
+        <p:txBody>
+          <a:bodyPr wrap="none">
+            <a:spAutoFit/>
+          </a:bodyPr>
+          <a:lstStyle/>
+          <a:p>
+            <a:pPr>
+              <a:defRPr sz="1500">
+                <a:solidFill>
+                  <a:srgbClr val="22222B"/>
+                </a:solidFill>
+              </a:defRPr>
+            </a:pPr>
+            <a:r>
+              <a:t>Pick patients from 90-day forecast queue (most urgent first).</a:t>
+            </a:r>
+          </a:p>
+        </p:txBody>
+      </p:sp>
+      <p:sp>
+        <p:nvSpPr>
+          <p:cNvPr id="8" name="Rounded Rectangle 7"/>
+          <p:cNvSpPr/>
+          <p:nvPr/>
+        </p:nvSpPr>
+        <p:spPr>
+          <a:xfrm>
+            <a:off x="594360" y="2779776"/>
+            <a:ext cx="1417320" cy="530352"/>
+          </a:xfrm>
+          <a:prstGeom prst="roundRect">
+            <a:avLst/>
+          </a:prstGeom>
+          <a:solidFill>
+            <a:srgbClr val="C8102E"/>
+          </a:solidFill>
+          <a:ln>
+            <a:noFill/>
+          </a:ln>
+        </p:spPr>
+        <p:style>
+          <a:lnRef idx="1">
+            <a:schemeClr val="accent1"/>
+          </a:lnRef>
+          <a:fillRef idx="3">
+            <a:schemeClr val="accent1"/>
+          </a:fillRef>
+          <a:effectRef idx="2">
+            <a:schemeClr val="accent1"/>
+          </a:effectRef>
+          <a:fontRef idx="minor">
+            <a:schemeClr val="lt1"/>
+          </a:fontRef>
+        </p:style>
+        <p:txBody>
+          <a:bodyPr rtlCol="0" anchor="ctr"/>
+          <a:lstStyle/>
+          <a:p>
+            <a:pPr algn="ctr">
+              <a:defRPr sz="1200" b="1">
+                <a:solidFill>
+                  <a:srgbClr val="FFFFFF"/>
+                </a:solidFill>
+              </a:defRPr>
+            </a:pPr>
+            <a:r>
+              <a:t>Rank</a:t>
+            </a:r>
+          </a:p>
+        </p:txBody>
+      </p:sp>
+      <p:sp>
+        <p:nvSpPr>
+          <p:cNvPr id="9" name="TextBox 8"/>
+          <p:cNvSpPr txBox="1"/>
+          <p:nvPr/>
+        </p:nvSpPr>
+        <p:spPr>
+          <a:xfrm>
+            <a:off x="2148840" y="2825496"/>
+            <a:ext cx="9418320" cy="502920"/>
+          </a:xfrm>
+          <a:prstGeom prst="rect">
+            <a:avLst/>
+          </a:prstGeom>
+          <a:noFill/>
+        </p:spPr>
+        <p:txBody>
+          <a:bodyPr wrap="none">
+            <a:spAutoFit/>
+          </a:bodyPr>
+          <a:lstStyle/>
+          <a:p>
+            <a:pPr>
+              <a:defRPr sz="1500">
+                <a:solidFill>
+                  <a:srgbClr val="22222B"/>
+                </a:solidFill>
+              </a:defRPr>
+            </a:pPr>
+            <a:r>
+              <a:t>Filter by blood group + eligibility; ML score top donor.</a:t>
+            </a:r>
+          </a:p>
+        </p:txBody>
+      </p:sp>
+      <p:sp>
+        <p:nvSpPr>
+          <p:cNvPr id="10" name="Rounded Rectangle 9"/>
+          <p:cNvSpPr/>
+          <p:nvPr/>
+        </p:nvSpPr>
+        <p:spPr>
+          <a:xfrm>
+            <a:off x="594360" y="3493008"/>
+            <a:ext cx="1417320" cy="530352"/>
+          </a:xfrm>
+          <a:prstGeom prst="roundRect">
+            <a:avLst/>
+          </a:prstGeom>
+          <a:solidFill>
+            <a:srgbClr val="22222B"/>
+          </a:solidFill>
+          <a:ln>
+            <a:noFill/>
+          </a:ln>
+        </p:spPr>
+        <p:style>
+          <a:lnRef idx="1">
+            <a:schemeClr val="accent1"/>
+          </a:lnRef>
+          <a:fillRef idx="3">
+            <a:schemeClr val="accent1"/>
+          </a:fillRef>
+          <a:effectRef idx="2">
+            <a:schemeClr val="accent1"/>
+          </a:effectRef>
+          <a:fontRef idx="minor">
+            <a:schemeClr val="lt1"/>
+          </a:fontRef>
+        </p:style>
+        <p:txBody>
+          <a:bodyPr rtlCol="0" anchor="ctr"/>
+          <a:lstStyle/>
+          <a:p>
+            <a:pPr algn="ctr">
+              <a:defRPr sz="1200" b="1">
+                <a:solidFill>
+                  <a:srgbClr val="FFFFFF"/>
+                </a:solidFill>
+              </a:defRPr>
+            </a:pPr>
+            <a:r>
+              <a:t>Email</a:t>
+            </a:r>
+          </a:p>
+        </p:txBody>
+      </p:sp>
+      <p:sp>
+        <p:nvSpPr>
+          <p:cNvPr id="11" name="TextBox 10"/>
+          <p:cNvSpPr txBox="1"/>
+          <p:nvPr/>
+        </p:nvSpPr>
+        <p:spPr>
+          <a:xfrm>
+            <a:off x="2148840" y="3538727"/>
+            <a:ext cx="9418320" cy="502920"/>
+          </a:xfrm>
+          <a:prstGeom prst="rect">
+            <a:avLst/>
+          </a:prstGeom>
+          <a:noFill/>
+        </p:spPr>
+        <p:txBody>
+          <a:bodyPr wrap="none">
+            <a:spAutoFit/>
+          </a:bodyPr>
+          <a:lstStyle/>
+          <a:p>
+            <a:pPr>
+              <a:defRPr sz="1500">
+                <a:solidFill>
+                  <a:srgbClr val="22222B"/>
+                </a:solidFill>
+              </a:defRPr>
+            </a:pPr>
+            <a:r>
+              <a:t>One donor per patient per wait window (default 5 min demo / 1 hr prod).</a:t>
+            </a:r>
+          </a:p>
+        </p:txBody>
+      </p:sp>
+      <p:sp>
+        <p:nvSpPr>
+          <p:cNvPr id="12" name="Rounded Rectangle 11"/>
+          <p:cNvSpPr/>
+          <p:nvPr/>
+        </p:nvSpPr>
+        <p:spPr>
+          <a:xfrm>
+            <a:off x="594360" y="4206240"/>
+            <a:ext cx="1417320" cy="530352"/>
+          </a:xfrm>
+          <a:prstGeom prst="roundRect">
+            <a:avLst/>
+          </a:prstGeom>
+          <a:solidFill>
+            <a:srgbClr val="C8102E"/>
+          </a:solidFill>
+          <a:ln>
+            <a:noFill/>
+          </a:ln>
+        </p:spPr>
+        <p:style>
+          <a:lnRef idx="1">
+            <a:schemeClr val="accent1"/>
+          </a:lnRef>
+          <a:fillRef idx="3">
+            <a:schemeClr val="accent1"/>
+          </a:fillRef>
+          <a:effectRef idx="2">
+            <a:schemeClr val="accent1"/>
+          </a:effectRef>
+          <a:fontRef idx="minor">
+            <a:schemeClr val="lt1"/>
+          </a:fontRef>
+        </p:style>
+        <p:txBody>
+          <a:bodyPr rtlCol="0" anchor="ctr"/>
+          <a:lstStyle/>
+          <a:p>
+            <a:pPr algn="ctr">
+              <a:defRPr sz="1200" b="1">
+                <a:solidFill>
+                  <a:srgbClr val="FFFFFF"/>
+                </a:solidFill>
+              </a:defRPr>
+            </a:pPr>
+            <a:r>
+              <a:t>Wait</a:t>
+            </a:r>
+          </a:p>
+        </p:txBody>
+      </p:sp>
+      <p:sp>
+        <p:nvSpPr>
+          <p:cNvPr id="13" name="TextBox 12"/>
+          <p:cNvSpPr txBox="1"/>
+          <p:nvPr/>
+        </p:nvSpPr>
+        <p:spPr>
+          <a:xfrm>
+            <a:off x="2148840" y="4251959"/>
+            <a:ext cx="9418320" cy="502920"/>
+          </a:xfrm>
+          <a:prstGeom prst="rect">
+            <a:avLst/>
+          </a:prstGeom>
+          <a:noFill/>
+        </p:spPr>
+        <p:txBody>
+          <a:bodyPr wrap="none">
+            <a:spAutoFit/>
+          </a:bodyPr>
+          <a:lstStyle/>
+          <a:p>
+            <a:pPr>
+              <a:defRPr sz="1500">
+                <a:solidFill>
+                  <a:srgbClr val="22222B"/>
+                </a:solidFill>
+              </a:defRPr>
+            </a:pPr>
+            <a:r>
+              <a:t>If no reply after window, bump skip_score and try next donor.</a:t>
+            </a:r>
+          </a:p>
+        </p:txBody>
+      </p:sp>
+      <p:sp>
+        <p:nvSpPr>
+          <p:cNvPr id="14" name="Rounded Rectangle 13"/>
+          <p:cNvSpPr/>
+          <p:nvPr/>
+        </p:nvSpPr>
+        <p:spPr>
+          <a:xfrm>
+            <a:off x="594360" y="4919472"/>
+            <a:ext cx="1417320" cy="530352"/>
+          </a:xfrm>
+          <a:prstGeom prst="roundRect">
+            <a:avLst/>
+          </a:prstGeom>
+          <a:solidFill>
+            <a:srgbClr val="22222B"/>
+          </a:solidFill>
+          <a:ln>
+            <a:noFill/>
+          </a:ln>
+        </p:spPr>
+        <p:style>
+          <a:lnRef idx="1">
+            <a:schemeClr val="accent1"/>
+          </a:lnRef>
+          <a:fillRef idx="3">
+            <a:schemeClr val="accent1"/>
+          </a:fillRef>
+          <a:effectRef idx="2">
+            <a:schemeClr val="accent1"/>
+          </a:effectRef>
+          <a:fontRef idx="minor">
+            <a:schemeClr val="lt1"/>
+          </a:fontRef>
+        </p:style>
+        <p:txBody>
+          <a:bodyPr rtlCol="0" anchor="ctr"/>
+          <a:lstStyle/>
+          <a:p>
+            <a:pPr algn="ctr">
+              <a:defRPr sz="1200" b="1">
+                <a:solidFill>
+                  <a:srgbClr val="FFFFFF"/>
+                </a:solidFill>
+              </a:defRPr>
+            </a:pPr>
+            <a:r>
+              <a:t>Confirm</a:t>
+            </a:r>
+          </a:p>
+        </p:txBody>
+      </p:sp>
+      <p:sp>
+        <p:nvSpPr>
+          <p:cNvPr id="15" name="TextBox 14"/>
+          <p:cNvSpPr txBox="1"/>
+          <p:nvPr/>
+        </p:nvSpPr>
+        <p:spPr>
+          <a:xfrm>
+            <a:off x="2148840" y="4965192"/>
+            <a:ext cx="9418320" cy="502920"/>
+          </a:xfrm>
+          <a:prstGeom prst="rect">
+            <a:avLst/>
+          </a:prstGeom>
+          <a:noFill/>
+        </p:spPr>
+        <p:txBody>
+          <a:bodyPr wrap="none">
+            <a:spAutoFit/>
+          </a:bodyPr>
+          <a:lstStyle/>
+          <a:p>
+            <a:pPr>
+              <a:defRPr sz="1500">
+                <a:solidFill>
+                  <a:srgbClr val="22222B"/>
+                </a:solidFill>
+              </a:defRPr>
+            </a:pPr>
+            <a:r>
+              <a:t>YES → donation record, reminder, advance patient cadence.</a:t>
+            </a:r>
+          </a:p>
+        </p:txBody>
+      </p:sp>
+      <p:sp>
+        <p:nvSpPr>
+          <p:cNvPr id="16" name="Rounded Rectangle 15"/>
+          <p:cNvSpPr/>
+          <p:nvPr/>
+        </p:nvSpPr>
+        <p:spPr>
+          <a:xfrm>
+            <a:off x="594360" y="5632704"/>
+            <a:ext cx="1417320" cy="530352"/>
+          </a:xfrm>
+          <a:prstGeom prst="roundRect">
+            <a:avLst/>
+          </a:prstGeom>
+          <a:solidFill>
+            <a:srgbClr val="C8102E"/>
+          </a:solidFill>
+          <a:ln>
+            <a:noFill/>
+          </a:ln>
+        </p:spPr>
+        <p:style>
+          <a:lnRef idx="1">
+            <a:schemeClr val="accent1"/>
+          </a:lnRef>
+          <a:fillRef idx="3">
+            <a:schemeClr val="accent1"/>
+          </a:fillRef>
+          <a:effectRef idx="2">
+            <a:schemeClr val="accent1"/>
+          </a:effectRef>
+          <a:fontRef idx="minor">
+            <a:schemeClr val="lt1"/>
+          </a:fontRef>
+        </p:style>
+        <p:txBody>
+          <a:bodyPr rtlCol="0" anchor="ctr"/>
+          <a:lstStyle/>
+          <a:p>
+            <a:pPr algn="ctr">
+              <a:defRPr sz="1200" b="1">
+                <a:solidFill>
+                  <a:srgbClr val="FFFFFF"/>
+                </a:solidFill>
+              </a:defRPr>
+            </a:pPr>
+            <a:r>
+              <a:t>Surge</a:t>
+            </a:r>
+          </a:p>
+        </p:txBody>
+      </p:sp>
+      <p:sp>
+        <p:nvSpPr>
+          <p:cNvPr id="17" name="TextBox 16"/>
+          <p:cNvSpPr txBox="1"/>
+          <p:nvPr/>
+        </p:nvSpPr>
+        <p:spPr>
+          <a:xfrm>
+            <a:off x="2148840" y="5678424"/>
+            <a:ext cx="9418320" cy="502920"/>
+          </a:xfrm>
+          <a:prstGeom prst="rect">
+            <a:avLst/>
+          </a:prstGeom>
+          <a:noFill/>
+        </p:spPr>
+        <p:txBody>
+          <a:bodyPr wrap="none">
+            <a:spAutoFit/>
+          </a:bodyPr>
+          <a:lstStyle/>
+          <a:p>
+            <a:pPr>
+              <a:defRPr sz="1500">
+                <a:solidFill>
+                  <a:srgbClr val="22222B"/>
+                </a:solidFill>
+              </a:defRPr>
+            </a:pPr>
+            <a:r>
+              <a:t>Emergency: parallel blast to top 5 ranked donors, one-shot.</a:t>
+            </a:r>
+          </a:p>
+        </p:txBody>
+      </p:sp>
+    </p:spTree>
+  </p:cSld>
+  <p:clrMapOvr>
+    <a:masterClrMapping/>
+  </p:clrMapOvr>
+</p:sld>
+</file>
+
+<file path=ppt/slides/slide12.xml><?xml version="1.0" encoding="utf-8"?>
+<p:sld xmlns:a="http://schemas.openxmlformats.org/drawingml/2006/main" xmlns:p="http://schemas.openxmlformats.org/presentationml/2006/main" xmlns:r="http://schemas.openxmlformats.org/officeDocument/2006/relationships">
+  <p:cSld>
+    <p:bg>
+      <p:bgPr>
+        <a:solidFill>
+          <a:srgbClr val="FFFFFF"/>
+        </a:solidFill>
+        <a:effectLst/>
+      </p:bgPr>
+    </p:bg>
+    <p:spTree>
+      <p:nvGrpSpPr>
+        <p:cNvPr id="1" name=""/>
+        <p:cNvGrpSpPr/>
+        <p:nvPr/>
+      </p:nvGrpSpPr>
+      <p:grpSpPr/>
+      <p:sp>
+        <p:nvSpPr>
+          <p:cNvPr id="2" name="Rectangle 1"/>
+          <p:cNvSpPr/>
+          <p:nvPr/>
+        </p:nvSpPr>
+        <p:spPr>
+          <a:xfrm>
+            <a:off x="0" y="0"/>
+            <a:ext cx="12191695" cy="109728"/>
+          </a:xfrm>
+          <a:prstGeom prst="rect">
+            <a:avLst/>
+          </a:prstGeom>
+          <a:solidFill>
+            <a:srgbClr val="C8102E"/>
+          </a:solidFill>
+          <a:ln>
+            <a:noFill/>
+          </a:ln>
+        </p:spPr>
+        <p:style>
+          <a:lnRef idx="1">
+            <a:schemeClr val="accent1"/>
+          </a:lnRef>
+          <a:fillRef idx="3">
+            <a:schemeClr val="accent1"/>
+          </a:fillRef>
+          <a:effectRef idx="2">
+            <a:schemeClr val="accent1"/>
+          </a:effectRef>
+          <a:fontRef idx="minor">
+            <a:schemeClr val="lt1"/>
+          </a:fontRef>
+        </p:style>
+        <p:txBody>
+          <a:bodyPr rtlCol="0" anchor="ctr"/>
+          <a:lstStyle/>
+          <a:p>
+            <a:pPr algn="ctr"/>
+          </a:p>
+        </p:txBody>
+      </p:sp>
+      <p:sp>
+        <p:nvSpPr>
+          <p:cNvPr id="3" name="TextBox 2"/>
+          <p:cNvSpPr txBox="1"/>
+          <p:nvPr/>
+        </p:nvSpPr>
+        <p:spPr>
+          <a:xfrm>
+            <a:off x="594360" y="457200"/>
+            <a:ext cx="11155680" cy="1051560"/>
+          </a:xfrm>
+          <a:prstGeom prst="rect">
+            <a:avLst/>
+          </a:prstGeom>
+          <a:noFill/>
+        </p:spPr>
+        <p:txBody>
+          <a:bodyPr wrap="none">
+            <a:spAutoFit/>
+          </a:bodyPr>
+          <a:lstStyle/>
+          <a:p>
+            <a:pPr>
+              <a:defRPr sz="3400" b="1">
+                <a:solidFill>
+                  <a:srgbClr val="C8102E"/>
+                </a:solidFill>
+              </a:defRPr>
+            </a:pPr>
+            <a:r>
+              <a:t>System architecture</a:t>
+            </a:r>
+          </a:p>
+          <a:p>
+            <a:pPr>
+              <a:spcBef>
+                <a:spcPts val="400"/>
+              </a:spcBef>
+              <a:defRPr sz="1500">
+                <a:solidFill>
+                  <a:srgbClr val="5A6068"/>
+                </a:solidFill>
+              </a:defRPr>
+            </a:pPr>
+            <a:r>
+              <a:t>Live on AWS EC2 — nginx :80 → Streamlit + MailPit</a:t>
+            </a:r>
+          </a:p>
+        </p:txBody>
+      </p:sp>
+      <p:sp>
+        <p:nvSpPr>
+          <p:cNvPr id="4" name="TextBox 3"/>
+          <p:cNvSpPr txBox="1"/>
+          <p:nvPr/>
+        </p:nvSpPr>
+        <p:spPr>
+          <a:xfrm>
+            <a:off x="640080" y="1371600"/>
+            <a:ext cx="10881360" cy="5029200"/>
+          </a:xfrm>
+          <a:prstGeom prst="rect">
+            <a:avLst/>
+          </a:prstGeom>
+          <a:noFill/>
+        </p:spPr>
+        <p:txBody>
+          <a:bodyPr wrap="square">
+            <a:spAutoFit/>
+          </a:bodyPr>
+          <a:lstStyle/>
+          <a:p>
+            <a:pPr>
+              <a:lnSpc>
+                <a:spcPct val="125000"/>
+              </a:lnSpc>
+              <a:spcAft>
+                <a:spcPts val="1400"/>
+              </a:spcAft>
+              <a:defRPr sz="1500">
+                <a:solidFill>
+                  <a:srgbClr val="22222B"/>
+                </a:solidFill>
+              </a:defRPr>
+            </a:pPr>
+            <a:r>
+              <a:t>Coordinator &amp; Donor → nginx :80 → Streamlit + MailPit (/mail)</a:t>
+            </a:r>
+          </a:p>
+          <a:p>
+            <a:pPr>
+              <a:lnSpc>
+                <a:spcPct val="125000"/>
+              </a:lnSpc>
+              <a:spcAft>
+                <a:spcPts val="1400"/>
+              </a:spcAft>
+              <a:defRPr sz="1500">
+                <a:solidFill>
+                  <a:srgbClr val="22222B"/>
+                </a:solidFill>
+              </a:defRPr>
+            </a:pPr>
+            <a:r>
+              <a:t>Autonomous Agent: forecast → ML rank → Bedrock email → reply → DynamoDB</a:t>
+            </a:r>
+          </a:p>
+          <a:p>
+            <a:pPr>
+              <a:lnSpc>
+                <a:spcPct val="125000"/>
+              </a:lnSpc>
+              <a:spcAft>
+                <a:spcPts val="1400"/>
+              </a:spcAft>
+              <a:defRPr sz="1500">
+                <a:solidFill>
+                  <a:srgbClr val="22222B"/>
+                </a:solidFill>
+              </a:defRPr>
+            </a:pPr>
+            <a:r>
+              <a:t>AWS: DynamoDB (state) + Bedrock Haiku 4.5 (multilingual AI)</a:t>
+            </a:r>
+          </a:p>
+          <a:p>
+            <a:pPr>
+              <a:lnSpc>
+                <a:spcPct val="125000"/>
+              </a:lnSpc>
+              <a:spcAft>
+                <a:spcPts val="1400"/>
+              </a:spcAft>
+              <a:defRPr sz="1500">
+                <a:solidFill>
+                  <a:srgbClr val="22222B"/>
+                </a:solidFill>
+              </a:defRPr>
+            </a:pPr>
+            <a:r>
+              <a:t>See docs/assets/architecture-diagram.svg for full diagram.</a:t>
+            </a:r>
+          </a:p>
+        </p:txBody>
+      </p:sp>
+    </p:spTree>
+  </p:cSld>
+  <p:clrMapOvr>
+    <a:masterClrMapping/>
+  </p:clrMapOvr>
+</p:sld>
+</file>
+
+<file path=ppt/slides/slide13.xml><?xml version="1.0" encoding="utf-8"?>
+<p:sld xmlns:a="http://schemas.openxmlformats.org/drawingml/2006/main" xmlns:p="http://schemas.openxmlformats.org/presentationml/2006/main" xmlns:r="http://schemas.openxmlformats.org/officeDocument/2006/relationships">
+  <p:cSld>
+    <p:bg>
+      <p:bgPr>
+        <a:solidFill>
+          <a:srgbClr val="F8F9FB"/>
+        </a:solidFill>
+        <a:effectLst/>
+      </p:bgPr>
+    </p:bg>
+    <p:spTree>
+      <p:nvGrpSpPr>
+        <p:cNvPr id="1" name=""/>
+        <p:cNvGrpSpPr/>
+        <p:nvPr/>
+      </p:nvGrpSpPr>
+      <p:grpSpPr/>
+      <p:sp>
+        <p:nvSpPr>
+          <p:cNvPr id="2" name="Rectangle 1"/>
+          <p:cNvSpPr/>
+          <p:nvPr/>
+        </p:nvSpPr>
+        <p:spPr>
+          <a:xfrm>
+            <a:off x="0" y="0"/>
+            <a:ext cx="12191695" cy="109728"/>
+          </a:xfrm>
+          <a:prstGeom prst="rect">
+            <a:avLst/>
+          </a:prstGeom>
+          <a:solidFill>
+            <a:srgbClr val="C8102E"/>
+          </a:solidFill>
+          <a:ln>
+            <a:noFill/>
+          </a:ln>
+        </p:spPr>
+        <p:style>
+          <a:lnRef idx="1">
+            <a:schemeClr val="accent1"/>
+          </a:lnRef>
+          <a:fillRef idx="3">
+            <a:schemeClr val="accent1"/>
+          </a:fillRef>
+          <a:effectRef idx="2">
+            <a:schemeClr val="accent1"/>
+          </a:effectRef>
+          <a:fontRef idx="minor">
+            <a:schemeClr val="lt1"/>
+          </a:fontRef>
+        </p:style>
+        <p:txBody>
+          <a:bodyPr rtlCol="0" anchor="ctr"/>
+          <a:lstStyle/>
+          <a:p>
+            <a:pPr algn="ctr"/>
+          </a:p>
+        </p:txBody>
+      </p:sp>
+      <p:sp>
+        <p:nvSpPr>
+          <p:cNvPr id="3" name="TextBox 2"/>
+          <p:cNvSpPr txBox="1"/>
+          <p:nvPr/>
+        </p:nvSpPr>
+        <p:spPr>
+          <a:xfrm>
+            <a:off x="594360" y="457200"/>
+            <a:ext cx="11155680" cy="1051560"/>
+          </a:xfrm>
+          <a:prstGeom prst="rect">
+            <a:avLst/>
+          </a:prstGeom>
+          <a:noFill/>
+        </p:spPr>
+        <p:txBody>
+          <a:bodyPr wrap="none">
+            <a:spAutoFit/>
+          </a:bodyPr>
+          <a:lstStyle/>
+          <a:p>
+            <a:pPr>
+              <a:defRPr sz="3400" b="1">
+                <a:solidFill>
+                  <a:srgbClr val="C8102E"/>
+                </a:solidFill>
+              </a:defRPr>
+            </a:pPr>
+            <a:r>
+              <a:t>AWS end-to-end</a:t>
+            </a:r>
+          </a:p>
+          <a:p>
+            <a:pPr>
+              <a:spcBef>
+                <a:spcPts val="400"/>
+              </a:spcBef>
+              <a:defRPr sz="1500">
+                <a:solidFill>
+                  <a:srgbClr val="5A6068"/>
+                </a:solidFill>
+              </a:defRPr>
+            </a:pPr>
+            <a:r>
+              <a:t>Production-shaped demo deployment</a:t>
+            </a:r>
+          </a:p>
+        </p:txBody>
+      </p:sp>
+      <p:sp>
+        <p:nvSpPr>
+          <p:cNvPr id="4" name="Rounded Rectangle 3"/>
+          <p:cNvSpPr/>
+          <p:nvPr/>
+        </p:nvSpPr>
+        <p:spPr>
+          <a:xfrm>
+            <a:off x="594360" y="1417320"/>
+            <a:ext cx="5486400" cy="4892040"/>
+          </a:xfrm>
+          <a:prstGeom prst="roundRect">
+            <a:avLst/>
+          </a:prstGeom>
+          <a:solidFill>
+            <a:srgbClr val="FFFFFF"/>
+          </a:solidFill>
+          <a:ln w="15240">
+            <a:solidFill>
+              <a:srgbClr val="FDE8EA"/>
+            </a:solidFill>
+          </a:ln>
+        </p:spPr>
+        <p:style>
+          <a:lnRef idx="1">
+            <a:schemeClr val="accent1"/>
+          </a:lnRef>
+          <a:fillRef idx="3">
+            <a:schemeClr val="accent1"/>
+          </a:fillRef>
+          <a:effectRef idx="2">
+            <a:schemeClr val="accent1"/>
+          </a:effectRef>
+          <a:fontRef idx="minor">
+            <a:schemeClr val="lt1"/>
+          </a:fontRef>
+        </p:style>
+        <p:txBody>
+          <a:bodyPr rtlCol="0" anchor="ctr"/>
+          <a:lstStyle/>
+          <a:p>
+            <a:pPr algn="ctr"/>
+          </a:p>
+        </p:txBody>
+      </p:sp>
+      <p:sp>
+        <p:nvSpPr>
+          <p:cNvPr id="5" name="TextBox 4"/>
+          <p:cNvSpPr txBox="1"/>
+          <p:nvPr/>
+        </p:nvSpPr>
+        <p:spPr>
+          <a:xfrm>
+            <a:off x="822960" y="1600200"/>
+            <a:ext cx="5029200" cy="411480"/>
+          </a:xfrm>
+          <a:prstGeom prst="rect">
+            <a:avLst/>
+          </a:prstGeom>
+          <a:noFill/>
+        </p:spPr>
+        <p:txBody>
+          <a:bodyPr wrap="none">
+            <a:spAutoFit/>
+          </a:bodyPr>
+          <a:lstStyle/>
+          <a:p>
+            <a:pPr>
+              <a:defRPr sz="1800" b="1">
+                <a:solidFill>
+                  <a:srgbClr val="C8102E"/>
+                </a:solidFill>
+              </a:defRPr>
+            </a:pPr>
+            <a:r>
+              <a:t>Infrastructure</a:t>
+            </a:r>
+          </a:p>
+        </p:txBody>
+      </p:sp>
+      <p:sp>
+        <p:nvSpPr>
+          <p:cNvPr id="6" name="TextBox 5"/>
+          <p:cNvSpPr txBox="1"/>
+          <p:nvPr/>
+        </p:nvSpPr>
+        <p:spPr>
+          <a:xfrm>
+            <a:off x="822960" y="2011680"/>
+            <a:ext cx="4983480" cy="5029200"/>
+          </a:xfrm>
+          <a:prstGeom prst="rect">
+            <a:avLst/>
+          </a:prstGeom>
+          <a:noFill/>
+        </p:spPr>
+        <p:txBody>
+          <a:bodyPr wrap="square">
+            <a:spAutoFit/>
+          </a:bodyPr>
+          <a:lstStyle/>
+          <a:p>
+            <a:pPr>
+              <a:lnSpc>
+                <a:spcPct val="125000"/>
+              </a:lnSpc>
+              <a:spcAft>
+                <a:spcPts val="1400"/>
+              </a:spcAft>
+              <a:defRPr sz="1500">
+                <a:solidFill>
+                  <a:srgbClr val="22222B"/>
+                </a:solidFill>
+              </a:defRPr>
+            </a:pPr>
+            <a:r>
+              <a:t>EC2 t3.small, Amazon Linux 2023, nginx on port 80.</a:t>
+            </a:r>
+          </a:p>
+          <a:p>
+            <a:pPr>
+              <a:lnSpc>
+                <a:spcPct val="125000"/>
+              </a:lnSpc>
+              <a:spcAft>
+                <a:spcPts val="1400"/>
+              </a:spcAft>
+              <a:defRPr sz="1500">
+                <a:solidFill>
+                  <a:srgbClr val="22222B"/>
+                </a:solidFill>
+              </a:defRPr>
+            </a:pPr>
+            <a:r>
+              <a:t>systemd service runs Streamlit + MailPit + agent 24/7.</a:t>
+            </a:r>
+          </a:p>
+          <a:p>
+            <a:pPr>
+              <a:lnSpc>
+                <a:spcPct val="125000"/>
+              </a:lnSpc>
+              <a:spcAft>
+                <a:spcPts val="1400"/>
+              </a:spcAft>
+              <a:defRPr sz="1500">
+                <a:solidFill>
+                  <a:srgbClr val="22222B"/>
+                </a:solidFill>
+              </a:defRPr>
+            </a:pPr>
+            <a:r>
+              <a:t>IAM role SpandanEC2Role — DynamoDB + Bedrock, no keys on disk.</a:t>
+            </a:r>
+          </a:p>
+          <a:p>
+            <a:pPr>
+              <a:lnSpc>
+                <a:spcPct val="125000"/>
+              </a:lnSpc>
+              <a:spcAft>
+                <a:spcPts val="1400"/>
+              </a:spcAft>
+              <a:defRPr sz="1500">
+                <a:solidFill>
+                  <a:srgbClr val="22222B"/>
+                </a:solidFill>
+              </a:defRPr>
+            </a:pPr>
+            <a:r>
+              <a:t>Security group: 80 public, 22 SSH restricted.</a:t>
+            </a:r>
+          </a:p>
+        </p:txBody>
+      </p:sp>
+      <p:sp>
+        <p:nvSpPr>
+          <p:cNvPr id="7" name="Rounded Rectangle 6"/>
+          <p:cNvSpPr/>
+          <p:nvPr/>
+        </p:nvSpPr>
+        <p:spPr>
+          <a:xfrm>
+            <a:off x="6263640" y="1417320"/>
+            <a:ext cx="5486400" cy="4892040"/>
+          </a:xfrm>
+          <a:prstGeom prst="roundRect">
+            <a:avLst/>
+          </a:prstGeom>
+          <a:solidFill>
+            <a:srgbClr val="FFFFFF"/>
+          </a:solidFill>
+          <a:ln w="15240">
+            <a:solidFill>
+              <a:srgbClr val="FDE8EA"/>
+            </a:solidFill>
+          </a:ln>
+        </p:spPr>
+        <p:style>
+          <a:lnRef idx="1">
+            <a:schemeClr val="accent1"/>
+          </a:lnRef>
+          <a:fillRef idx="3">
+            <a:schemeClr val="accent1"/>
+          </a:fillRef>
+          <a:effectRef idx="2">
+            <a:schemeClr val="accent1"/>
+          </a:effectRef>
+          <a:fontRef idx="minor">
+            <a:schemeClr val="lt1"/>
+          </a:fontRef>
+        </p:style>
+        <p:txBody>
+          <a:bodyPr rtlCol="0" anchor="ctr"/>
+          <a:lstStyle/>
+          <a:p>
+            <a:pPr algn="ctr"/>
+          </a:p>
+        </p:txBody>
+      </p:sp>
+      <p:sp>
+        <p:nvSpPr>
+          <p:cNvPr id="8" name="TextBox 7"/>
+          <p:cNvSpPr txBox="1"/>
+          <p:nvPr/>
+        </p:nvSpPr>
+        <p:spPr>
+          <a:xfrm>
+            <a:off x="6492240" y="1600200"/>
+            <a:ext cx="5029200" cy="411480"/>
+          </a:xfrm>
+          <a:prstGeom prst="rect">
+            <a:avLst/>
+          </a:prstGeom>
+          <a:noFill/>
+        </p:spPr>
+        <p:txBody>
+          <a:bodyPr wrap="none">
+            <a:spAutoFit/>
+          </a:bodyPr>
+          <a:lstStyle/>
+          <a:p>
+            <a:pPr>
+              <a:defRPr sz="1800" b="1">
+                <a:solidFill>
+                  <a:srgbClr val="C8102E"/>
+                </a:solidFill>
+              </a:defRPr>
+            </a:pPr>
+            <a:r>
+              <a:t>Managed services</a:t>
+            </a:r>
+          </a:p>
+        </p:txBody>
+      </p:sp>
+      <p:sp>
+        <p:nvSpPr>
+          <p:cNvPr id="9" name="TextBox 8"/>
+          <p:cNvSpPr txBox="1"/>
+          <p:nvPr/>
+        </p:nvSpPr>
+        <p:spPr>
+          <a:xfrm>
+            <a:off x="6492240" y="2011680"/>
+            <a:ext cx="4983480" cy="5029200"/>
+          </a:xfrm>
+          <a:prstGeom prst="rect">
+            <a:avLst/>
+          </a:prstGeom>
+          <a:noFill/>
+        </p:spPr>
+        <p:txBody>
+          <a:bodyPr wrap="square">
+            <a:spAutoFit/>
+          </a:bodyPr>
+          <a:lstStyle/>
+          <a:p>
+            <a:pPr>
+              <a:lnSpc>
+                <a:spcPct val="125000"/>
+              </a:lnSpc>
+              <a:spcAft>
+                <a:spcPts val="1400"/>
+              </a:spcAft>
+              <a:defRPr sz="1500">
+                <a:solidFill>
+                  <a:srgbClr val="22222B"/>
+                </a:solidFill>
+              </a:defRPr>
+            </a:pPr>
+            <a:r>
+              <a:t>DynamoDB: donors, bridges, messages, donations, agent_log.</a:t>
+            </a:r>
+          </a:p>
+          <a:p>
+            <a:pPr>
+              <a:lnSpc>
+                <a:spcPct val="125000"/>
+              </a:lnSpc>
+              <a:spcAft>
+                <a:spcPts val="1400"/>
+              </a:spcAft>
+              <a:defRPr sz="1500">
+                <a:solidFill>
+                  <a:srgbClr val="22222B"/>
+                </a:solidFill>
+              </a:defRPr>
+            </a:pPr>
+            <a:r>
+              <a:t>Bedrock Runtime: Claude Haiku 4.5 in us-east-1.</a:t>
+            </a:r>
+          </a:p>
+          <a:p>
+            <a:pPr>
+              <a:lnSpc>
+                <a:spcPct val="125000"/>
+              </a:lnSpc>
+              <a:spcAft>
+                <a:spcPts val="1400"/>
+              </a:spcAft>
+              <a:defRPr sz="1500">
+                <a:solidFill>
+                  <a:srgbClr val="22222B"/>
+                </a:solidFill>
+              </a:defRPr>
+            </a:pPr>
+            <a:r>
+              <a:t>Optional S3 for ML model artifact; SES swap for production email.</a:t>
+            </a:r>
+          </a:p>
+          <a:p>
+            <a:pPr>
+              <a:lnSpc>
+                <a:spcPct val="125000"/>
+              </a:lnSpc>
+              <a:spcAft>
+                <a:spcPts val="1400"/>
+              </a:spcAft>
+              <a:defRPr sz="1500">
+                <a:solidFill>
+                  <a:srgbClr val="22222B"/>
+                </a:solidFill>
+              </a:defRPr>
+            </a:pPr>
+            <a:r>
+              <a:t>Full source on GitHub; Bitly short link for judges on mobile.</a:t>
+            </a:r>
+          </a:p>
+        </p:txBody>
+      </p:sp>
+    </p:spTree>
+  </p:cSld>
+  <p:clrMapOvr>
+    <a:masterClrMapping/>
+  </p:clrMapOvr>
+</p:sld>
+</file>
+
+<file path=ppt/slides/slide14.xml><?xml version="1.0" encoding="utf-8"?>
+<p:sld xmlns:a="http://schemas.openxmlformats.org/drawingml/2006/main" xmlns:p="http://schemas.openxmlformats.org/presentationml/2006/main" xmlns:r="http://schemas.openxmlformats.org/officeDocument/2006/relationships">
+  <p:cSld>
+    <p:bg>
+      <p:bgPr>
+        <a:solidFill>
+          <a:srgbClr val="FFFFFF"/>
+        </a:solidFill>
+        <a:effectLst/>
+      </p:bgPr>
+    </p:bg>
+    <p:spTree>
+      <p:nvGrpSpPr>
+        <p:cNvPr id="1" name=""/>
+        <p:cNvGrpSpPr/>
+        <p:nvPr/>
+      </p:nvGrpSpPr>
+      <p:grpSpPr/>
+      <p:sp>
+        <p:nvSpPr>
+          <p:cNvPr id="2" name="Rectangle 1"/>
+          <p:cNvSpPr/>
+          <p:nvPr/>
+        </p:nvSpPr>
+        <p:spPr>
+          <a:xfrm>
+            <a:off x="0" y="0"/>
+            <a:ext cx="12191695" cy="109728"/>
+          </a:xfrm>
+          <a:prstGeom prst="rect">
+            <a:avLst/>
+          </a:prstGeom>
+          <a:solidFill>
+            <a:srgbClr val="C8102E"/>
+          </a:solidFill>
+          <a:ln>
+            <a:noFill/>
+          </a:ln>
+        </p:spPr>
+        <p:style>
+          <a:lnRef idx="1">
+            <a:schemeClr val="accent1"/>
+          </a:lnRef>
+          <a:fillRef idx="3">
+            <a:schemeClr val="accent1"/>
+          </a:fillRef>
+          <a:effectRef idx="2">
+            <a:schemeClr val="accent1"/>
+          </a:effectRef>
+          <a:fontRef idx="minor">
+            <a:schemeClr val="lt1"/>
+          </a:fontRef>
+        </p:style>
+        <p:txBody>
+          <a:bodyPr rtlCol="0" anchor="ctr"/>
+          <a:lstStyle/>
+          <a:p>
+            <a:pPr algn="ctr"/>
+          </a:p>
+        </p:txBody>
+      </p:sp>
+      <p:sp>
+        <p:nvSpPr>
+          <p:cNvPr id="3" name="TextBox 2"/>
+          <p:cNvSpPr txBox="1"/>
+          <p:nvPr/>
+        </p:nvSpPr>
+        <p:spPr>
+          <a:xfrm>
+            <a:off x="594360" y="457200"/>
+            <a:ext cx="11155680" cy="1051560"/>
+          </a:xfrm>
+          <a:prstGeom prst="rect">
+            <a:avLst/>
+          </a:prstGeom>
+          <a:noFill/>
+        </p:spPr>
+        <p:txBody>
+          <a:bodyPr wrap="none">
+            <a:spAutoFit/>
+          </a:bodyPr>
+          <a:lstStyle/>
+          <a:p>
+            <a:pPr>
+              <a:defRPr sz="3400" b="1">
+                <a:solidFill>
+                  <a:srgbClr val="C8102E"/>
+                </a:solidFill>
+              </a:defRPr>
+            </a:pPr>
+            <a:r>
+              <a:t>Live demo — try it now</a:t>
+            </a:r>
+          </a:p>
+        </p:txBody>
+      </p:sp>
+      <p:pic>
+        <p:nvPicPr>
+          <p:cNvPr id="4" name="Picture 3" descr="qr-bitly.png"/>
+          <p:cNvPicPr>
+            <a:picLocks noChangeAspect="1"/>
+          </p:cNvPicPr>
+          <p:nvPr/>
+        </p:nvPicPr>
+        <p:blipFill>
+          <a:blip r:embed="rId2"/>
+          <a:stretch>
+            <a:fillRect/>
+          </a:stretch>
+        </p:blipFill>
+        <p:spPr>
+          <a:xfrm>
+            <a:off x="502920" y="1508760"/>
+            <a:ext cx="1965960" cy="1965960"/>
+          </a:xfrm>
+          <a:prstGeom prst="rect">
+            <a:avLst/>
+          </a:prstGeom>
+        </p:spPr>
+      </p:pic>
+      <p:sp>
+        <p:nvSpPr>
+          <p:cNvPr id="5" name="TextBox 4"/>
+          <p:cNvSpPr txBox="1"/>
+          <p:nvPr/>
+        </p:nvSpPr>
+        <p:spPr>
+          <a:xfrm>
+            <a:off x="457200" y="3611880"/>
+            <a:ext cx="2057400" cy="822960"/>
+          </a:xfrm>
+          <a:prstGeom prst="rect">
+            <a:avLst/>
+          </a:prstGeom>
+          <a:noFill/>
+        </p:spPr>
+        <p:txBody>
+          <a:bodyPr wrap="none">
+            <a:spAutoFit/>
+          </a:bodyPr>
+          <a:lstStyle/>
+          <a:p>
+            <a:pPr algn="ctr">
+              <a:defRPr sz="1200" b="1">
+                <a:solidFill>
+                  <a:srgbClr val="C8102E"/>
+                </a:solidFill>
+              </a:defRPr>
+            </a:pPr>
+            <a:r>
+              <a:t>Share link (WhatsApp)</a:t>
+            </a:r>
+          </a:p>
+          <a:p>
+            <a:pPr algn="ctr">
+              <a:defRPr sz="800">
+                <a:solidFill>
+                  <a:srgbClr val="5A6068"/>
+                </a:solidFill>
+              </a:defRPr>
+            </a:pPr>
+            <a:r>
+              <a:t>bit.ly/4vCaAQ4</a:t>
+            </a:r>
+          </a:p>
+        </p:txBody>
+      </p:sp>
+      <p:pic>
+        <p:nvPicPr>
+          <p:cNvPr id="6" name="Picture 5" descr="qr-dashboard.png"/>
+          <p:cNvPicPr>
+            <a:picLocks noChangeAspect="1"/>
+          </p:cNvPicPr>
+          <p:nvPr/>
+        </p:nvPicPr>
+        <p:blipFill>
+          <a:blip r:embed="rId3"/>
+          <a:stretch>
+            <a:fillRect/>
+          </a:stretch>
+        </p:blipFill>
+        <p:spPr>
+          <a:xfrm>
+            <a:off x="3246120" y="1508760"/>
+            <a:ext cx="1965960" cy="1965960"/>
+          </a:xfrm>
+          <a:prstGeom prst="rect">
+            <a:avLst/>
+          </a:prstGeom>
+        </p:spPr>
+      </p:pic>
+      <p:sp>
+        <p:nvSpPr>
+          <p:cNvPr id="7" name="TextBox 6"/>
+          <p:cNvSpPr txBox="1"/>
+          <p:nvPr/>
+        </p:nvSpPr>
+        <p:spPr>
+          <a:xfrm>
+            <a:off x="3200400" y="3611880"/>
+            <a:ext cx="2057400" cy="822960"/>
+          </a:xfrm>
+          <a:prstGeom prst="rect">
+            <a:avLst/>
+          </a:prstGeom>
+          <a:noFill/>
+        </p:spPr>
+        <p:txBody>
+          <a:bodyPr wrap="none">
+            <a:spAutoFit/>
+          </a:bodyPr>
+          <a:lstStyle/>
+          <a:p>
+            <a:pPr algn="ctr">
+              <a:defRPr sz="1200" b="1">
+                <a:solidFill>
+                  <a:srgbClr val="C8102E"/>
+                </a:solidFill>
+              </a:defRPr>
+            </a:pPr>
+            <a:r>
+              <a:t>Dashboard</a:t>
+            </a:r>
+          </a:p>
+          <a:p>
+            <a:pPr algn="ctr">
+              <a:defRPr sz="800">
+                <a:solidFill>
+                  <a:srgbClr val="5A6068"/>
+                </a:solidFill>
+              </a:defRPr>
+            </a:pPr>
+            <a:r>
+              <a:t>98.84.159.117</a:t>
+            </a:r>
+          </a:p>
+        </p:txBody>
+      </p:sp>
+      <p:pic>
+        <p:nvPicPr>
+          <p:cNvPr id="8" name="Picture 7" descr="qr-mailpit.png"/>
+          <p:cNvPicPr>
+            <a:picLocks noChangeAspect="1"/>
+          </p:cNvPicPr>
+          <p:nvPr/>
+        </p:nvPicPr>
+        <p:blipFill>
+          <a:blip r:embed="rId4"/>
+          <a:stretch>
+            <a:fillRect/>
+          </a:stretch>
+        </p:blipFill>
+        <p:spPr>
+          <a:xfrm>
+            <a:off x="5989320" y="1508760"/>
+            <a:ext cx="1965960" cy="1965960"/>
+          </a:xfrm>
+          <a:prstGeom prst="rect">
+            <a:avLst/>
+          </a:prstGeom>
+        </p:spPr>
+      </p:pic>
+      <p:sp>
+        <p:nvSpPr>
+          <p:cNvPr id="9" name="TextBox 8"/>
+          <p:cNvSpPr txBox="1"/>
+          <p:nvPr/>
+        </p:nvSpPr>
+        <p:spPr>
+          <a:xfrm>
+            <a:off x="5943600" y="3611880"/>
+            <a:ext cx="2057400" cy="822960"/>
+          </a:xfrm>
+          <a:prstGeom prst="rect">
+            <a:avLst/>
+          </a:prstGeom>
+          <a:noFill/>
+        </p:spPr>
+        <p:txBody>
+          <a:bodyPr wrap="none">
+            <a:spAutoFit/>
+          </a:bodyPr>
+          <a:lstStyle/>
+          <a:p>
+            <a:pPr algn="ctr">
+              <a:defRPr sz="1200" b="1">
+                <a:solidFill>
+                  <a:srgbClr val="C8102E"/>
+                </a:solidFill>
+              </a:defRPr>
+            </a:pPr>
+            <a:r>
+              <a:t>MailPit inbox</a:t>
+            </a:r>
+          </a:p>
+          <a:p>
+            <a:pPr algn="ctr">
+              <a:defRPr sz="800">
+                <a:solidFill>
+                  <a:srgbClr val="5A6068"/>
+                </a:solidFill>
+              </a:defRPr>
+            </a:pPr>
+            <a:r>
+              <a:t>98.84.159.117/mail</a:t>
+            </a:r>
+          </a:p>
+        </p:txBody>
+      </p:sp>
+      <p:pic>
+        <p:nvPicPr>
+          <p:cNvPr id="10" name="Picture 9" descr="qr-github.png"/>
+          <p:cNvPicPr>
+            <a:picLocks noChangeAspect="1"/>
+          </p:cNvPicPr>
+          <p:nvPr/>
+        </p:nvPicPr>
+        <p:blipFill>
+          <a:blip r:embed="rId5"/>
+          <a:stretch>
+            <a:fillRect/>
+          </a:stretch>
+        </p:blipFill>
+        <p:spPr>
+          <a:xfrm>
+            <a:off x="8732520" y="1508760"/>
+            <a:ext cx="1965960" cy="1965960"/>
+          </a:xfrm>
+          <a:prstGeom prst="rect">
+            <a:avLst/>
+          </a:prstGeom>
+        </p:spPr>
+      </p:pic>
+      <p:sp>
+        <p:nvSpPr>
+          <p:cNvPr id="11" name="TextBox 10"/>
+          <p:cNvSpPr txBox="1"/>
+          <p:nvPr/>
+        </p:nvSpPr>
+        <p:spPr>
+          <a:xfrm>
+            <a:off x="8686800" y="3611880"/>
+            <a:ext cx="2057400" cy="822960"/>
+          </a:xfrm>
+          <a:prstGeom prst="rect">
+            <a:avLst/>
+          </a:prstGeom>
+          <a:noFill/>
+        </p:spPr>
+        <p:txBody>
+          <a:bodyPr wrap="none">
+            <a:spAutoFit/>
+          </a:bodyPr>
+          <a:lstStyle/>
+          <a:p>
+            <a:pPr algn="ctr">
+              <a:defRPr sz="1200" b="1">
+                <a:solidFill>
+                  <a:srgbClr val="C8102E"/>
+                </a:solidFill>
+              </a:defRPr>
+            </a:pPr>
+            <a:r>
+              <a:t>GitHub</a:t>
+            </a:r>
+          </a:p>
+          <a:p>
+            <a:pPr algn="ctr">
+              <a:defRPr sz="800">
+                <a:solidFill>
+                  <a:srgbClr val="5A6068"/>
+                </a:solidFill>
+              </a:defRPr>
+            </a:pPr>
+            <a:r>
+              <a:t>github.com/madhuri-gande/spa</a:t>
+            </a:r>
+          </a:p>
+        </p:txBody>
+      </p:sp>
+      <p:sp>
+        <p:nvSpPr>
+          <p:cNvPr id="12" name="TextBox 11"/>
+          <p:cNvSpPr txBox="1"/>
+          <p:nvPr/>
+        </p:nvSpPr>
+        <p:spPr>
+          <a:xfrm>
+            <a:off x="594360" y="4434840"/>
+            <a:ext cx="7772400" cy="5029200"/>
+          </a:xfrm>
+          <a:prstGeom prst="rect">
+            <a:avLst/>
+          </a:prstGeom>
+          <a:noFill/>
+        </p:spPr>
+        <p:txBody>
+          <a:bodyPr wrap="square">
+            <a:spAutoFit/>
+          </a:bodyPr>
+          <a:lstStyle/>
+          <a:p>
+            <a:pPr>
+              <a:lnSpc>
+                <a:spcPct val="125000"/>
+              </a:lnSpc>
+              <a:spcAft>
+                <a:spcPts val="1400"/>
+              </a:spcAft>
+              <a:defRPr sz="1400">
+                <a:solidFill>
+                  <a:srgbClr val="22222B"/>
+                </a:solidFill>
+              </a:defRPr>
+            </a:pPr>
+            <a:r>
+              <a:t>Login: coordinator (password shared at demo).</a:t>
+            </a:r>
+          </a:p>
+          <a:p>
+            <a:pPr>
+              <a:lnSpc>
+                <a:spcPct val="125000"/>
+              </a:lnSpc>
+              <a:spcAft>
+                <a:spcPts val="1400"/>
+              </a:spcAft>
+              <a:defRPr sz="1400">
+                <a:solidFill>
+                  <a:srgbClr val="22222B"/>
+                </a:solidFill>
+              </a:defRPr>
+            </a:pPr>
+            <a:r>
+              <a:t>Watch the 90-day patient pipeline, click 'Email next donor', open MailPit, click YES in the email — KPI updates without touching the keyboard again.</a:t>
+            </a:r>
+          </a:p>
+        </p:txBody>
+      </p:sp>
+      <p:sp>
+        <p:nvSpPr>
+          <p:cNvPr id="13" name="Rounded Rectangle 12"/>
+          <p:cNvSpPr/>
+          <p:nvPr/>
+        </p:nvSpPr>
+        <p:spPr>
+          <a:xfrm>
+            <a:off x="502920" y="5074920"/>
+            <a:ext cx="11155680" cy="1417320"/>
+          </a:xfrm>
+          <a:prstGeom prst="roundRect">
+            <a:avLst/>
+          </a:prstGeom>
+          <a:solidFill>
+            <a:srgbClr val="FDE8EA"/>
+          </a:solidFill>
+          <a:ln>
+            <a:noFill/>
+          </a:ln>
+        </p:spPr>
+        <p:style>
+          <a:lnRef idx="1">
+            <a:schemeClr val="accent1"/>
+          </a:lnRef>
+          <a:fillRef idx="3">
+            <a:schemeClr val="accent1"/>
+          </a:fillRef>
+          <a:effectRef idx="2">
+            <a:schemeClr val="accent1"/>
+          </a:effectRef>
+          <a:fontRef idx="minor">
+            <a:schemeClr val="lt1"/>
+          </a:fontRef>
+        </p:style>
+        <p:txBody>
+          <a:bodyPr rtlCol="0" anchor="ctr"/>
+          <a:lstStyle/>
+          <a:p>
+            <a:pPr algn="ctr"/>
+          </a:p>
+        </p:txBody>
+      </p:sp>
+      <p:sp>
+        <p:nvSpPr>
+          <p:cNvPr id="14" name="TextBox 13"/>
+          <p:cNvSpPr txBox="1"/>
+          <p:nvPr/>
+        </p:nvSpPr>
+        <p:spPr>
+          <a:xfrm>
+            <a:off x="685800" y="5257800"/>
+            <a:ext cx="10789920" cy="5029200"/>
+          </a:xfrm>
+          <a:prstGeom prst="rect">
+            <a:avLst/>
+          </a:prstGeom>
+          <a:noFill/>
+        </p:spPr>
+        <p:txBody>
+          <a:bodyPr wrap="square">
+            <a:spAutoFit/>
+          </a:bodyPr>
+          <a:lstStyle/>
+          <a:p>
+            <a:pPr>
+              <a:lnSpc>
+                <a:spcPct val="125000"/>
+              </a:lnSpc>
+              <a:spcAft>
+                <a:spcPts val="1400"/>
+              </a:spcAft>
+              <a:defRPr sz="1300">
+                <a:solidFill>
+                  <a:srgbClr val="C8102E"/>
+                </a:solidFill>
+              </a:defRPr>
+            </a:pPr>
+            <a:r>
+              <a:t>90-second demo script: Open dashboard → show pipeline → email donor #1 → MailPit → multilingual email → YES → confirmed KPI → optional surge on one patient.</a:t>
+            </a:r>
+          </a:p>
+        </p:txBody>
+      </p:sp>
+    </p:spTree>
+  </p:cSld>
+  <p:clrMapOvr>
+    <a:masterClrMapping/>
+  </p:clrMapOvr>
+</p:sld>
+</file>
+
+<file path=ppt/slides/slide15.xml><?xml version="1.0" encoding="utf-8"?>
+<p:sld xmlns:a="http://schemas.openxmlformats.org/drawingml/2006/main" xmlns:p="http://schemas.openxmlformats.org/presentationml/2006/main" xmlns:r="http://schemas.openxmlformats.org/officeDocument/2006/relationships">
+  <p:cSld>
+    <p:bg>
+      <p:bgPr>
+        <a:solidFill>
+          <a:srgbClr val="F8F9FB"/>
+        </a:solidFill>
+        <a:effectLst/>
+      </p:bgPr>
+    </p:bg>
+    <p:spTree>
+      <p:nvGrpSpPr>
+        <p:cNvPr id="1" name=""/>
+        <p:cNvGrpSpPr/>
+        <p:nvPr/>
+      </p:nvGrpSpPr>
+      <p:grpSpPr/>
+      <p:sp>
+        <p:nvSpPr>
+          <p:cNvPr id="2" name="Rectangle 1"/>
+          <p:cNvSpPr/>
+          <p:nvPr/>
+        </p:nvSpPr>
+        <p:spPr>
+          <a:xfrm>
+            <a:off x="0" y="0"/>
+            <a:ext cx="12191695" cy="109728"/>
+          </a:xfrm>
+          <a:prstGeom prst="rect">
+            <a:avLst/>
+          </a:prstGeom>
+          <a:solidFill>
+            <a:srgbClr val="C8102E"/>
+          </a:solidFill>
+          <a:ln>
+            <a:noFill/>
+          </a:ln>
+        </p:spPr>
+        <p:style>
+          <a:lnRef idx="1">
+            <a:schemeClr val="accent1"/>
+          </a:lnRef>
+          <a:fillRef idx="3">
+            <a:schemeClr val="accent1"/>
+          </a:fillRef>
+          <a:effectRef idx="2">
+            <a:schemeClr val="accent1"/>
+          </a:effectRef>
+          <a:fontRef idx="minor">
+            <a:schemeClr val="lt1"/>
+          </a:fontRef>
+        </p:style>
+        <p:txBody>
+          <a:bodyPr rtlCol="0" anchor="ctr"/>
+          <a:lstStyle/>
+          <a:p>
+            <a:pPr algn="ctr"/>
+          </a:p>
+        </p:txBody>
+      </p:sp>
+      <p:sp>
+        <p:nvSpPr>
+          <p:cNvPr id="3" name="TextBox 2"/>
+          <p:cNvSpPr txBox="1"/>
+          <p:nvPr/>
+        </p:nvSpPr>
+        <p:spPr>
+          <a:xfrm>
+            <a:off x="594360" y="457200"/>
+            <a:ext cx="11155680" cy="1051560"/>
+          </a:xfrm>
+          <a:prstGeom prst="rect">
+            <a:avLst/>
+          </a:prstGeom>
+          <a:noFill/>
+        </p:spPr>
+        <p:txBody>
+          <a:bodyPr wrap="none">
+            <a:spAutoFit/>
+          </a:bodyPr>
+          <a:lstStyle/>
+          <a:p>
+            <a:pPr>
+              <a:defRPr sz="3400" b="1">
+                <a:solidFill>
+                  <a:srgbClr val="C8102E"/>
+                </a:solidFill>
+              </a:defRPr>
+            </a:pPr>
+            <a:r>
+              <a:t>How we map to evaluation criteria</a:t>
+            </a:r>
+          </a:p>
+        </p:txBody>
+      </p:sp>
+      <p:sp>
+        <p:nvSpPr>
+          <p:cNvPr id="4" name="TextBox 3"/>
+          <p:cNvSpPr txBox="1"/>
+          <p:nvPr/>
+        </p:nvSpPr>
+        <p:spPr>
+          <a:xfrm>
+            <a:off x="594360" y="1298448"/>
+            <a:ext cx="10972800" cy="914400"/>
+          </a:xfrm>
+          <a:prstGeom prst="rect">
+            <a:avLst/>
+          </a:prstGeom>
+          <a:noFill/>
+        </p:spPr>
+        <p:txBody>
+          <a:bodyPr wrap="square">
+            <a:spAutoFit/>
+          </a:bodyPr>
+          <a:lstStyle/>
+          <a:p>
+            <a:pPr>
+              <a:defRPr sz="1400" b="1">
+                <a:solidFill>
+                  <a:srgbClr val="C8102E"/>
+                </a:solidFill>
+              </a:defRPr>
+            </a:pPr>
+            <a:r>
+              <a:t>Practicality &amp; scalability (20%)</a:t>
+            </a:r>
+          </a:p>
+          <a:p>
+            <a:pPr>
+              <a:spcBef>
+                <a:spcPts val="300"/>
+              </a:spcBef>
+              <a:defRPr sz="1200">
+                <a:solidFill>
+                  <a:srgbClr val="22222B"/>
+                </a:solidFill>
+              </a:defRPr>
+            </a:pPr>
+            <a:r>
+              <a:t>Real cadence forecasting over 90 days, per-donor cooldowns, sequential pacing to avoid over-mobilization, surge for emergencies, SES-ready email backend, DynamoDB on-demand.</a:t>
+            </a:r>
+          </a:p>
+        </p:txBody>
+      </p:sp>
+      <p:sp>
+        <p:nvSpPr>
+          <p:cNvPr id="5" name="TextBox 4"/>
+          <p:cNvSpPr txBox="1"/>
+          <p:nvPr/>
+        </p:nvSpPr>
+        <p:spPr>
+          <a:xfrm>
+            <a:off x="594360" y="2322576"/>
+            <a:ext cx="10972800" cy="914400"/>
+          </a:xfrm>
+          <a:prstGeom prst="rect">
+            <a:avLst/>
+          </a:prstGeom>
+          <a:noFill/>
+        </p:spPr>
+        <p:txBody>
+          <a:bodyPr wrap="square">
+            <a:spAutoFit/>
+          </a:bodyPr>
+          <a:lstStyle/>
+          <a:p>
+            <a:pPr>
+              <a:defRPr sz="1400" b="1">
+                <a:solidFill>
+                  <a:srgbClr val="C8102E"/>
+                </a:solidFill>
+              </a:defRPr>
+            </a:pPr>
+            <a:r>
+              <a:t>Innovation (20%)</a:t>
+            </a:r>
+          </a:p>
+          <a:p>
+            <a:pPr>
+              <a:spcBef>
+                <a:spcPts val="300"/>
+              </a:spcBef>
+              <a:defRPr sz="1200">
+                <a:solidFill>
+                  <a:srgbClr val="22222B"/>
+                </a:solidFill>
+              </a:defRPr>
+            </a:pPr>
+            <a:r>
+              <a:t>Autonomous per-patient state machine — not a chatbot wrapper. Combines forecast queue, ML ranking, generative multilingual outreach, and magic-link reply loop in one agent.</a:t>
+            </a:r>
+          </a:p>
+        </p:txBody>
+      </p:sp>
+      <p:sp>
+        <p:nvSpPr>
+          <p:cNvPr id="6" name="TextBox 5"/>
+          <p:cNvSpPr txBox="1"/>
+          <p:nvPr/>
+        </p:nvSpPr>
+        <p:spPr>
+          <a:xfrm>
+            <a:off x="594360" y="3346704"/>
+            <a:ext cx="10972800" cy="914400"/>
+          </a:xfrm>
+          <a:prstGeom prst="rect">
+            <a:avLst/>
+          </a:prstGeom>
+          <a:noFill/>
+        </p:spPr>
+        <p:txBody>
+          <a:bodyPr wrap="square">
+            <a:spAutoFit/>
+          </a:bodyPr>
+          <a:lstStyle/>
+          <a:p>
+            <a:pPr>
+              <a:defRPr sz="1400" b="1">
+                <a:solidFill>
+                  <a:srgbClr val="C8102E"/>
+                </a:solidFill>
+              </a:defRPr>
+            </a:pPr>
+            <a:r>
+              <a:t>AI component (20%)</a:t>
+            </a:r>
+          </a:p>
+          <a:p>
+            <a:pPr>
+              <a:spcBef>
+                <a:spcPts val="300"/>
+              </a:spcBef>
+              <a:defRPr sz="1200">
+                <a:solidFill>
+                  <a:srgbClr val="22222B"/>
+                </a:solidFill>
+              </a:defRPr>
+            </a:pPr>
+            <a:r>
+              <a:t>Bedrock Haiku for generation + intent classification; sklearn logistic regression trained on organiser dataset with 7 engineered features and ~0.7 AUC.</a:t>
+            </a:r>
+          </a:p>
+        </p:txBody>
+      </p:sp>
+      <p:sp>
+        <p:nvSpPr>
+          <p:cNvPr id="7" name="TextBox 6"/>
+          <p:cNvSpPr txBox="1"/>
+          <p:nvPr/>
+        </p:nvSpPr>
+        <p:spPr>
+          <a:xfrm>
+            <a:off x="594360" y="4370832"/>
+            <a:ext cx="10972800" cy="914400"/>
+          </a:xfrm>
+          <a:prstGeom prst="rect">
+            <a:avLst/>
+          </a:prstGeom>
+          <a:noFill/>
+        </p:spPr>
+        <p:txBody>
+          <a:bodyPr wrap="square">
+            <a:spAutoFit/>
+          </a:bodyPr>
+          <a:lstStyle/>
+          <a:p>
+            <a:pPr>
+              <a:defRPr sz="1400" b="1">
+                <a:solidFill>
+                  <a:srgbClr val="C8102E"/>
+                </a:solidFill>
+              </a:defRPr>
+            </a:pPr>
+            <a:r>
+              <a:t>Real implementation (20%)</a:t>
+            </a:r>
+          </a:p>
+          <a:p>
+            <a:pPr>
+              <a:spcBef>
+                <a:spcPts val="300"/>
+              </a:spcBef>
+              <a:defRPr sz="1200">
+                <a:solidFill>
+                  <a:srgbClr val="22222B"/>
+                </a:solidFill>
+              </a:defRPr>
+            </a:pPr>
+            <a:r>
+              <a:t>Live SMTP emails, HMAC-signed replies, DynamoDB state across cycles, agent_log audit trail — judges can verify every step without us touching the UI.</a:t>
+            </a:r>
+          </a:p>
+        </p:txBody>
+      </p:sp>
+      <p:sp>
+        <p:nvSpPr>
+          <p:cNvPr id="8" name="TextBox 7"/>
+          <p:cNvSpPr txBox="1"/>
+          <p:nvPr/>
+        </p:nvSpPr>
+        <p:spPr>
+          <a:xfrm>
+            <a:off x="594360" y="5394960"/>
+            <a:ext cx="10972800" cy="914400"/>
+          </a:xfrm>
+          <a:prstGeom prst="rect">
+            <a:avLst/>
+          </a:prstGeom>
+          <a:noFill/>
+        </p:spPr>
+        <p:txBody>
+          <a:bodyPr wrap="square">
+            <a:spAutoFit/>
+          </a:bodyPr>
+          <a:lstStyle/>
+          <a:p>
+            <a:pPr>
+              <a:defRPr sz="1400" b="1">
+                <a:solidFill>
+                  <a:srgbClr val="C8102E"/>
+                </a:solidFill>
+              </a:defRPr>
+            </a:pPr>
+            <a:r>
+              <a:t>End-to-end deployment (20%)</a:t>
+            </a:r>
+          </a:p>
+          <a:p>
+            <a:pPr>
+              <a:spcBef>
+                <a:spcPts val="300"/>
+              </a:spcBef>
+              <a:defRPr sz="1200">
+                <a:solidFill>
+                  <a:srgbClr val="22222B"/>
+                </a:solidFill>
+              </a:defRPr>
+            </a:pPr>
+            <a:r>
+              <a:t>GitHub repo, EC2 + nginx + systemd, IAM role, public demo URL, pitch deck with QR codes, dataset loaded to production-shaped AWS stack.</a:t>
+            </a:r>
+          </a:p>
+        </p:txBody>
+      </p:sp>
+    </p:spTree>
+  </p:cSld>
+  <p:clrMapOvr>
+    <a:masterClrMapping/>
+  </p:clrMapOvr>
+</p:sld>
+</file>
+
+<file path=ppt/slides/slide16.xml><?xml version="1.0" encoding="utf-8"?>
+<p:sld xmlns:a="http://schemas.openxmlformats.org/drawingml/2006/main" xmlns:p="http://schemas.openxmlformats.org/presentationml/2006/main" xmlns:r="http://schemas.openxmlformats.org/officeDocument/2006/relationships">
+  <p:cSld>
+    <p:bg>
+      <p:bgPr>
+        <a:solidFill>
+          <a:srgbClr val="F8F9FB"/>
+        </a:solidFill>
+        <a:effectLst/>
+      </p:bgPr>
+    </p:bg>
+    <p:spTree>
+      <p:nvGrpSpPr>
+        <p:cNvPr id="1" name=""/>
+        <p:cNvGrpSpPr/>
+        <p:nvPr/>
+      </p:nvGrpSpPr>
+      <p:grpSpPr/>
+      <p:sp>
+        <p:nvSpPr>
+          <p:cNvPr id="2" name="Rectangle 1"/>
+          <p:cNvSpPr/>
+          <p:nvPr/>
+        </p:nvSpPr>
+        <p:spPr>
+          <a:xfrm>
+            <a:off x="0" y="0"/>
+            <a:ext cx="12191695" cy="109728"/>
+          </a:xfrm>
+          <a:prstGeom prst="rect">
+            <a:avLst/>
+          </a:prstGeom>
+          <a:solidFill>
+            <a:srgbClr val="C8102E"/>
+          </a:solidFill>
+          <a:ln>
+            <a:noFill/>
+          </a:ln>
+        </p:spPr>
+        <p:style>
+          <a:lnRef idx="1">
+            <a:schemeClr val="accent1"/>
+          </a:lnRef>
+          <a:fillRef idx="3">
+            <a:schemeClr val="accent1"/>
+          </a:fillRef>
+          <a:effectRef idx="2">
+            <a:schemeClr val="accent1"/>
+          </a:effectRef>
+          <a:fontRef idx="minor">
+            <a:schemeClr val="lt1"/>
+          </a:fontRef>
+        </p:style>
+        <p:txBody>
+          <a:bodyPr rtlCol="0" anchor="ctr"/>
+          <a:lstStyle/>
+          <a:p>
+            <a:pPr algn="ctr"/>
+          </a:p>
+        </p:txBody>
+      </p:sp>
+      <p:sp>
+        <p:nvSpPr>
+          <p:cNvPr id="3" name="TextBox 2"/>
+          <p:cNvSpPr txBox="1"/>
+          <p:nvPr/>
+        </p:nvSpPr>
+        <p:spPr>
+          <a:xfrm>
+            <a:off x="594360" y="457200"/>
+            <a:ext cx="11155680" cy="1051560"/>
+          </a:xfrm>
+          <a:prstGeom prst="rect">
+            <a:avLst/>
+          </a:prstGeom>
+          <a:noFill/>
+        </p:spPr>
+        <p:txBody>
+          <a:bodyPr wrap="none">
+            <a:spAutoFit/>
+          </a:bodyPr>
+          <a:lstStyle/>
+          <a:p>
+            <a:pPr>
+              <a:defRPr sz="3400" b="1">
+                <a:solidFill>
+                  <a:srgbClr val="C8102E"/>
+                </a:solidFill>
+              </a:defRPr>
+            </a:pPr>
+            <a:r>
+              <a:t>Impact &amp; what comes next</a:t>
+            </a:r>
+          </a:p>
+        </p:txBody>
+      </p:sp>
+      <p:sp>
+        <p:nvSpPr>
+          <p:cNvPr id="4" name="TextBox 3"/>
+          <p:cNvSpPr txBox="1"/>
+          <p:nvPr/>
+        </p:nvSpPr>
+        <p:spPr>
+          <a:xfrm>
+            <a:off x="640080" y="1417320"/>
+            <a:ext cx="10881360" cy="5029200"/>
+          </a:xfrm>
+          <a:prstGeom prst="rect">
+            <a:avLst/>
+          </a:prstGeom>
+          <a:noFill/>
+        </p:spPr>
+        <p:txBody>
+          <a:bodyPr wrap="square">
+            <a:spAutoFit/>
+          </a:bodyPr>
+          <a:lstStyle/>
+          <a:p>
+            <a:pPr>
+              <a:lnSpc>
+                <a:spcPct val="125000"/>
+              </a:lnSpc>
+              <a:spcAft>
+                <a:spcPts val="1400"/>
+              </a:spcAft>
+              <a:defRPr sz="1600">
+                <a:solidFill>
+                  <a:srgbClr val="22222B"/>
+                </a:solidFill>
+              </a:defRPr>
+            </a:pPr>
+            <a:r>
+              <a:t>Near term: Blood Warriors coordinators get a single dashboard for the whole pipeline — who is due, who was contacted, who confirmed — while the agent does the repetitive outreach.</a:t>
+            </a:r>
+          </a:p>
+          <a:p>
+            <a:pPr>
+              <a:lnSpc>
+                <a:spcPct val="125000"/>
+              </a:lnSpc>
+              <a:spcAft>
+                <a:spcPts val="1400"/>
+              </a:spcAft>
+              <a:defRPr sz="1600">
+                <a:solidFill>
+                  <a:srgbClr val="22222B"/>
+                </a:solidFill>
+              </a:defRPr>
+            </a:pPr>
+            <a:r>
+              <a:t>Production path: swap MailPit for Amazon SES, add WhatsApp Business webhooks alongside email, scale agent workers on ECS, and connect to hospital blood-bank inventory APIs.</a:t>
+            </a:r>
+          </a:p>
+          <a:p>
+            <a:pPr>
+              <a:lnSpc>
+                <a:spcPct val="125000"/>
+              </a:lnSpc>
+              <a:spcAft>
+                <a:spcPts val="1400"/>
+              </a:spcAft>
+              <a:defRPr sz="1600">
+                <a:solidFill>
+                  <a:srgbClr val="22222B"/>
+                </a:solidFill>
+              </a:defRPr>
+            </a:pPr>
+            <a:r>
+              <a:t>Why it matters: every automated outreach hour returned to a coordinator is an hour they can spend with families in crisis — not re-dialing the same donor list.</a:t>
+            </a:r>
+          </a:p>
+          <a:p>
+            <a:pPr>
+              <a:lnSpc>
+                <a:spcPct val="125000"/>
+              </a:lnSpc>
+              <a:spcAft>
+                <a:spcPts val="1400"/>
+              </a:spcAft>
+              <a:defRPr sz="1600">
+                <a:solidFill>
+                  <a:srgbClr val="22222B"/>
+                </a:solidFill>
+              </a:defRPr>
+            </a:pPr>
+            <a:r>
+              <a:t>Spandan keeps the rhythm. Coordinators keep the humanity.</a:t>
+            </a:r>
+          </a:p>
+        </p:txBody>
+      </p:sp>
+      <p:sp>
+        <p:nvSpPr>
+          <p:cNvPr id="5" name="Rounded Rectangle 4"/>
+          <p:cNvSpPr/>
+          <p:nvPr/>
+        </p:nvSpPr>
+        <p:spPr>
+          <a:xfrm>
+            <a:off x="594360" y="5394960"/>
+            <a:ext cx="10972800" cy="777240"/>
+          </a:xfrm>
+          <a:prstGeom prst="roundRect">
+            <a:avLst/>
+          </a:prstGeom>
+          <a:solidFill>
+            <a:srgbClr val="FDE8EA"/>
+          </a:solidFill>
+          <a:ln>
+            <a:noFill/>
+          </a:ln>
+        </p:spPr>
+        <p:style>
+          <a:lnRef idx="1">
+            <a:schemeClr val="accent1"/>
+          </a:lnRef>
+          <a:fillRef idx="3">
+            <a:schemeClr val="accent1"/>
+          </a:fillRef>
+          <a:effectRef idx="2">
+            <a:schemeClr val="accent1"/>
+          </a:effectRef>
+          <a:fontRef idx="minor">
+            <a:schemeClr val="lt1"/>
+          </a:fontRef>
+        </p:style>
+        <p:txBody>
+          <a:bodyPr rtlCol="0" anchor="ctr"/>
+          <a:lstStyle/>
+          <a:p>
+            <a:pPr algn="ctr"/>
+          </a:p>
+        </p:txBody>
+      </p:sp>
+      <p:sp>
+        <p:nvSpPr>
+          <p:cNvPr id="6" name="TextBox 5"/>
+          <p:cNvSpPr txBox="1"/>
+          <p:nvPr/>
+        </p:nvSpPr>
+        <p:spPr>
+          <a:xfrm>
+            <a:off x="777240" y="5532120"/>
+            <a:ext cx="10607040" cy="548640"/>
+          </a:xfrm>
+          <a:prstGeom prst="rect">
+            <a:avLst/>
+          </a:prstGeom>
+          <a:noFill/>
+        </p:spPr>
+        <p:txBody>
+          <a:bodyPr wrap="none">
+            <a:spAutoFit/>
+          </a:bodyPr>
+          <a:lstStyle/>
+          <a:p>
+            <a:pPr algn="ctr">
+              <a:defRPr sz="1400" i="1">
+                <a:solidFill>
+                  <a:srgbClr val="C8102E"/>
+                </a:solidFill>
+              </a:defRPr>
+            </a:pPr>
+            <a:r>
+              <a:t>Live now: https://bit.ly/4vCaAQ4</a:t>
+            </a:r>
+          </a:p>
+        </p:txBody>
+      </p:sp>
+    </p:spTree>
+  </p:cSld>
+  <p:clrMapOvr>
+    <a:masterClrMapping/>
+  </p:clrMapOvr>
+</p:sld>
+</file>
+
+<file path=ppt/slides/slide17.xml><?xml version="1.0" encoding="utf-8"?>
 <p:sld xmlns:a="http://schemas.openxmlformats.org/drawingml/2006/main" xmlns:p="http://schemas.openxmlformats.org/presentationml/2006/main" xmlns:r="http://schemas.openxmlformats.org/officeDocument/2006/relationships">
   <p:cSld>
     <p:bg>
@@ -3262,8 +6056,8 @@
         </p:nvSpPr>
         <p:spPr>
           <a:xfrm>
-            <a:off x="731520" y="1645920"/>
-            <a:ext cx="7772400" cy="2743200"/>
+            <a:off x="640080" y="1371600"/>
+            <a:ext cx="8046720" cy="3200400"/>
           </a:xfrm>
           <a:prstGeom prst="rect">
             <a:avLst/>
@@ -3277,7 +6071,7 @@
           <a:lstStyle/>
           <a:p>
             <a:pPr>
-              <a:defRPr sz="4800" b="1">
+              <a:defRPr sz="4600" b="1">
                 <a:solidFill>
                   <a:srgbClr val="FFFFFF"/>
                 </a:solidFill>
@@ -3290,16 +6084,31 @@
           <a:p>
             <a:pPr>
               <a:spcBef>
-                <a:spcPts val="1600"/>
+                <a:spcPts val="1400"/>
               </a:spcBef>
-              <a:defRPr sz="2000">
+              <a:defRPr sz="2200" b="0">
                 <a:solidFill>
                   <a:srgbClr val="FFFFFF"/>
                 </a:solidFill>
               </a:defRPr>
             </a:pPr>
             <a:r>
-              <a:t>Try now: http://98.84.159.117</a:t>
+              <a:t>Questions welcome — demo is live</a:t>
+            </a:r>
+          </a:p>
+          <a:p>
+            <a:pPr>
+              <a:spcBef>
+                <a:spcPts val="1400"/>
+              </a:spcBef>
+              <a:defRPr sz="1600" b="0">
+                <a:solidFill>
+                  <a:srgbClr val="FFDDDD"/>
+                </a:solidFill>
+              </a:defRPr>
+            </a:pPr>
+            <a:r>
+              <a:t>https://bit.ly/4vCaAQ4</a:t>
             </a:r>
           </a:p>
           <a:p>
@@ -3307,7 +6116,7 @@
               <a:spcBef>
                 <a:spcPts val="1000"/>
               </a:spcBef>
-              <a:defRPr sz="1500">
+              <a:defRPr sz="1400" b="0">
                 <a:solidFill>
                   <a:srgbClr val="FFDDDD"/>
                 </a:solidFill>
@@ -3315,13 +6124,28 @@
             </a:pPr>
             <a:r>
               <a:t>https://github.com/madhuri-gande/spandan</a:t>
+            </a:r>
+          </a:p>
+          <a:p>
+            <a:pPr>
+              <a:spcBef>
+                <a:spcPts val="1000"/>
+              </a:spcBef>
+              <a:defRPr sz="1300" b="0">
+                <a:solidFill>
+                  <a:srgbClr val="FFDDDD"/>
+                </a:solidFill>
+              </a:defRPr>
+            </a:pPr>
+            <a:r>
+              <a:t>Team 066 · Blood Warriors Hackathon</a:t>
             </a:r>
           </a:p>
         </p:txBody>
       </p:sp>
       <p:pic>
         <p:nvPicPr>
-          <p:cNvPr id="3" name="Picture 2" descr="qr-dashboard.png"/>
+          <p:cNvPr id="3" name="Picture 2" descr="qr-bitly.png"/>
           <p:cNvPicPr>
             <a:picLocks noChangeAspect="1"/>
           </p:cNvPicPr>
@@ -3335,8 +6159,8 @@
         </p:blipFill>
         <p:spPr>
           <a:xfrm>
-            <a:off x="9326880" y="1828800"/>
-            <a:ext cx="2011680" cy="2011680"/>
+            <a:off x="9144000" y="1691640"/>
+            <a:ext cx="2148840" cy="2148840"/>
           </a:xfrm>
           <a:prstGeom prst="rect">
             <a:avLst/>
@@ -3351,8 +6175,8 @@
         </p:nvSpPr>
         <p:spPr>
           <a:xfrm>
-            <a:off x="9144000" y="3977639"/>
-            <a:ext cx="2377440" cy="457200"/>
+            <a:off x="9006840" y="3977639"/>
+            <a:ext cx="2423160" cy="411480"/>
           </a:xfrm>
           <a:prstGeom prst="rect">
             <a:avLst/>
@@ -3366,7 +6190,7 @@
           <a:lstStyle/>
           <a:p>
             <a:pPr algn="ctr">
-              <a:defRPr sz="1200">
+              <a:defRPr sz="1100">
                 <a:solidFill>
                   <a:srgbClr val="FFDDDD"/>
                 </a:solidFill>
@@ -3455,8 +6279,8 @@
         </p:nvSpPr>
         <p:spPr>
           <a:xfrm>
-            <a:off x="548640" y="502920"/>
-            <a:ext cx="11064240" cy="1097280"/>
+            <a:off x="594360" y="457200"/>
+            <a:ext cx="11155680" cy="1051560"/>
           </a:xfrm>
           <a:prstGeom prst="rect">
             <a:avLst/>
@@ -3470,39 +6294,114 @@
           <a:lstStyle/>
           <a:p>
             <a:pPr>
-              <a:defRPr sz="3600" b="1">
+              <a:defRPr sz="3400" b="1">
                 <a:solidFill>
                   <a:srgbClr val="C8102E"/>
                 </a:solidFill>
               </a:defRPr>
             </a:pPr>
             <a:r>
-              <a:t>Impact at a glance</a:t>
-            </a:r>
-          </a:p>
-        </p:txBody>
-      </p:sp>
-      <p:sp>
-        <p:nvSpPr>
-          <p:cNvPr id="4" name="Rounded Rectangle 3"/>
+              <a:t>Imagine a coordinator at 11 PM</a:t>
+            </a:r>
+          </a:p>
+        </p:txBody>
+      </p:sp>
+      <p:sp>
+        <p:nvSpPr>
+          <p:cNvPr id="4" name="TextBox 3"/>
+          <p:cNvSpPr txBox="1"/>
+          <p:nvPr/>
+        </p:nvSpPr>
+        <p:spPr>
+          <a:xfrm>
+            <a:off x="640080" y="1417320"/>
+            <a:ext cx="10881360" cy="5029200"/>
+          </a:xfrm>
+          <a:prstGeom prst="rect">
+            <a:avLst/>
+          </a:prstGeom>
+          <a:noFill/>
+        </p:spPr>
+        <p:txBody>
+          <a:bodyPr wrap="square">
+            <a:spAutoFit/>
+          </a:bodyPr>
+          <a:lstStyle/>
+          <a:p>
+            <a:pPr>
+              <a:lnSpc>
+                <a:spcPct val="125000"/>
+              </a:lnSpc>
+              <a:spcAft>
+                <a:spcPts val="1400"/>
+              </a:spcAft>
+              <a:defRPr sz="1700">
+                <a:solidFill>
+                  <a:srgbClr val="22222B"/>
+                </a:solidFill>
+              </a:defRPr>
+            </a:pPr>
+            <a:r>
+              <a:t>A thalassemia patient needs a B+ transfusion in three days. The coordinator opens a spreadsheet with hundreds of donor names, starts calling — wrong language, no answer, try the next number.</a:t>
+            </a:r>
+          </a:p>
+          <a:p>
+            <a:pPr>
+              <a:lnSpc>
+                <a:spcPct val="125000"/>
+              </a:lnSpc>
+              <a:spcAft>
+                <a:spcPts val="1400"/>
+              </a:spcAft>
+              <a:defRPr sz="1700">
+                <a:solidFill>
+                  <a:srgbClr val="22222B"/>
+                </a:solidFill>
+              </a:defRPr>
+            </a:pPr>
+            <a:r>
+              <a:t>Meanwhile, three other patients are approaching their transfusion dates across Hyderabad. One coordinator cannot hold this rhythm alone.</a:t>
+            </a:r>
+          </a:p>
+          <a:p>
+            <a:pPr>
+              <a:lnSpc>
+                <a:spcPct val="125000"/>
+              </a:lnSpc>
+              <a:spcAft>
+                <a:spcPts val="1400"/>
+              </a:spcAft>
+              <a:defRPr sz="1700">
+                <a:solidFill>
+                  <a:srgbClr val="22222B"/>
+                </a:solidFill>
+              </a:defRPr>
+            </a:pPr>
+            <a:r>
+              <a:t>Spandan is the always-on layer that forecasts who needs blood, ranks the right donors, reaches them in their language, and escalates automatically — without anyone clicking refresh.</a:t>
+            </a:r>
+          </a:p>
+        </p:txBody>
+      </p:sp>
+      <p:sp>
+        <p:nvSpPr>
+          <p:cNvPr id="5" name="Rounded Rectangle 4"/>
           <p:cNvSpPr/>
           <p:nvPr/>
         </p:nvSpPr>
         <p:spPr>
           <a:xfrm>
-            <a:off x="685800" y="1508760"/>
-            <a:ext cx="3474720" cy="1417320"/>
+            <a:off x="594360" y="5394960"/>
+            <a:ext cx="10972800" cy="777240"/>
           </a:xfrm>
           <a:prstGeom prst="roundRect">
             <a:avLst/>
           </a:prstGeom>
           <a:solidFill>
-            <a:srgbClr val="FFFFFF"/>
+            <a:srgbClr val="FDE8EA"/>
           </a:solidFill>
-          <a:ln w="19050">
-            <a:solidFill>
-              <a:srgbClr val="FDE8EA"/>
-            </a:solidFill>
+          <a:ln>
+            <a:noFill/>
           </a:ln>
         </p:spPr>
         <p:style>
@@ -3529,14 +6428,14 @@
       </p:sp>
       <p:sp>
         <p:nvSpPr>
-          <p:cNvPr id="5" name="TextBox 4"/>
+          <p:cNvPr id="6" name="TextBox 5"/>
           <p:cNvSpPr txBox="1"/>
           <p:nvPr/>
         </p:nvSpPr>
         <p:spPr>
           <a:xfrm>
-            <a:off x="914400" y="1691639"/>
-            <a:ext cx="3017520" cy="1097280"/>
+            <a:off x="777240" y="5532120"/>
+            <a:ext cx="10607040" cy="548640"/>
           </a:xfrm>
           <a:prstGeom prst="rect">
             <a:avLst/>
@@ -3549,350 +6448,15 @@
           </a:bodyPr>
           <a:lstStyle/>
           <a:p>
-            <a:pPr>
-              <a:defRPr sz="3200" b="1">
+            <a:pPr algn="ctr">
+              <a:defRPr sz="1400" i="1">
                 <a:solidFill>
                   <a:srgbClr val="C8102E"/>
                 </a:solidFill>
               </a:defRPr>
             </a:pPr>
             <a:r>
-              <a:t>7,000+</a:t>
-            </a:r>
-          </a:p>
-          <a:p>
-            <a:pPr>
-              <a:spcBef>
-                <a:spcPts val="400"/>
-              </a:spcBef>
-              <a:defRPr sz="1400">
-                <a:solidFill>
-                  <a:srgbClr val="5A6068"/>
-                </a:solidFill>
-              </a:defRPr>
-            </a:pPr>
-            <a:r>
-              <a:t>donor records in real dataset</a:t>
-            </a:r>
-          </a:p>
-        </p:txBody>
-      </p:sp>
-      <p:sp>
-        <p:nvSpPr>
-          <p:cNvPr id="6" name="Rounded Rectangle 5"/>
-          <p:cNvSpPr/>
-          <p:nvPr/>
-        </p:nvSpPr>
-        <p:spPr>
-          <a:xfrm>
-            <a:off x="4434840" y="1508760"/>
-            <a:ext cx="3474720" cy="1417320"/>
-          </a:xfrm>
-          <a:prstGeom prst="roundRect">
-            <a:avLst/>
-          </a:prstGeom>
-          <a:solidFill>
-            <a:srgbClr val="FFFFFF"/>
-          </a:solidFill>
-          <a:ln w="19050">
-            <a:solidFill>
-              <a:srgbClr val="FDE8EA"/>
-            </a:solidFill>
-          </a:ln>
-        </p:spPr>
-        <p:style>
-          <a:lnRef idx="1">
-            <a:schemeClr val="accent1"/>
-          </a:lnRef>
-          <a:fillRef idx="3">
-            <a:schemeClr val="accent1"/>
-          </a:fillRef>
-          <a:effectRef idx="2">
-            <a:schemeClr val="accent1"/>
-          </a:effectRef>
-          <a:fontRef idx="minor">
-            <a:schemeClr val="lt1"/>
-          </a:fontRef>
-        </p:style>
-        <p:txBody>
-          <a:bodyPr rtlCol="0" anchor="ctr"/>
-          <a:lstStyle/>
-          <a:p>
-            <a:pPr algn="ctr"/>
-          </a:p>
-        </p:txBody>
-      </p:sp>
-      <p:sp>
-        <p:nvSpPr>
-          <p:cNvPr id="7" name="TextBox 6"/>
-          <p:cNvSpPr txBox="1"/>
-          <p:nvPr/>
-        </p:nvSpPr>
-        <p:spPr>
-          <a:xfrm>
-            <a:off x="4663440" y="1691639"/>
-            <a:ext cx="3017520" cy="1097280"/>
-          </a:xfrm>
-          <a:prstGeom prst="rect">
-            <a:avLst/>
-          </a:prstGeom>
-          <a:noFill/>
-        </p:spPr>
-        <p:txBody>
-          <a:bodyPr wrap="none">
-            <a:spAutoFit/>
-          </a:bodyPr>
-          <a:lstStyle/>
-          <a:p>
-            <a:pPr>
-              <a:defRPr sz="3200" b="1">
-                <a:solidFill>
-                  <a:srgbClr val="C8102E"/>
-                </a:solidFill>
-              </a:defRPr>
-            </a:pPr>
-            <a:r>
-              <a:t>90 days</a:t>
-            </a:r>
-          </a:p>
-          <a:p>
-            <a:pPr>
-              <a:spcBef>
-                <a:spcPts val="400"/>
-              </a:spcBef>
-              <a:defRPr sz="1400">
-                <a:solidFill>
-                  <a:srgbClr val="5A6068"/>
-                </a:solidFill>
-              </a:defRPr>
-            </a:pPr>
-            <a:r>
-              <a:t>forecast pipeline window</a:t>
-            </a:r>
-          </a:p>
-        </p:txBody>
-      </p:sp>
-      <p:sp>
-        <p:nvSpPr>
-          <p:cNvPr id="8" name="Rounded Rectangle 7"/>
-          <p:cNvSpPr/>
-          <p:nvPr/>
-        </p:nvSpPr>
-        <p:spPr>
-          <a:xfrm>
-            <a:off x="685800" y="3337560"/>
-            <a:ext cx="3474720" cy="1417320"/>
-          </a:xfrm>
-          <a:prstGeom prst="roundRect">
-            <a:avLst/>
-          </a:prstGeom>
-          <a:solidFill>
-            <a:srgbClr val="FFFFFF"/>
-          </a:solidFill>
-          <a:ln w="19050">
-            <a:solidFill>
-              <a:srgbClr val="FDE8EA"/>
-            </a:solidFill>
-          </a:ln>
-        </p:spPr>
-        <p:style>
-          <a:lnRef idx="1">
-            <a:schemeClr val="accent1"/>
-          </a:lnRef>
-          <a:fillRef idx="3">
-            <a:schemeClr val="accent1"/>
-          </a:fillRef>
-          <a:effectRef idx="2">
-            <a:schemeClr val="accent1"/>
-          </a:effectRef>
-          <a:fontRef idx="minor">
-            <a:schemeClr val="lt1"/>
-          </a:fontRef>
-        </p:style>
-        <p:txBody>
-          <a:bodyPr rtlCol="0" anchor="ctr"/>
-          <a:lstStyle/>
-          <a:p>
-            <a:pPr algn="ctr"/>
-          </a:p>
-        </p:txBody>
-      </p:sp>
-      <p:sp>
-        <p:nvSpPr>
-          <p:cNvPr id="9" name="TextBox 8"/>
-          <p:cNvSpPr txBox="1"/>
-          <p:nvPr/>
-        </p:nvSpPr>
-        <p:spPr>
-          <a:xfrm>
-            <a:off x="914400" y="3520440"/>
-            <a:ext cx="3017520" cy="1097280"/>
-          </a:xfrm>
-          <a:prstGeom prst="rect">
-            <a:avLst/>
-          </a:prstGeom>
-          <a:noFill/>
-        </p:spPr>
-        <p:txBody>
-          <a:bodyPr wrap="none">
-            <a:spAutoFit/>
-          </a:bodyPr>
-          <a:lstStyle/>
-          <a:p>
-            <a:pPr>
-              <a:defRPr sz="3200" b="1">
-                <a:solidFill>
-                  <a:srgbClr val="C8102E"/>
-                </a:solidFill>
-              </a:defRPr>
-            </a:pPr>
-            <a:r>
-              <a:t>4 languages</a:t>
-            </a:r>
-          </a:p>
-          <a:p>
-            <a:pPr>
-              <a:spcBef>
-                <a:spcPts val="400"/>
-              </a:spcBef>
-              <a:defRPr sz="1400">
-                <a:solidFill>
-                  <a:srgbClr val="5A6068"/>
-                </a:solidFill>
-              </a:defRPr>
-            </a:pPr>
-            <a:r>
-              <a:t>Telugu · Hindi · Tamil · English</a:t>
-            </a:r>
-          </a:p>
-        </p:txBody>
-      </p:sp>
-      <p:sp>
-        <p:nvSpPr>
-          <p:cNvPr id="10" name="Rounded Rectangle 9"/>
-          <p:cNvSpPr/>
-          <p:nvPr/>
-        </p:nvSpPr>
-        <p:spPr>
-          <a:xfrm>
-            <a:off x="4434840" y="3337560"/>
-            <a:ext cx="3474720" cy="1417320"/>
-          </a:xfrm>
-          <a:prstGeom prst="roundRect">
-            <a:avLst/>
-          </a:prstGeom>
-          <a:solidFill>
-            <a:srgbClr val="FFFFFF"/>
-          </a:solidFill>
-          <a:ln w="19050">
-            <a:solidFill>
-              <a:srgbClr val="FDE8EA"/>
-            </a:solidFill>
-          </a:ln>
-        </p:spPr>
-        <p:style>
-          <a:lnRef idx="1">
-            <a:schemeClr val="accent1"/>
-          </a:lnRef>
-          <a:fillRef idx="3">
-            <a:schemeClr val="accent1"/>
-          </a:fillRef>
-          <a:effectRef idx="2">
-            <a:schemeClr val="accent1"/>
-          </a:effectRef>
-          <a:fontRef idx="minor">
-            <a:schemeClr val="lt1"/>
-          </a:fontRef>
-        </p:style>
-        <p:txBody>
-          <a:bodyPr rtlCol="0" anchor="ctr"/>
-          <a:lstStyle/>
-          <a:p>
-            <a:pPr algn="ctr"/>
-          </a:p>
-        </p:txBody>
-      </p:sp>
-      <p:sp>
-        <p:nvSpPr>
-          <p:cNvPr id="11" name="TextBox 10"/>
-          <p:cNvSpPr txBox="1"/>
-          <p:nvPr/>
-        </p:nvSpPr>
-        <p:spPr>
-          <a:xfrm>
-            <a:off x="4663440" y="3520440"/>
-            <a:ext cx="3017520" cy="1097280"/>
-          </a:xfrm>
-          <a:prstGeom prst="rect">
-            <a:avLst/>
-          </a:prstGeom>
-          <a:noFill/>
-        </p:spPr>
-        <p:txBody>
-          <a:bodyPr wrap="none">
-            <a:spAutoFit/>
-          </a:bodyPr>
-          <a:lstStyle/>
-          <a:p>
-            <a:pPr>
-              <a:defRPr sz="3200" b="1">
-                <a:solidFill>
-                  <a:srgbClr val="C8102E"/>
-                </a:solidFill>
-              </a:defRPr>
-            </a:pPr>
-            <a:r>
-              <a:t>24/7</a:t>
-            </a:r>
-          </a:p>
-          <a:p>
-            <a:pPr>
-              <a:spcBef>
-                <a:spcPts val="400"/>
-              </a:spcBef>
-              <a:defRPr sz="1400">
-                <a:solidFill>
-                  <a:srgbClr val="5A6068"/>
-                </a:solidFill>
-              </a:defRPr>
-            </a:pPr>
-            <a:r>
-              <a:t>autonomous agent on AWS EC2</a:t>
-            </a:r>
-          </a:p>
-        </p:txBody>
-      </p:sp>
-      <p:sp>
-        <p:nvSpPr>
-          <p:cNvPr id="12" name="TextBox 11"/>
-          <p:cNvSpPr txBox="1"/>
-          <p:nvPr/>
-        </p:nvSpPr>
-        <p:spPr>
-          <a:xfrm>
-            <a:off x="685800" y="5577840"/>
-            <a:ext cx="10972800" cy="457200"/>
-          </a:xfrm>
-          <a:prstGeom prst="rect">
-            <a:avLst/>
-          </a:prstGeom>
-          <a:noFill/>
-        </p:spPr>
-        <p:txBody>
-          <a:bodyPr wrap="none">
-            <a:spAutoFit/>
-          </a:bodyPr>
-          <a:lstStyle/>
-          <a:p>
-            <a:pPr>
-              <a:defRPr sz="1400">
-                <a:solidFill>
-                  <a:srgbClr val="5A6068"/>
-                </a:solidFill>
-              </a:defRPr>
-            </a:pPr>
-            <a:r>
-              <a:t>Built on Blood Warriors data — not synthetic patients. Live demo running now.</a:t>
+              <a:t>We built this on 7,000+ real Blood Warriors records — and it is live on AWS right now.</a:t>
             </a:r>
           </a:p>
         </p:txBody>
@@ -3974,8 +6538,8 @@
         </p:nvSpPr>
         <p:spPr>
           <a:xfrm>
-            <a:off x="548640" y="502920"/>
-            <a:ext cx="11064240" cy="1097280"/>
+            <a:off x="594360" y="457200"/>
+            <a:ext cx="11155680" cy="1051560"/>
           </a:xfrm>
           <a:prstGeom prst="rect">
             <a:avLst/>
@@ -3989,43 +6553,123 @@
           <a:lstStyle/>
           <a:p>
             <a:pPr>
-              <a:defRPr sz="3600" b="1">
+              <a:defRPr sz="3400" b="1">
                 <a:solidFill>
                   <a:srgbClr val="C8102E"/>
                 </a:solidFill>
               </a:defRPr>
             </a:pPr>
             <a:r>
-              <a:t>The problem</a:t>
+              <a:t>The problem we are solving</a:t>
             </a:r>
           </a:p>
           <a:p>
             <a:pPr>
               <a:spcBef>
-                <a:spcPts val="600"/>
+                <a:spcPts val="400"/>
               </a:spcBef>
-              <a:defRPr sz="1600">
+              <a:defRPr sz="1500">
                 <a:solidFill>
                   <a:srgbClr val="5A6068"/>
                 </a:solidFill>
               </a:defRPr>
             </a:pPr>
             <a:r>
-              <a:t>Manual coordination does not scale</a:t>
-            </a:r>
-          </a:p>
-        </p:txBody>
-      </p:sp>
-      <p:sp>
-        <p:nvSpPr>
-          <p:cNvPr id="4" name="TextBox 3"/>
+              <a:t>Why manual coordination breaks at scale</a:t>
+            </a:r>
+          </a:p>
+        </p:txBody>
+      </p:sp>
+      <p:sp>
+        <p:nvSpPr>
+          <p:cNvPr id="4" name="Rounded Rectangle 3"/>
+          <p:cNvSpPr/>
+          <p:nvPr/>
+        </p:nvSpPr>
+        <p:spPr>
+          <a:xfrm>
+            <a:off x="594360" y="1417320"/>
+            <a:ext cx="5486400" cy="4892040"/>
+          </a:xfrm>
+          <a:prstGeom prst="roundRect">
+            <a:avLst/>
+          </a:prstGeom>
+          <a:solidFill>
+            <a:srgbClr val="FFFFFF"/>
+          </a:solidFill>
+          <a:ln w="15240">
+            <a:solidFill>
+              <a:srgbClr val="FDE8EA"/>
+            </a:solidFill>
+          </a:ln>
+        </p:spPr>
+        <p:style>
+          <a:lnRef idx="1">
+            <a:schemeClr val="accent1"/>
+          </a:lnRef>
+          <a:fillRef idx="3">
+            <a:schemeClr val="accent1"/>
+          </a:fillRef>
+          <a:effectRef idx="2">
+            <a:schemeClr val="accent1"/>
+          </a:effectRef>
+          <a:fontRef idx="minor">
+            <a:schemeClr val="lt1"/>
+          </a:fontRef>
+        </p:style>
+        <p:txBody>
+          <a:bodyPr rtlCol="0" anchor="ctr"/>
+          <a:lstStyle/>
+          <a:p>
+            <a:pPr algn="ctr"/>
+          </a:p>
+        </p:txBody>
+      </p:sp>
+      <p:sp>
+        <p:nvSpPr>
+          <p:cNvPr id="5" name="TextBox 4"/>
           <p:cNvSpPr txBox="1"/>
           <p:nvPr/>
         </p:nvSpPr>
         <p:spPr>
           <a:xfrm>
-            <a:off x="685800" y="1463040"/>
-            <a:ext cx="10515600" cy="4754880"/>
+            <a:off x="822960" y="1600200"/>
+            <a:ext cx="5029200" cy="411480"/>
+          </a:xfrm>
+          <a:prstGeom prst="rect">
+            <a:avLst/>
+          </a:prstGeom>
+          <a:noFill/>
+        </p:spPr>
+        <p:txBody>
+          <a:bodyPr wrap="none">
+            <a:spAutoFit/>
+          </a:bodyPr>
+          <a:lstStyle/>
+          <a:p>
+            <a:pPr>
+              <a:defRPr sz="1800" b="1">
+                <a:solidFill>
+                  <a:srgbClr val="C8102E"/>
+                </a:solidFill>
+              </a:defRPr>
+            </a:pPr>
+            <a:r>
+              <a:t>The patient reality</a:t>
+            </a:r>
+          </a:p>
+        </p:txBody>
+      </p:sp>
+      <p:sp>
+        <p:nvSpPr>
+          <p:cNvPr id="6" name="TextBox 5"/>
+          <p:cNvSpPr txBox="1"/>
+          <p:nvPr/>
+        </p:nvSpPr>
+        <p:spPr>
+          <a:xfrm>
+            <a:off x="822960" y="2011680"/>
+            <a:ext cx="4983480" cy="5029200"/>
           </a:xfrm>
           <a:prstGeom prst="rect">
             <a:avLst/>
@@ -4039,77 +6683,177 @@
           <a:lstStyle/>
           <a:p>
             <a:pPr>
+              <a:lnSpc>
+                <a:spcPct val="125000"/>
+              </a:lnSpc>
               <a:spcAft>
-                <a:spcPts val="1000"/>
+                <a:spcPts val="1400"/>
               </a:spcAft>
-              <a:defRPr sz="1900">
+              <a:defRPr sz="1500">
                 <a:solidFill>
                   <a:srgbClr val="22222B"/>
                 </a:solidFill>
               </a:defRPr>
             </a:pPr>
             <a:r>
-              <a:t>▸  1,00,000+ Thalassemia patients need 500–700 transfusions in a lifetime</a:t>
-            </a:r>
-          </a:p>
-          <a:p>
-            <a:pPr>
+              <a:t>Over 1,00,000 thalassemia patients in India need lifelong transfusions — often 500 to 700 in a lifetime, on a personal cadence every few weeks.</a:t>
+            </a:r>
+          </a:p>
+          <a:p>
+            <a:pPr>
+              <a:lnSpc>
+                <a:spcPct val="125000"/>
+              </a:lnSpc>
               <a:spcAft>
-                <a:spcPts val="1000"/>
+                <a:spcPts val="1400"/>
               </a:spcAft>
-              <a:defRPr sz="1900">
+              <a:defRPr sz="1500">
                 <a:solidFill>
                   <a:srgbClr val="22222B"/>
                 </a:solidFill>
               </a:defRPr>
             </a:pPr>
             <a:r>
-              <a:t>▸  Blood Warriors matches donors to patients — today mostly manual calls &amp; spreadsheets</a:t>
-            </a:r>
-          </a:p>
-          <a:p>
-            <a:pPr>
+              <a:t>Missing one cycle risks complications. Families live by the calendar of the next bag of blood.</a:t>
+            </a:r>
+          </a:p>
+        </p:txBody>
+      </p:sp>
+      <p:sp>
+        <p:nvSpPr>
+          <p:cNvPr id="7" name="Rounded Rectangle 6"/>
+          <p:cNvSpPr/>
+          <p:nvPr/>
+        </p:nvSpPr>
+        <p:spPr>
+          <a:xfrm>
+            <a:off x="6263640" y="1417320"/>
+            <a:ext cx="5486400" cy="4892040"/>
+          </a:xfrm>
+          <a:prstGeom prst="roundRect">
+            <a:avLst/>
+          </a:prstGeom>
+          <a:solidFill>
+            <a:srgbClr val="FFFFFF"/>
+          </a:solidFill>
+          <a:ln w="15240">
+            <a:solidFill>
+              <a:srgbClr val="FDE8EA"/>
+            </a:solidFill>
+          </a:ln>
+        </p:spPr>
+        <p:style>
+          <a:lnRef idx="1">
+            <a:schemeClr val="accent1"/>
+          </a:lnRef>
+          <a:fillRef idx="3">
+            <a:schemeClr val="accent1"/>
+          </a:fillRef>
+          <a:effectRef idx="2">
+            <a:schemeClr val="accent1"/>
+          </a:effectRef>
+          <a:fontRef idx="minor">
+            <a:schemeClr val="lt1"/>
+          </a:fontRef>
+        </p:style>
+        <p:txBody>
+          <a:bodyPr rtlCol="0" anchor="ctr"/>
+          <a:lstStyle/>
+          <a:p>
+            <a:pPr algn="ctr"/>
+          </a:p>
+        </p:txBody>
+      </p:sp>
+      <p:sp>
+        <p:nvSpPr>
+          <p:cNvPr id="8" name="TextBox 7"/>
+          <p:cNvSpPr txBox="1"/>
+          <p:nvPr/>
+        </p:nvSpPr>
+        <p:spPr>
+          <a:xfrm>
+            <a:off x="6492240" y="1600200"/>
+            <a:ext cx="5029200" cy="411480"/>
+          </a:xfrm>
+          <a:prstGeom prst="rect">
+            <a:avLst/>
+          </a:prstGeom>
+          <a:noFill/>
+        </p:spPr>
+        <p:txBody>
+          <a:bodyPr wrap="none">
+            <a:spAutoFit/>
+          </a:bodyPr>
+          <a:lstStyle/>
+          <a:p>
+            <a:pPr>
+              <a:defRPr sz="1800" b="1">
+                <a:solidFill>
+                  <a:srgbClr val="C8102E"/>
+                </a:solidFill>
+              </a:defRPr>
+            </a:pPr>
+            <a:r>
+              <a:t>The coordination reality</a:t>
+            </a:r>
+          </a:p>
+        </p:txBody>
+      </p:sp>
+      <p:sp>
+        <p:nvSpPr>
+          <p:cNvPr id="9" name="TextBox 8"/>
+          <p:cNvSpPr txBox="1"/>
+          <p:nvPr/>
+        </p:nvSpPr>
+        <p:spPr>
+          <a:xfrm>
+            <a:off x="6492240" y="2011680"/>
+            <a:ext cx="4983480" cy="5029200"/>
+          </a:xfrm>
+          <a:prstGeom prst="rect">
+            <a:avLst/>
+          </a:prstGeom>
+          <a:noFill/>
+        </p:spPr>
+        <p:txBody>
+          <a:bodyPr wrap="square">
+            <a:spAutoFit/>
+          </a:bodyPr>
+          <a:lstStyle/>
+          <a:p>
+            <a:pPr>
+              <a:lnSpc>
+                <a:spcPct val="125000"/>
+              </a:lnSpc>
               <a:spcAft>
-                <a:spcPts val="1000"/>
+                <a:spcPts val="1400"/>
               </a:spcAft>
-              <a:defRPr sz="1900">
+              <a:defRPr sz="1500">
                 <a:solidFill>
                   <a:srgbClr val="22222B"/>
                 </a:solidFill>
               </a:defRPr>
             </a:pPr>
             <a:r>
-              <a:t>▸  Coordinators chase donors one-by-one; wrong language, timing, and fatigue</a:t>
-            </a:r>
-          </a:p>
-          <a:p>
-            <a:pPr>
+              <a:t>Blood Warriors matches donors to patients through bridges — but outreach is still manual calls, WhatsApp forwards, and spreadsheets.</a:t>
+            </a:r>
+          </a:p>
+          <a:p>
+            <a:pPr>
+              <a:lnSpc>
+                <a:spcPct val="125000"/>
+              </a:lnSpc>
               <a:spcAft>
-                <a:spcPts val="1000"/>
+                <a:spcPts val="1400"/>
               </a:spcAft>
-              <a:defRPr sz="1900">
+              <a:defRPr sz="1500">
                 <a:solidFill>
                   <a:srgbClr val="22222B"/>
                 </a:solidFill>
               </a:defRPr>
             </a:pPr>
             <a:r>
-              <a:t>▸  Emergencies need instant parallel outreach — normal pacing is too slow</a:t>
-            </a:r>
-          </a:p>
-          <a:p>
-            <a:pPr>
-              <a:spcAft>
-                <a:spcPts val="1000"/>
-              </a:spcAft>
-              <a:defRPr sz="1900">
-                <a:solidFill>
-                  <a:srgbClr val="22222B"/>
-                </a:solidFill>
-              </a:defRPr>
-            </a:pPr>
-            <a:r>
-              <a:t>▸  As cities and partner hospitals grow, human nudging becomes the bottleneck</a:t>
+              <a:t>Coordinators burn out. Donors get over-contacted or contacted in the wrong language. Emergencies need everyone at once; normal weeks need gentle sequential pacing.</a:t>
             </a:r>
           </a:p>
         </p:txBody>
@@ -4191,8 +6935,8 @@
         </p:nvSpPr>
         <p:spPr>
           <a:xfrm>
-            <a:off x="548640" y="502920"/>
-            <a:ext cx="11064240" cy="1097280"/>
+            <a:off x="594360" y="457200"/>
+            <a:ext cx="11155680" cy="1051560"/>
           </a:xfrm>
           <a:prstGeom prst="rect">
             <a:avLst/>
@@ -4206,28 +6950,108 @@
           <a:lstStyle/>
           <a:p>
             <a:pPr>
-              <a:defRPr sz="3600" b="1">
+              <a:defRPr sz="3400" b="1">
                 <a:solidFill>
                   <a:srgbClr val="C8102E"/>
                 </a:solidFill>
               </a:defRPr>
             </a:pPr>
             <a:r>
-              <a:t>Our solution — Spandan</a:t>
-            </a:r>
-          </a:p>
-        </p:txBody>
-      </p:sp>
-      <p:sp>
-        <p:nvSpPr>
-          <p:cNvPr id="4" name="TextBox 3"/>
+              <a:t>Before Spandan  vs  After Spandan</a:t>
+            </a:r>
+          </a:p>
+        </p:txBody>
+      </p:sp>
+      <p:sp>
+        <p:nvSpPr>
+          <p:cNvPr id="4" name="Rounded Rectangle 3"/>
+          <p:cNvSpPr/>
+          <p:nvPr/>
+        </p:nvSpPr>
+        <p:spPr>
+          <a:xfrm>
+            <a:off x="594360" y="1417320"/>
+            <a:ext cx="5486400" cy="4892040"/>
+          </a:xfrm>
+          <a:prstGeom prst="roundRect">
+            <a:avLst/>
+          </a:prstGeom>
+          <a:solidFill>
+            <a:srgbClr val="FFFFFF"/>
+          </a:solidFill>
+          <a:ln w="15240">
+            <a:solidFill>
+              <a:srgbClr val="FDE8EA"/>
+            </a:solidFill>
+          </a:ln>
+        </p:spPr>
+        <p:style>
+          <a:lnRef idx="1">
+            <a:schemeClr val="accent1"/>
+          </a:lnRef>
+          <a:fillRef idx="3">
+            <a:schemeClr val="accent1"/>
+          </a:fillRef>
+          <a:effectRef idx="2">
+            <a:schemeClr val="accent1"/>
+          </a:effectRef>
+          <a:fontRef idx="minor">
+            <a:schemeClr val="lt1"/>
+          </a:fontRef>
+        </p:style>
+        <p:txBody>
+          <a:bodyPr rtlCol="0" anchor="ctr"/>
+          <a:lstStyle/>
+          <a:p>
+            <a:pPr algn="ctr"/>
+          </a:p>
+        </p:txBody>
+      </p:sp>
+      <p:sp>
+        <p:nvSpPr>
+          <p:cNvPr id="5" name="TextBox 4"/>
           <p:cNvSpPr txBox="1"/>
           <p:nvPr/>
         </p:nvSpPr>
         <p:spPr>
           <a:xfrm>
-            <a:off x="685800" y="1463040"/>
-            <a:ext cx="10515600" cy="4754880"/>
+            <a:off x="822960" y="1600200"/>
+            <a:ext cx="5029200" cy="411480"/>
+          </a:xfrm>
+          <a:prstGeom prst="rect">
+            <a:avLst/>
+          </a:prstGeom>
+          <a:noFill/>
+        </p:spPr>
+        <p:txBody>
+          <a:bodyPr wrap="none">
+            <a:spAutoFit/>
+          </a:bodyPr>
+          <a:lstStyle/>
+          <a:p>
+            <a:pPr>
+              <a:defRPr sz="1800" b="1">
+                <a:solidFill>
+                  <a:srgbClr val="C8102E"/>
+                </a:solidFill>
+              </a:defRPr>
+            </a:pPr>
+            <a:r>
+              <a:t>Today (manual)</a:t>
+            </a:r>
+          </a:p>
+        </p:txBody>
+      </p:sp>
+      <p:sp>
+        <p:nvSpPr>
+          <p:cNvPr id="6" name="TextBox 5"/>
+          <p:cNvSpPr txBox="1"/>
+          <p:nvPr/>
+        </p:nvSpPr>
+        <p:spPr>
+          <a:xfrm>
+            <a:off x="822960" y="2011680"/>
+            <a:ext cx="4983480" cy="5029200"/>
           </a:xfrm>
           <a:prstGeom prst="rect">
             <a:avLst/>
@@ -4241,77 +7065,249 @@
           <a:lstStyle/>
           <a:p>
             <a:pPr>
+              <a:lnSpc>
+                <a:spcPct val="125000"/>
+              </a:lnSpc>
               <a:spcAft>
-                <a:spcPts val="1000"/>
+                <a:spcPts val="1400"/>
               </a:spcAft>
-              <a:defRPr sz="1900">
+              <a:defRPr sz="1500">
                 <a:solidFill>
                   <a:srgbClr val="22222B"/>
                 </a:solidFill>
               </a:defRPr>
             </a:pPr>
             <a:r>
-              <a:t>▸  Always-on autonomous agent: forecast → rank → email → interpret reply → escalate</a:t>
-            </a:r>
-          </a:p>
-          <a:p>
-            <a:pPr>
+              <a:t>Coordinator scans a list and guesses who to call first.</a:t>
+            </a:r>
+          </a:p>
+          <a:p>
+            <a:pPr>
+              <a:lnSpc>
+                <a:spcPct val="125000"/>
+              </a:lnSpc>
               <a:spcAft>
-                <a:spcPts val="1000"/>
+                <a:spcPts val="1400"/>
               </a:spcAft>
-              <a:defRPr sz="1900">
+              <a:defRPr sz="1500">
                 <a:solidFill>
                   <a:srgbClr val="22222B"/>
                 </a:solidFill>
               </a:defRPr>
             </a:pPr>
             <a:r>
-              <a:t>▸  One intelligent layer over real Blood Warriors dataset (7,000+ donor records)</a:t>
-            </a:r>
-          </a:p>
-          <a:p>
-            <a:pPr>
+              <a:t>Same donors called repeatedly; others never reached.</a:t>
+            </a:r>
+          </a:p>
+          <a:p>
+            <a:pPr>
+              <a:lnSpc>
+                <a:spcPct val="125000"/>
+              </a:lnSpc>
               <a:spcAft>
-                <a:spcPts val="1000"/>
+                <a:spcPts val="1400"/>
               </a:spcAft>
-              <a:defRPr sz="1900">
+              <a:defRPr sz="1500">
                 <a:solidFill>
                   <a:srgbClr val="22222B"/>
                 </a:solidFill>
               </a:defRPr>
             </a:pPr>
             <a:r>
-              <a:t>▸  Sequential donor outreach — one patient, one donor at a time (no over-mobilization)</a:t>
-            </a:r>
-          </a:p>
-          <a:p>
-            <a:pPr>
+              <a:t>No shared memory of who said yes, who timed out, who cancelled.</a:t>
+            </a:r>
+          </a:p>
+          <a:p>
+            <a:pPr>
+              <a:lnSpc>
+                <a:spcPct val="125000"/>
+              </a:lnSpc>
               <a:spcAft>
-                <a:spcPts val="1000"/>
+                <a:spcPts val="1400"/>
               </a:spcAft>
-              <a:defRPr sz="1900">
+              <a:defRPr sz="1500">
                 <a:solidFill>
                   <a:srgbClr val="22222B"/>
                 </a:solidFill>
               </a:defRPr>
             </a:pPr>
             <a:r>
-              <a:t>▸  Surge mode for emergencies — all eligible donors in parallel, one shot</a:t>
-            </a:r>
-          </a:p>
-          <a:p>
-            <a:pPr>
+              <a:t>Dashboard is a spreadsheet. Outreach stops when the laptop sleeps.</a:t>
+            </a:r>
+          </a:p>
+        </p:txBody>
+      </p:sp>
+      <p:sp>
+        <p:nvSpPr>
+          <p:cNvPr id="7" name="Rounded Rectangle 6"/>
+          <p:cNvSpPr/>
+          <p:nvPr/>
+        </p:nvSpPr>
+        <p:spPr>
+          <a:xfrm>
+            <a:off x="6263640" y="1417320"/>
+            <a:ext cx="5486400" cy="4892040"/>
+          </a:xfrm>
+          <a:prstGeom prst="roundRect">
+            <a:avLst/>
+          </a:prstGeom>
+          <a:solidFill>
+            <a:srgbClr val="FFFFFF"/>
+          </a:solidFill>
+          <a:ln w="15240">
+            <a:solidFill>
+              <a:srgbClr val="FDE8EA"/>
+            </a:solidFill>
+          </a:ln>
+        </p:spPr>
+        <p:style>
+          <a:lnRef idx="1">
+            <a:schemeClr val="accent1"/>
+          </a:lnRef>
+          <a:fillRef idx="3">
+            <a:schemeClr val="accent1"/>
+          </a:fillRef>
+          <a:effectRef idx="2">
+            <a:schemeClr val="accent1"/>
+          </a:effectRef>
+          <a:fontRef idx="minor">
+            <a:schemeClr val="lt1"/>
+          </a:fontRef>
+        </p:style>
+        <p:txBody>
+          <a:bodyPr rtlCol="0" anchor="ctr"/>
+          <a:lstStyle/>
+          <a:p>
+            <a:pPr algn="ctr"/>
+          </a:p>
+        </p:txBody>
+      </p:sp>
+      <p:sp>
+        <p:nvSpPr>
+          <p:cNvPr id="8" name="TextBox 7"/>
+          <p:cNvSpPr txBox="1"/>
+          <p:nvPr/>
+        </p:nvSpPr>
+        <p:spPr>
+          <a:xfrm>
+            <a:off x="6492240" y="1600200"/>
+            <a:ext cx="5029200" cy="411480"/>
+          </a:xfrm>
+          <a:prstGeom prst="rect">
+            <a:avLst/>
+          </a:prstGeom>
+          <a:noFill/>
+        </p:spPr>
+        <p:txBody>
+          <a:bodyPr wrap="none">
+            <a:spAutoFit/>
+          </a:bodyPr>
+          <a:lstStyle/>
+          <a:p>
+            <a:pPr>
+              <a:defRPr sz="1800" b="1">
+                <a:solidFill>
+                  <a:srgbClr val="C8102E"/>
+                </a:solidFill>
+              </a:defRPr>
+            </a:pPr>
+            <a:r>
+              <a:t>With Spandan (autonomous)</a:t>
+            </a:r>
+          </a:p>
+        </p:txBody>
+      </p:sp>
+      <p:sp>
+        <p:nvSpPr>
+          <p:cNvPr id="9" name="TextBox 8"/>
+          <p:cNvSpPr txBox="1"/>
+          <p:nvPr/>
+        </p:nvSpPr>
+        <p:spPr>
+          <a:xfrm>
+            <a:off x="6492240" y="2011680"/>
+            <a:ext cx="4983480" cy="5029200"/>
+          </a:xfrm>
+          <a:prstGeom prst="rect">
+            <a:avLst/>
+          </a:prstGeom>
+          <a:noFill/>
+        </p:spPr>
+        <p:txBody>
+          <a:bodyPr wrap="square">
+            <a:spAutoFit/>
+          </a:bodyPr>
+          <a:lstStyle/>
+          <a:p>
+            <a:pPr>
+              <a:lnSpc>
+                <a:spcPct val="125000"/>
+              </a:lnSpc>
               <a:spcAft>
-                <a:spcPts val="1000"/>
+                <a:spcPts val="1400"/>
               </a:spcAft>
-              <a:defRPr sz="1900">
+              <a:defRPr sz="1500">
                 <a:solidFill>
                   <a:srgbClr val="22222B"/>
                 </a:solidFill>
               </a:defRPr>
             </a:pPr>
             <a:r>
-              <a:t>▸  Coordinator dashboard for visibility — agent runs 24/7 without the UI open</a:t>
+              <a:t>Agent forecasts the 90-day pipeline and works most urgent patients first.</a:t>
+            </a:r>
+          </a:p>
+          <a:p>
+            <a:pPr>
+              <a:lnSpc>
+                <a:spcPct val="125000"/>
+              </a:lnSpc>
+              <a:spcAft>
+                <a:spcPts val="1400"/>
+              </a:spcAft>
+              <a:defRPr sz="1500">
+                <a:solidFill>
+                  <a:srgbClr val="22222B"/>
+                </a:solidFill>
+              </a:defRPr>
+            </a:pPr>
+            <a:r>
+              <a:t>ML ranks donors by likelihood to respond; blood-group rules enforce safety.</a:t>
+            </a:r>
+          </a:p>
+          <a:p>
+            <a:pPr>
+              <a:lnSpc>
+                <a:spcPct val="125000"/>
+              </a:lnSpc>
+              <a:spcAft>
+                <a:spcPts val="1400"/>
+              </a:spcAft>
+              <a:defRPr sz="1500">
+                <a:solidFill>
+                  <a:srgbClr val="22222B"/>
+                </a:solidFill>
+              </a:defRPr>
+            </a:pPr>
+            <a:r>
+              <a:t>Bedrock writes Telugu, Hindi, Tamil, or English emails; donors reply YES/NO via magic link.</a:t>
+            </a:r>
+          </a:p>
+          <a:p>
+            <a:pPr>
+              <a:lnSpc>
+                <a:spcPct val="125000"/>
+              </a:lnSpc>
+              <a:spcAft>
+                <a:spcPts val="1400"/>
+              </a:spcAft>
+              <a:defRPr sz="1500">
+                <a:solidFill>
+                  <a:srgbClr val="22222B"/>
+                </a:solidFill>
+              </a:defRPr>
+            </a:pPr>
+            <a:r>
+              <a:t>Runs 24/7 on EC2 — coordinator watches, intervenes only when needed.</a:t>
             </a:r>
           </a:p>
         </p:txBody>
@@ -4393,8 +7389,8 @@
         </p:nvSpPr>
         <p:spPr>
           <a:xfrm>
-            <a:off x="548640" y="502920"/>
-            <a:ext cx="11064240" cy="1097280"/>
+            <a:off x="594360" y="457200"/>
+            <a:ext cx="11155680" cy="1051560"/>
           </a:xfrm>
           <a:prstGeom prst="rect">
             <a:avLst/>
@@ -4408,80 +7404,43 @@
           <a:lstStyle/>
           <a:p>
             <a:pPr>
-              <a:defRPr sz="3600" b="1">
+              <a:defRPr sz="3400" b="1">
                 <a:solidFill>
                   <a:srgbClr val="C8102E"/>
                 </a:solidFill>
               </a:defRPr>
             </a:pPr>
             <a:r>
-              <a:t>Autonomous loop</a:t>
-            </a:r>
-          </a:p>
-        </p:txBody>
-      </p:sp>
-      <p:sp>
-        <p:nvSpPr>
-          <p:cNvPr id="4" name="Rounded Rectangle 3"/>
-          <p:cNvSpPr/>
-          <p:nvPr/>
-        </p:nvSpPr>
-        <p:spPr>
-          <a:xfrm>
-            <a:off x="685800" y="1417320"/>
-            <a:ext cx="1920240" cy="658368"/>
-          </a:xfrm>
-          <a:prstGeom prst="roundRect">
-            <a:avLst/>
-          </a:prstGeom>
-          <a:solidFill>
-            <a:srgbClr val="C8102E"/>
-          </a:solidFill>
-          <a:ln>
-            <a:noFill/>
-          </a:ln>
-        </p:spPr>
-        <p:style>
-          <a:lnRef idx="1">
-            <a:schemeClr val="accent1"/>
-          </a:lnRef>
-          <a:fillRef idx="3">
-            <a:schemeClr val="accent1"/>
-          </a:fillRef>
-          <a:effectRef idx="2">
-            <a:schemeClr val="accent1"/>
-          </a:effectRef>
-          <a:fontRef idx="minor">
-            <a:schemeClr val="lt1"/>
-          </a:fontRef>
-        </p:style>
-        <p:txBody>
-          <a:bodyPr rtlCol="0" anchor="ctr"/>
-          <a:lstStyle/>
-          <a:p>
-            <a:pPr algn="ctr">
-              <a:defRPr sz="1400" b="1">
-                <a:solidFill>
-                  <a:srgbClr val="FFFFFF"/>
-                </a:solidFill>
-              </a:defRPr>
-            </a:pPr>
-            <a:r>
-              <a:t>Forecast</a:t>
-            </a:r>
-          </a:p>
-        </p:txBody>
-      </p:sp>
-      <p:sp>
-        <p:nvSpPr>
-          <p:cNvPr id="5" name="TextBox 4"/>
+              <a:t>What Spandan does</a:t>
+            </a:r>
+          </a:p>
+          <a:p>
+            <a:pPr>
+              <a:spcBef>
+                <a:spcPts val="400"/>
+              </a:spcBef>
+              <a:defRPr sz="1500">
+                <a:solidFill>
+                  <a:srgbClr val="5A6068"/>
+                </a:solidFill>
+              </a:defRPr>
+            </a:pPr>
+            <a:r>
+              <a:t>One intelligent nervous system for the donor network</a:t>
+            </a:r>
+          </a:p>
+        </p:txBody>
+      </p:sp>
+      <p:sp>
+        <p:nvSpPr>
+          <p:cNvPr id="4" name="TextBox 3"/>
           <p:cNvSpPr txBox="1"/>
           <p:nvPr/>
         </p:nvSpPr>
         <p:spPr>
           <a:xfrm>
-            <a:off x="2697480" y="1508760"/>
-            <a:ext cx="365760" cy="457200"/>
+            <a:off x="640080" y="1417320"/>
+            <a:ext cx="10881360" cy="5029200"/>
           </a:xfrm>
           <a:prstGeom prst="rect">
             <a:avLst/>
@@ -4489,47 +7448,18 @@
           <a:noFill/>
         </p:spPr>
         <p:txBody>
-          <a:bodyPr wrap="none">
+          <a:bodyPr wrap="square">
             <a:spAutoFit/>
           </a:bodyPr>
           <a:lstStyle/>
           <a:p>
             <a:pPr>
-              <a:defRPr sz="2200">
-                <a:solidFill>
-                  <a:srgbClr val="C8102E"/>
-                </a:solidFill>
-              </a:defRPr>
-            </a:pPr>
-            <a:r>
-              <a:t>→</a:t>
-            </a:r>
-          </a:p>
-        </p:txBody>
-      </p:sp>
-      <p:sp>
-        <p:nvSpPr>
-          <p:cNvPr id="6" name="TextBox 5"/>
-          <p:cNvSpPr txBox="1"/>
-          <p:nvPr/>
-        </p:nvSpPr>
-        <p:spPr>
-          <a:xfrm>
-            <a:off x="3063240" y="1527048"/>
-            <a:ext cx="8412480" cy="548640"/>
-          </a:xfrm>
-          <a:prstGeom prst="rect">
-            <a:avLst/>
-          </a:prstGeom>
-          <a:noFill/>
-        </p:spPr>
-        <p:txBody>
-          <a:bodyPr wrap="none">
-            <a:spAutoFit/>
-          </a:bodyPr>
-          <a:lstStyle/>
-          <a:p>
-            <a:pPr>
+              <a:lnSpc>
+                <a:spcPct val="125000"/>
+              </a:lnSpc>
+              <a:spcAft>
+                <a:spcPts val="1400"/>
+              </a:spcAft>
               <a:defRPr sz="1700">
                 <a:solidFill>
                   <a:srgbClr val="22222B"/>
@@ -4537,121 +7467,17 @@
               </a:defRPr>
             </a:pPr>
             <a:r>
-              <a:t>Roll transfusion cadence forward → 90-day pipeline</a:t>
-            </a:r>
-          </a:p>
-        </p:txBody>
-      </p:sp>
-      <p:sp>
-        <p:nvSpPr>
-          <p:cNvPr id="7" name="Rounded Rectangle 6"/>
-          <p:cNvSpPr/>
-          <p:nvPr/>
-        </p:nvSpPr>
-        <p:spPr>
-          <a:xfrm>
-            <a:off x="685800" y="2377440"/>
-            <a:ext cx="1920240" cy="658368"/>
-          </a:xfrm>
-          <a:prstGeom prst="roundRect">
-            <a:avLst/>
-          </a:prstGeom>
-          <a:solidFill>
-            <a:srgbClr val="22222B"/>
-          </a:solidFill>
-          <a:ln>
-            <a:noFill/>
-          </a:ln>
-        </p:spPr>
-        <p:style>
-          <a:lnRef idx="1">
-            <a:schemeClr val="accent1"/>
-          </a:lnRef>
-          <a:fillRef idx="3">
-            <a:schemeClr val="accent1"/>
-          </a:fillRef>
-          <a:effectRef idx="2">
-            <a:schemeClr val="accent1"/>
-          </a:effectRef>
-          <a:fontRef idx="minor">
-            <a:schemeClr val="lt1"/>
-          </a:fontRef>
-        </p:style>
-        <p:txBody>
-          <a:bodyPr rtlCol="0" anchor="ctr"/>
-          <a:lstStyle/>
-          <a:p>
-            <a:pPr algn="ctr">
-              <a:defRPr sz="1400" b="1">
-                <a:solidFill>
-                  <a:srgbClr val="FFFFFF"/>
-                </a:solidFill>
-              </a:defRPr>
-            </a:pPr>
-            <a:r>
-              <a:t>Rank (ML)</a:t>
-            </a:r>
-          </a:p>
-        </p:txBody>
-      </p:sp>
-      <p:sp>
-        <p:nvSpPr>
-          <p:cNvPr id="8" name="TextBox 7"/>
-          <p:cNvSpPr txBox="1"/>
-          <p:nvPr/>
-        </p:nvSpPr>
-        <p:spPr>
-          <a:xfrm>
-            <a:off x="2697480" y="2468880"/>
-            <a:ext cx="365760" cy="457200"/>
-          </a:xfrm>
-          <a:prstGeom prst="rect">
-            <a:avLst/>
-          </a:prstGeom>
-          <a:noFill/>
-        </p:spPr>
-        <p:txBody>
-          <a:bodyPr wrap="none">
-            <a:spAutoFit/>
-          </a:bodyPr>
-          <a:lstStyle/>
-          <a:p>
-            <a:pPr>
-              <a:defRPr sz="2200">
-                <a:solidFill>
-                  <a:srgbClr val="C8102E"/>
-                </a:solidFill>
-              </a:defRPr>
-            </a:pPr>
-            <a:r>
-              <a:t>→</a:t>
-            </a:r>
-          </a:p>
-        </p:txBody>
-      </p:sp>
-      <p:sp>
-        <p:nvSpPr>
-          <p:cNvPr id="9" name="TextBox 8"/>
-          <p:cNvSpPr txBox="1"/>
-          <p:nvPr/>
-        </p:nvSpPr>
-        <p:spPr>
-          <a:xfrm>
-            <a:off x="3063240" y="2487168"/>
-            <a:ext cx="8412480" cy="548640"/>
-          </a:xfrm>
-          <a:prstGeom prst="rect">
-            <a:avLst/>
-          </a:prstGeom>
-          <a:noFill/>
-        </p:spPr>
-        <p:txBody>
-          <a:bodyPr wrap="none">
-            <a:spAutoFit/>
-          </a:bodyPr>
-          <a:lstStyle/>
-          <a:p>
-            <a:pPr>
+              <a:t>Spandan is not a chatbot on a website. It is an autonomous state machine that wakes every 30 seconds, advances every urgent patient by one step, and remembers everything in DynamoDB.</a:t>
+            </a:r>
+          </a:p>
+          <a:p>
+            <a:pPr>
+              <a:lnSpc>
+                <a:spcPct val="125000"/>
+              </a:lnSpc>
+              <a:spcAft>
+                <a:spcPts val="1400"/>
+              </a:spcAft>
               <a:defRPr sz="1700">
                 <a:solidFill>
                   <a:srgbClr val="22222B"/>
@@ -4659,121 +7485,17 @@
               </a:defRPr>
             </a:pPr>
             <a:r>
-              <a:t>Logistic regression · blood-group filter · top donors</a:t>
-            </a:r>
-          </a:p>
-        </p:txBody>
-      </p:sp>
-      <p:sp>
-        <p:nvSpPr>
-          <p:cNvPr id="10" name="Rounded Rectangle 9"/>
-          <p:cNvSpPr/>
-          <p:nvPr/>
-        </p:nvSpPr>
-        <p:spPr>
-          <a:xfrm>
-            <a:off x="685800" y="3337560"/>
-            <a:ext cx="1920240" cy="658368"/>
-          </a:xfrm>
-          <a:prstGeom prst="roundRect">
-            <a:avLst/>
-          </a:prstGeom>
-          <a:solidFill>
-            <a:srgbClr val="C8102E"/>
-          </a:solidFill>
-          <a:ln>
-            <a:noFill/>
-          </a:ln>
-        </p:spPr>
-        <p:style>
-          <a:lnRef idx="1">
-            <a:schemeClr val="accent1"/>
-          </a:lnRef>
-          <a:fillRef idx="3">
-            <a:schemeClr val="accent1"/>
-          </a:fillRef>
-          <a:effectRef idx="2">
-            <a:schemeClr val="accent1"/>
-          </a:effectRef>
-          <a:fontRef idx="minor">
-            <a:schemeClr val="lt1"/>
-          </a:fontRef>
-        </p:style>
-        <p:txBody>
-          <a:bodyPr rtlCol="0" anchor="ctr"/>
-          <a:lstStyle/>
-          <a:p>
-            <a:pPr algn="ctr">
-              <a:defRPr sz="1400" b="1">
-                <a:solidFill>
-                  <a:srgbClr val="FFFFFF"/>
-                </a:solidFill>
-              </a:defRPr>
-            </a:pPr>
-            <a:r>
-              <a:t>Outreach</a:t>
-            </a:r>
-          </a:p>
-        </p:txBody>
-      </p:sp>
-      <p:sp>
-        <p:nvSpPr>
-          <p:cNvPr id="11" name="TextBox 10"/>
-          <p:cNvSpPr txBox="1"/>
-          <p:nvPr/>
-        </p:nvSpPr>
-        <p:spPr>
-          <a:xfrm>
-            <a:off x="2697480" y="3429000"/>
-            <a:ext cx="365760" cy="457200"/>
-          </a:xfrm>
-          <a:prstGeom prst="rect">
-            <a:avLst/>
-          </a:prstGeom>
-          <a:noFill/>
-        </p:spPr>
-        <p:txBody>
-          <a:bodyPr wrap="none">
-            <a:spAutoFit/>
-          </a:bodyPr>
-          <a:lstStyle/>
-          <a:p>
-            <a:pPr>
-              <a:defRPr sz="2200">
-                <a:solidFill>
-                  <a:srgbClr val="C8102E"/>
-                </a:solidFill>
-              </a:defRPr>
-            </a:pPr>
-            <a:r>
-              <a:t>→</a:t>
-            </a:r>
-          </a:p>
-        </p:txBody>
-      </p:sp>
-      <p:sp>
-        <p:nvSpPr>
-          <p:cNvPr id="12" name="TextBox 11"/>
-          <p:cNvSpPr txBox="1"/>
-          <p:nvPr/>
-        </p:nvSpPr>
-        <p:spPr>
-          <a:xfrm>
-            <a:off x="3063240" y="3447288"/>
-            <a:ext cx="8412480" cy="548640"/>
-          </a:xfrm>
-          <a:prstGeom prst="rect">
-            <a:avLst/>
-          </a:prstGeom>
-          <a:noFill/>
-        </p:spPr>
-        <p:txBody>
-          <a:bodyPr wrap="none">
-            <a:spAutoFit/>
-          </a:bodyPr>
-          <a:lstStyle/>
-          <a:p>
-            <a:pPr>
+              <a:t>For each patient (bridge), it predicts when blood is needed, loads that patient's donor pool from the real dataset, ranks donors with logistic regression, and emails exactly one donor at a time — waiting for a reply before escalating.</a:t>
+            </a:r>
+          </a:p>
+          <a:p>
+            <a:pPr>
+              <a:lnSpc>
+                <a:spcPct val="125000"/>
+              </a:lnSpc>
+              <a:spcAft>
+                <a:spcPts val="1400"/>
+              </a:spcAft>
               <a:defRPr sz="1700">
                 <a:solidFill>
                   <a:srgbClr val="22222B"/>
@@ -4781,121 +7503,17 @@
               </a:defRPr>
             </a:pPr>
             <a:r>
-              <a:t>Bedrock Haiku drafts multilingual HTML emails</a:t>
-            </a:r>
-          </a:p>
-        </p:txBody>
-      </p:sp>
-      <p:sp>
-        <p:nvSpPr>
-          <p:cNvPr id="13" name="Rounded Rectangle 12"/>
-          <p:cNvSpPr/>
-          <p:nvPr/>
-        </p:nvSpPr>
-        <p:spPr>
-          <a:xfrm>
-            <a:off x="685800" y="4297680"/>
-            <a:ext cx="1920240" cy="658368"/>
-          </a:xfrm>
-          <a:prstGeom prst="roundRect">
-            <a:avLst/>
-          </a:prstGeom>
-          <a:solidFill>
-            <a:srgbClr val="22222B"/>
-          </a:solidFill>
-          <a:ln>
-            <a:noFill/>
-          </a:ln>
-        </p:spPr>
-        <p:style>
-          <a:lnRef idx="1">
-            <a:schemeClr val="accent1"/>
-          </a:lnRef>
-          <a:fillRef idx="3">
-            <a:schemeClr val="accent1"/>
-          </a:fillRef>
-          <a:effectRef idx="2">
-            <a:schemeClr val="accent1"/>
-          </a:effectRef>
-          <a:fontRef idx="minor">
-            <a:schemeClr val="lt1"/>
-          </a:fontRef>
-        </p:style>
-        <p:txBody>
-          <a:bodyPr rtlCol="0" anchor="ctr"/>
-          <a:lstStyle/>
-          <a:p>
-            <a:pPr algn="ctr">
-              <a:defRPr sz="1400" b="1">
-                <a:solidFill>
-                  <a:srgbClr val="FFFFFF"/>
-                </a:solidFill>
-              </a:defRPr>
-            </a:pPr>
-            <a:r>
-              <a:t>Reply</a:t>
-            </a:r>
-          </a:p>
-        </p:txBody>
-      </p:sp>
-      <p:sp>
-        <p:nvSpPr>
-          <p:cNvPr id="14" name="TextBox 13"/>
-          <p:cNvSpPr txBox="1"/>
-          <p:nvPr/>
-        </p:nvSpPr>
-        <p:spPr>
-          <a:xfrm>
-            <a:off x="2697480" y="4389120"/>
-            <a:ext cx="365760" cy="457200"/>
-          </a:xfrm>
-          <a:prstGeom prst="rect">
-            <a:avLst/>
-          </a:prstGeom>
-          <a:noFill/>
-        </p:spPr>
-        <p:txBody>
-          <a:bodyPr wrap="none">
-            <a:spAutoFit/>
-          </a:bodyPr>
-          <a:lstStyle/>
-          <a:p>
-            <a:pPr>
-              <a:defRPr sz="2200">
-                <a:solidFill>
-                  <a:srgbClr val="C8102E"/>
-                </a:solidFill>
-              </a:defRPr>
-            </a:pPr>
-            <a:r>
-              <a:t>→</a:t>
-            </a:r>
-          </a:p>
-        </p:txBody>
-      </p:sp>
-      <p:sp>
-        <p:nvSpPr>
-          <p:cNvPr id="15" name="TextBox 14"/>
-          <p:cNvSpPr txBox="1"/>
-          <p:nvPr/>
-        </p:nvSpPr>
-        <p:spPr>
-          <a:xfrm>
-            <a:off x="3063240" y="4407408"/>
-            <a:ext cx="8412480" cy="548640"/>
-          </a:xfrm>
-          <a:prstGeom prst="rect">
-            <a:avLst/>
-          </a:prstGeom>
-          <a:noFill/>
-        </p:spPr>
-        <p:txBody>
-          <a:bodyPr wrap="none">
-            <a:spAutoFit/>
-          </a:bodyPr>
-          <a:lstStyle/>
-          <a:p>
-            <a:pPr>
+              <a:t>When a donor clicks YES in their inbox, the agent confirms the donation, sends a reminder, and rolls the patient's transfusion timeline forward. When they say NO or stay silent, the next-ranked donor is contacted automatically.</a:t>
+            </a:r>
+          </a:p>
+          <a:p>
+            <a:pPr>
+              <a:lnSpc>
+                <a:spcPct val="125000"/>
+              </a:lnSpc>
+              <a:spcAft>
+                <a:spcPts val="1400"/>
+              </a:spcAft>
               <a:defRPr sz="1700">
                 <a:solidFill>
                   <a:srgbClr val="22222B"/>
@@ -4903,129 +7521,7 @@
               </a:defRPr>
             </a:pPr>
             <a:r>
-              <a:t>Magic-link YES / NO → classify intent → confirm or next donor</a:t>
-            </a:r>
-          </a:p>
-        </p:txBody>
-      </p:sp>
-      <p:sp>
-        <p:nvSpPr>
-          <p:cNvPr id="16" name="Rounded Rectangle 15"/>
-          <p:cNvSpPr/>
-          <p:nvPr/>
-        </p:nvSpPr>
-        <p:spPr>
-          <a:xfrm>
-            <a:off x="685800" y="5257800"/>
-            <a:ext cx="1920240" cy="658368"/>
-          </a:xfrm>
-          <a:prstGeom prst="roundRect">
-            <a:avLst/>
-          </a:prstGeom>
-          <a:solidFill>
-            <a:srgbClr val="C8102E"/>
-          </a:solidFill>
-          <a:ln>
-            <a:noFill/>
-          </a:ln>
-        </p:spPr>
-        <p:style>
-          <a:lnRef idx="1">
-            <a:schemeClr val="accent1"/>
-          </a:lnRef>
-          <a:fillRef idx="3">
-            <a:schemeClr val="accent1"/>
-          </a:fillRef>
-          <a:effectRef idx="2">
-            <a:schemeClr val="accent1"/>
-          </a:effectRef>
-          <a:fontRef idx="minor">
-            <a:schemeClr val="lt1"/>
-          </a:fontRef>
-        </p:style>
-        <p:txBody>
-          <a:bodyPr rtlCol="0" anchor="ctr"/>
-          <a:lstStyle/>
-          <a:p>
-            <a:pPr algn="ctr">
-              <a:defRPr sz="1400" b="1">
-                <a:solidFill>
-                  <a:srgbClr val="FFFFFF"/>
-                </a:solidFill>
-              </a:defRPr>
-            </a:pPr>
-            <a:r>
-              <a:t>Escalate</a:t>
-            </a:r>
-          </a:p>
-        </p:txBody>
-      </p:sp>
-      <p:sp>
-        <p:nvSpPr>
-          <p:cNvPr id="17" name="TextBox 16"/>
-          <p:cNvSpPr txBox="1"/>
-          <p:nvPr/>
-        </p:nvSpPr>
-        <p:spPr>
-          <a:xfrm>
-            <a:off x="2697480" y="5349240"/>
-            <a:ext cx="365760" cy="457200"/>
-          </a:xfrm>
-          <a:prstGeom prst="rect">
-            <a:avLst/>
-          </a:prstGeom>
-          <a:noFill/>
-        </p:spPr>
-        <p:txBody>
-          <a:bodyPr wrap="none">
-            <a:spAutoFit/>
-          </a:bodyPr>
-          <a:lstStyle/>
-          <a:p>
-            <a:pPr>
-              <a:defRPr sz="2200">
-                <a:solidFill>
-                  <a:srgbClr val="C8102E"/>
-                </a:solidFill>
-              </a:defRPr>
-            </a:pPr>
-            <a:r>
-              <a:t>→</a:t>
-            </a:r>
-          </a:p>
-        </p:txBody>
-      </p:sp>
-      <p:sp>
-        <p:nvSpPr>
-          <p:cNvPr id="18" name="TextBox 17"/>
-          <p:cNvSpPr txBox="1"/>
-          <p:nvPr/>
-        </p:nvSpPr>
-        <p:spPr>
-          <a:xfrm>
-            <a:off x="3063240" y="5367528"/>
-            <a:ext cx="8412480" cy="548640"/>
-          </a:xfrm>
-          <a:prstGeom prst="rect">
-            <a:avLst/>
-          </a:prstGeom>
-          <a:noFill/>
-        </p:spPr>
-        <p:txBody>
-          <a:bodyPr wrap="none">
-            <a:spAutoFit/>
-          </a:bodyPr>
-          <a:lstStyle/>
-          <a:p>
-            <a:pPr>
-              <a:defRPr sz="1700">
-                <a:solidFill>
-                  <a:srgbClr val="22222B"/>
-                </a:solidFill>
-              </a:defRPr>
-            </a:pPr>
-            <a:r>
-              <a:t>Timeout → next donor · post-YES reminder · emergency surge</a:t>
+              <a:t>Emergency surge mode blasts all eligible ranked donors in parallel — one shot, with guards so we never over-book a patient.</a:t>
             </a:r>
           </a:p>
         </p:txBody>
@@ -5107,8 +7603,8 @@
         </p:nvSpPr>
         <p:spPr>
           <a:xfrm>
-            <a:off x="548640" y="502920"/>
-            <a:ext cx="11064240" cy="1097280"/>
+            <a:off x="594360" y="457200"/>
+            <a:ext cx="11155680" cy="1051560"/>
           </a:xfrm>
           <a:prstGeom prst="rect">
             <a:avLst/>
@@ -5122,28 +7618,580 @@
           <a:lstStyle/>
           <a:p>
             <a:pPr>
-              <a:defRPr sz="3600" b="1">
+              <a:defRPr sz="3400" b="1">
                 <a:solidFill>
                   <a:srgbClr val="C8102E"/>
                 </a:solidFill>
               </a:defRPr>
             </a:pPr>
             <a:r>
-              <a:t>AI &amp; ML components</a:t>
-            </a:r>
-          </a:p>
-        </p:txBody>
-      </p:sp>
-      <p:sp>
-        <p:nvSpPr>
-          <p:cNvPr id="4" name="TextBox 3"/>
+              <a:t>Built for real scale</a:t>
+            </a:r>
+          </a:p>
+        </p:txBody>
+      </p:sp>
+      <p:sp>
+        <p:nvSpPr>
+          <p:cNvPr id="4" name="Rounded Rectangle 3"/>
+          <p:cNvSpPr/>
+          <p:nvPr/>
+        </p:nvSpPr>
+        <p:spPr>
+          <a:xfrm>
+            <a:off x="594360" y="1417320"/>
+            <a:ext cx="2651760" cy="1280160"/>
+          </a:xfrm>
+          <a:prstGeom prst="roundRect">
+            <a:avLst/>
+          </a:prstGeom>
+          <a:solidFill>
+            <a:srgbClr val="FFFFFF"/>
+          </a:solidFill>
+          <a:ln>
+            <a:solidFill>
+              <a:srgbClr val="FDE8EA"/>
+            </a:solidFill>
+          </a:ln>
+        </p:spPr>
+        <p:style>
+          <a:lnRef idx="1">
+            <a:schemeClr val="accent1"/>
+          </a:lnRef>
+          <a:fillRef idx="3">
+            <a:schemeClr val="accent1"/>
+          </a:fillRef>
+          <a:effectRef idx="2">
+            <a:schemeClr val="accent1"/>
+          </a:effectRef>
+          <a:fontRef idx="minor">
+            <a:schemeClr val="lt1"/>
+          </a:fontRef>
+        </p:style>
+        <p:txBody>
+          <a:bodyPr rtlCol="0" anchor="ctr"/>
+          <a:lstStyle/>
+          <a:p>
+            <a:pPr algn="ctr"/>
+          </a:p>
+        </p:txBody>
+      </p:sp>
+      <p:sp>
+        <p:nvSpPr>
+          <p:cNvPr id="5" name="TextBox 4"/>
           <p:cNvSpPr txBox="1"/>
           <p:nvPr/>
         </p:nvSpPr>
         <p:spPr>
           <a:xfrm>
-            <a:off x="685800" y="1463040"/>
-            <a:ext cx="10515600" cy="4754880"/>
+            <a:off x="731520" y="1554480"/>
+            <a:ext cx="2377440" cy="1005840"/>
+          </a:xfrm>
+          <a:prstGeom prst="rect">
+            <a:avLst/>
+          </a:prstGeom>
+          <a:noFill/>
+        </p:spPr>
+        <p:txBody>
+          <a:bodyPr wrap="none">
+            <a:spAutoFit/>
+          </a:bodyPr>
+          <a:lstStyle/>
+          <a:p>
+            <a:pPr>
+              <a:defRPr sz="2800" b="1">
+                <a:solidFill>
+                  <a:srgbClr val="C8102E"/>
+                </a:solidFill>
+              </a:defRPr>
+            </a:pPr>
+            <a:r>
+              <a:t>7,033</a:t>
+            </a:r>
+          </a:p>
+          <a:p>
+            <a:pPr>
+              <a:defRPr sz="1200">
+                <a:solidFill>
+                  <a:srgbClr val="5A6068"/>
+                </a:solidFill>
+              </a:defRPr>
+            </a:pPr>
+            <a:r>
+              <a:t>rows in organiser dataset</a:t>
+            </a:r>
+          </a:p>
+        </p:txBody>
+      </p:sp>
+      <p:sp>
+        <p:nvSpPr>
+          <p:cNvPr id="6" name="Rounded Rectangle 5"/>
+          <p:cNvSpPr/>
+          <p:nvPr/>
+        </p:nvSpPr>
+        <p:spPr>
+          <a:xfrm>
+            <a:off x="4297680" y="1417320"/>
+            <a:ext cx="2651760" cy="1280160"/>
+          </a:xfrm>
+          <a:prstGeom prst="roundRect">
+            <a:avLst/>
+          </a:prstGeom>
+          <a:solidFill>
+            <a:srgbClr val="FFFFFF"/>
+          </a:solidFill>
+          <a:ln>
+            <a:solidFill>
+              <a:srgbClr val="FDE8EA"/>
+            </a:solidFill>
+          </a:ln>
+        </p:spPr>
+        <p:style>
+          <a:lnRef idx="1">
+            <a:schemeClr val="accent1"/>
+          </a:lnRef>
+          <a:fillRef idx="3">
+            <a:schemeClr val="accent1"/>
+          </a:fillRef>
+          <a:effectRef idx="2">
+            <a:schemeClr val="accent1"/>
+          </a:effectRef>
+          <a:fontRef idx="minor">
+            <a:schemeClr val="lt1"/>
+          </a:fontRef>
+        </p:style>
+        <p:txBody>
+          <a:bodyPr rtlCol="0" anchor="ctr"/>
+          <a:lstStyle/>
+          <a:p>
+            <a:pPr algn="ctr"/>
+          </a:p>
+        </p:txBody>
+      </p:sp>
+      <p:sp>
+        <p:nvSpPr>
+          <p:cNvPr id="7" name="TextBox 6"/>
+          <p:cNvSpPr txBox="1"/>
+          <p:nvPr/>
+        </p:nvSpPr>
+        <p:spPr>
+          <a:xfrm>
+            <a:off x="4434840" y="1554480"/>
+            <a:ext cx="2377440" cy="1005840"/>
+          </a:xfrm>
+          <a:prstGeom prst="rect">
+            <a:avLst/>
+          </a:prstGeom>
+          <a:noFill/>
+        </p:spPr>
+        <p:txBody>
+          <a:bodyPr wrap="none">
+            <a:spAutoFit/>
+          </a:bodyPr>
+          <a:lstStyle/>
+          <a:p>
+            <a:pPr>
+              <a:defRPr sz="2800" b="1">
+                <a:solidFill>
+                  <a:srgbClr val="C8102E"/>
+                </a:solidFill>
+              </a:defRPr>
+            </a:pPr>
+            <a:r>
+              <a:t>6,946</a:t>
+            </a:r>
+          </a:p>
+          <a:p>
+            <a:pPr>
+              <a:defRPr sz="1200">
+                <a:solidFill>
+                  <a:srgbClr val="5A6068"/>
+                </a:solidFill>
+              </a:defRPr>
+            </a:pPr>
+            <a:r>
+              <a:t>donors loaded to DynamoDB</a:t>
+            </a:r>
+          </a:p>
+        </p:txBody>
+      </p:sp>
+      <p:sp>
+        <p:nvSpPr>
+          <p:cNvPr id="8" name="Rounded Rectangle 7"/>
+          <p:cNvSpPr/>
+          <p:nvPr/>
+        </p:nvSpPr>
+        <p:spPr>
+          <a:xfrm>
+            <a:off x="8001000" y="1417320"/>
+            <a:ext cx="2651760" cy="1280160"/>
+          </a:xfrm>
+          <a:prstGeom prst="roundRect">
+            <a:avLst/>
+          </a:prstGeom>
+          <a:solidFill>
+            <a:srgbClr val="FFFFFF"/>
+          </a:solidFill>
+          <a:ln>
+            <a:solidFill>
+              <a:srgbClr val="FDE8EA"/>
+            </a:solidFill>
+          </a:ln>
+        </p:spPr>
+        <p:style>
+          <a:lnRef idx="1">
+            <a:schemeClr val="accent1"/>
+          </a:lnRef>
+          <a:fillRef idx="3">
+            <a:schemeClr val="accent1"/>
+          </a:fillRef>
+          <a:effectRef idx="2">
+            <a:schemeClr val="accent1"/>
+          </a:effectRef>
+          <a:fontRef idx="minor">
+            <a:schemeClr val="lt1"/>
+          </a:fontRef>
+        </p:style>
+        <p:txBody>
+          <a:bodyPr rtlCol="0" anchor="ctr"/>
+          <a:lstStyle/>
+          <a:p>
+            <a:pPr algn="ctr"/>
+          </a:p>
+        </p:txBody>
+      </p:sp>
+      <p:sp>
+        <p:nvSpPr>
+          <p:cNvPr id="9" name="TextBox 8"/>
+          <p:cNvSpPr txBox="1"/>
+          <p:nvPr/>
+        </p:nvSpPr>
+        <p:spPr>
+          <a:xfrm>
+            <a:off x="8138160" y="1554480"/>
+            <a:ext cx="2377440" cy="1005840"/>
+          </a:xfrm>
+          <a:prstGeom prst="rect">
+            <a:avLst/>
+          </a:prstGeom>
+          <a:noFill/>
+        </p:spPr>
+        <p:txBody>
+          <a:bodyPr wrap="none">
+            <a:spAutoFit/>
+          </a:bodyPr>
+          <a:lstStyle/>
+          <a:p>
+            <a:pPr>
+              <a:defRPr sz="2800" b="1">
+                <a:solidFill>
+                  <a:srgbClr val="C8102E"/>
+                </a:solidFill>
+              </a:defRPr>
+            </a:pPr>
+            <a:r>
+              <a:t>80</a:t>
+            </a:r>
+          </a:p>
+          <a:p>
+            <a:pPr>
+              <a:defRPr sz="1200">
+                <a:solidFill>
+                  <a:srgbClr val="5A6068"/>
+                </a:solidFill>
+              </a:defRPr>
+            </a:pPr>
+            <a:r>
+              <a:t>patient bridges</a:t>
+            </a:r>
+          </a:p>
+        </p:txBody>
+      </p:sp>
+      <p:sp>
+        <p:nvSpPr>
+          <p:cNvPr id="10" name="Rounded Rectangle 9"/>
+          <p:cNvSpPr/>
+          <p:nvPr/>
+        </p:nvSpPr>
+        <p:spPr>
+          <a:xfrm>
+            <a:off x="594360" y="3017520"/>
+            <a:ext cx="2651760" cy="1280160"/>
+          </a:xfrm>
+          <a:prstGeom prst="roundRect">
+            <a:avLst/>
+          </a:prstGeom>
+          <a:solidFill>
+            <a:srgbClr val="FFFFFF"/>
+          </a:solidFill>
+          <a:ln>
+            <a:solidFill>
+              <a:srgbClr val="FDE8EA"/>
+            </a:solidFill>
+          </a:ln>
+        </p:spPr>
+        <p:style>
+          <a:lnRef idx="1">
+            <a:schemeClr val="accent1"/>
+          </a:lnRef>
+          <a:fillRef idx="3">
+            <a:schemeClr val="accent1"/>
+          </a:fillRef>
+          <a:effectRef idx="2">
+            <a:schemeClr val="accent1"/>
+          </a:effectRef>
+          <a:fontRef idx="minor">
+            <a:schemeClr val="lt1"/>
+          </a:fontRef>
+        </p:style>
+        <p:txBody>
+          <a:bodyPr rtlCol="0" anchor="ctr"/>
+          <a:lstStyle/>
+          <a:p>
+            <a:pPr algn="ctr"/>
+          </a:p>
+        </p:txBody>
+      </p:sp>
+      <p:sp>
+        <p:nvSpPr>
+          <p:cNvPr id="11" name="TextBox 10"/>
+          <p:cNvSpPr txBox="1"/>
+          <p:nvPr/>
+        </p:nvSpPr>
+        <p:spPr>
+          <a:xfrm>
+            <a:off x="731520" y="3154679"/>
+            <a:ext cx="2377440" cy="1005840"/>
+          </a:xfrm>
+          <a:prstGeom prst="rect">
+            <a:avLst/>
+          </a:prstGeom>
+          <a:noFill/>
+        </p:spPr>
+        <p:txBody>
+          <a:bodyPr wrap="none">
+            <a:spAutoFit/>
+          </a:bodyPr>
+          <a:lstStyle/>
+          <a:p>
+            <a:pPr>
+              <a:defRPr sz="2800" b="1">
+                <a:solidFill>
+                  <a:srgbClr val="C8102E"/>
+                </a:solidFill>
+              </a:defRPr>
+            </a:pPr>
+            <a:r>
+              <a:t>4</a:t>
+            </a:r>
+          </a:p>
+          <a:p>
+            <a:pPr>
+              <a:defRPr sz="1200">
+                <a:solidFill>
+                  <a:srgbClr val="5A6068"/>
+                </a:solidFill>
+              </a:defRPr>
+            </a:pPr>
+            <a:r>
+              <a:t>outreach languages</a:t>
+            </a:r>
+          </a:p>
+        </p:txBody>
+      </p:sp>
+      <p:sp>
+        <p:nvSpPr>
+          <p:cNvPr id="12" name="Rounded Rectangle 11"/>
+          <p:cNvSpPr/>
+          <p:nvPr/>
+        </p:nvSpPr>
+        <p:spPr>
+          <a:xfrm>
+            <a:off x="4297680" y="3017520"/>
+            <a:ext cx="2651760" cy="1280160"/>
+          </a:xfrm>
+          <a:prstGeom prst="roundRect">
+            <a:avLst/>
+          </a:prstGeom>
+          <a:solidFill>
+            <a:srgbClr val="FFFFFF"/>
+          </a:solidFill>
+          <a:ln>
+            <a:solidFill>
+              <a:srgbClr val="FDE8EA"/>
+            </a:solidFill>
+          </a:ln>
+        </p:spPr>
+        <p:style>
+          <a:lnRef idx="1">
+            <a:schemeClr val="accent1"/>
+          </a:lnRef>
+          <a:fillRef idx="3">
+            <a:schemeClr val="accent1"/>
+          </a:fillRef>
+          <a:effectRef idx="2">
+            <a:schemeClr val="accent1"/>
+          </a:effectRef>
+          <a:fontRef idx="minor">
+            <a:schemeClr val="lt1"/>
+          </a:fontRef>
+        </p:style>
+        <p:txBody>
+          <a:bodyPr rtlCol="0" anchor="ctr"/>
+          <a:lstStyle/>
+          <a:p>
+            <a:pPr algn="ctr"/>
+          </a:p>
+        </p:txBody>
+      </p:sp>
+      <p:sp>
+        <p:nvSpPr>
+          <p:cNvPr id="13" name="TextBox 12"/>
+          <p:cNvSpPr txBox="1"/>
+          <p:nvPr/>
+        </p:nvSpPr>
+        <p:spPr>
+          <a:xfrm>
+            <a:off x="4434840" y="3154679"/>
+            <a:ext cx="2377440" cy="1005840"/>
+          </a:xfrm>
+          <a:prstGeom prst="rect">
+            <a:avLst/>
+          </a:prstGeom>
+          <a:noFill/>
+        </p:spPr>
+        <p:txBody>
+          <a:bodyPr wrap="none">
+            <a:spAutoFit/>
+          </a:bodyPr>
+          <a:lstStyle/>
+          <a:p>
+            <a:pPr>
+              <a:defRPr sz="2800" b="1">
+                <a:solidFill>
+                  <a:srgbClr val="C8102E"/>
+                </a:solidFill>
+              </a:defRPr>
+            </a:pPr>
+            <a:r>
+              <a:t>24/7</a:t>
+            </a:r>
+          </a:p>
+          <a:p>
+            <a:pPr>
+              <a:defRPr sz="1200">
+                <a:solidFill>
+                  <a:srgbClr val="5A6068"/>
+                </a:solidFill>
+              </a:defRPr>
+            </a:pPr>
+            <a:r>
+              <a:t>agent on EC2</a:t>
+            </a:r>
+          </a:p>
+        </p:txBody>
+      </p:sp>
+      <p:sp>
+        <p:nvSpPr>
+          <p:cNvPr id="14" name="Rounded Rectangle 13"/>
+          <p:cNvSpPr/>
+          <p:nvPr/>
+        </p:nvSpPr>
+        <p:spPr>
+          <a:xfrm>
+            <a:off x="8001000" y="3017520"/>
+            <a:ext cx="2651760" cy="1280160"/>
+          </a:xfrm>
+          <a:prstGeom prst="roundRect">
+            <a:avLst/>
+          </a:prstGeom>
+          <a:solidFill>
+            <a:srgbClr val="FFFFFF"/>
+          </a:solidFill>
+          <a:ln>
+            <a:solidFill>
+              <a:srgbClr val="FDE8EA"/>
+            </a:solidFill>
+          </a:ln>
+        </p:spPr>
+        <p:style>
+          <a:lnRef idx="1">
+            <a:schemeClr val="accent1"/>
+          </a:lnRef>
+          <a:fillRef idx="3">
+            <a:schemeClr val="accent1"/>
+          </a:fillRef>
+          <a:effectRef idx="2">
+            <a:schemeClr val="accent1"/>
+          </a:effectRef>
+          <a:fontRef idx="minor">
+            <a:schemeClr val="lt1"/>
+          </a:fontRef>
+        </p:style>
+        <p:txBody>
+          <a:bodyPr rtlCol="0" anchor="ctr"/>
+          <a:lstStyle/>
+          <a:p>
+            <a:pPr algn="ctr"/>
+          </a:p>
+        </p:txBody>
+      </p:sp>
+      <p:sp>
+        <p:nvSpPr>
+          <p:cNvPr id="15" name="TextBox 14"/>
+          <p:cNvSpPr txBox="1"/>
+          <p:nvPr/>
+        </p:nvSpPr>
+        <p:spPr>
+          <a:xfrm>
+            <a:off x="8138160" y="3154679"/>
+            <a:ext cx="2377440" cy="1005840"/>
+          </a:xfrm>
+          <a:prstGeom prst="rect">
+            <a:avLst/>
+          </a:prstGeom>
+          <a:noFill/>
+        </p:spPr>
+        <p:txBody>
+          <a:bodyPr wrap="none">
+            <a:spAutoFit/>
+          </a:bodyPr>
+          <a:lstStyle/>
+          <a:p>
+            <a:pPr>
+              <a:defRPr sz="2800" b="1">
+                <a:solidFill>
+                  <a:srgbClr val="C8102E"/>
+                </a:solidFill>
+              </a:defRPr>
+            </a:pPr>
+            <a:r>
+              <a:t>~0.7</a:t>
+            </a:r>
+          </a:p>
+          <a:p>
+            <a:pPr>
+              <a:defRPr sz="1200">
+                <a:solidFill>
+                  <a:srgbClr val="5A6068"/>
+                </a:solidFill>
+              </a:defRPr>
+            </a:pPr>
+            <a:r>
+              <a:t>ML ranking AUC</a:t>
+            </a:r>
+          </a:p>
+        </p:txBody>
+      </p:sp>
+      <p:sp>
+        <p:nvSpPr>
+          <p:cNvPr id="16" name="TextBox 15"/>
+          <p:cNvSpPr txBox="1"/>
+          <p:nvPr/>
+        </p:nvSpPr>
+        <p:spPr>
+          <a:xfrm>
+            <a:off x="640080" y="4709160"/>
+            <a:ext cx="10881360" cy="5029200"/>
           </a:xfrm>
           <a:prstGeom prst="rect">
             <a:avLst/>
@@ -5157,77 +8205,20 @@
           <a:lstStyle/>
           <a:p>
             <a:pPr>
+              <a:lnSpc>
+                <a:spcPct val="125000"/>
+              </a:lnSpc>
               <a:spcAft>
-                <a:spcPts val="1000"/>
+                <a:spcPts val="1400"/>
               </a:spcAft>
-              <a:defRPr sz="1900">
+              <a:defRPr sz="1600">
                 <a:solidFill>
                   <a:srgbClr val="22222B"/>
                 </a:solidFill>
               </a:defRPr>
             </a:pPr>
             <a:r>
-              <a:t>▸  Amazon Bedrock · Claude Haiku 4.5 — multilingual outreach &amp; YES/NO/CANCEL classification</a:t>
-            </a:r>
-          </a:p>
-          <a:p>
-            <a:pPr>
-              <a:spcAft>
-                <a:spcPts val="1000"/>
-              </a:spcAft>
-              <a:defRPr sz="1900">
-                <a:solidFill>
-                  <a:srgbClr val="22222B"/>
-                </a:solidFill>
-              </a:defRPr>
-            </a:pPr>
-            <a:r>
-              <a:t>▸  scikit-learn LogisticRegression — donor response probability (real dataset features)</a:t>
-            </a:r>
-          </a:p>
-          <a:p>
-            <a:pPr>
-              <a:spcAft>
-                <a:spcPts val="1000"/>
-              </a:spcAft>
-              <a:defRPr sz="1900">
-                <a:solidFill>
-                  <a:srgbClr val="22222B"/>
-                </a:solidFill>
-              </a:defRPr>
-            </a:pPr>
-            <a:r>
-              <a:t>▸  Per-patient forecasting — frequency_in_days rolled forward from historical records</a:t>
-            </a:r>
-          </a:p>
-          <a:p>
-            <a:pPr>
-              <a:spcAft>
-                <a:spcPts val="1000"/>
-              </a:spcAft>
-              <a:defRPr sz="1900">
-                <a:solidFill>
-                  <a:srgbClr val="22222B"/>
-                </a:solidFill>
-              </a:defRPr>
-            </a:pPr>
-            <a:r>
-              <a:t>▸  Conversational memory — DynamoDB messages + agent_log across cycles</a:t>
-            </a:r>
-          </a:p>
-          <a:p>
-            <a:pPr>
-              <a:spcAft>
-                <a:spcPts val="1000"/>
-              </a:spcAft>
-              <a:defRPr sz="1900">
-                <a:solidFill>
-                  <a:srgbClr val="22222B"/>
-                </a:solidFill>
-              </a:defRPr>
-            </a:pPr>
-            <a:r>
-              <a:t>▸  Failure learning — skip_score penalizes non-responsive donors in future ranking</a:t>
+              <a:t>Every number above comes from our deployed system — not slide fiction. Judges can open the live dashboard, watch an email arrive in MailPit, click YES, and see the KPI change in real time.</a:t>
             </a:r>
           </a:p>
         </p:txBody>
@@ -5309,8 +8300,8 @@
         </p:nvSpPr>
         <p:spPr>
           <a:xfrm>
-            <a:off x="548640" y="502920"/>
-            <a:ext cx="11064240" cy="1097280"/>
+            <a:off x="594360" y="457200"/>
+            <a:ext cx="11155680" cy="1051560"/>
           </a:xfrm>
           <a:prstGeom prst="rect">
             <a:avLst/>
@@ -5324,14 +8315,29 @@
           <a:lstStyle/>
           <a:p>
             <a:pPr>
-              <a:defRPr sz="3600" b="1">
+              <a:defRPr sz="3400" b="1">
                 <a:solidFill>
                   <a:srgbClr val="C8102E"/>
                 </a:solidFill>
               </a:defRPr>
             </a:pPr>
             <a:r>
-              <a:t>AWS architecture (live on EC2)</a:t>
+              <a:t>Demand forecasting</a:t>
+            </a:r>
+          </a:p>
+          <a:p>
+            <a:pPr>
+              <a:spcBef>
+                <a:spcPts val="400"/>
+              </a:spcBef>
+              <a:defRPr sz="1500">
+                <a:solidFill>
+                  <a:srgbClr val="5A6068"/>
+                </a:solidFill>
+              </a:defRPr>
+            </a:pPr>
+            <a:r>
+              <a:t>Who needs blood — and when</a:t>
             </a:r>
           </a:p>
         </p:txBody>
@@ -5344,8 +8350,8 @@
         </p:nvSpPr>
         <p:spPr>
           <a:xfrm>
-            <a:off x="640080" y="1325880"/>
-            <a:ext cx="10972800" cy="4572000"/>
+            <a:off x="640080" y="1417320"/>
+            <a:ext cx="10881360" cy="5029200"/>
           </a:xfrm>
           <a:prstGeom prst="rect">
             <a:avLst/>
@@ -5359,59 +8365,152 @@
           <a:lstStyle/>
           <a:p>
             <a:pPr>
-              <a:defRPr sz="1300">
+              <a:lnSpc>
+                <a:spcPct val="125000"/>
+              </a:lnSpc>
+              <a:spcAft>
+                <a:spcPts val="1400"/>
+              </a:spcAft>
+              <a:defRPr sz="1700">
                 <a:solidFill>
                   <a:srgbClr val="22222B"/>
                 </a:solidFill>
-                <a:latin typeface="Courier New"/>
-              </a:defRPr>
-            </a:pPr>
-            <a:r>
-              <a:t>┌──────────────────────┐     ┌─────────────────┐     ┌──────────────────┐</a:t>
-            </a:r>
-            <a:br/>
-            <a:r>
-              <a:t>│  Streamlit dashboard │────▶│  agent.py       │────▶│  DynamoDB        │</a:t>
-            </a:r>
-            <a:br/>
-            <a:r>
-              <a:t>│  Coordinator UI      │     │  background loop│     │  donors · bridges│</a:t>
-            </a:r>
-            <a:br/>
-            <a:r>
-              <a:t>└──────────┬───────────┘     └────────┬────────┘     └──────────────────┘</a:t>
-            </a:r>
-            <a:br/>
-            <a:r>
-              <a:t>           │                          │</a:t>
-            </a:r>
-            <a:br/>
-            <a:r>
-              <a:t>           │                   ┌──────┴──────┐</a:t>
-            </a:r>
-            <a:br/>
-            <a:r>
-              <a:t>           │                   ▼             ▼</a:t>
-            </a:r>
-            <a:br/>
-            <a:r>
-              <a:t>           │            ┌────────────┐  ┌─────────────┐</a:t>
-            </a:r>
-            <a:br/>
-            <a:r>
-              <a:t>           └───────────▶│ MailPit    │  │ Bedrock     │</a:t>
-            </a:r>
-            <a:br/>
-            <a:r>
-              <a:t>                        │ /mail inbox│  │ Haiku 4.5   │</a:t>
-            </a:r>
-            <a:br/>
-            <a:r>
-              <a:t>                        └────────────┘  └─────────────┘</a:t>
-            </a:r>
-            <a:br/>
-            <a:r>
-              <a:t>nginx :80 · EC2 t3.small · IAM role · us-east-1 · systemd 24/7</a:t>
+              </a:defRPr>
+            </a:pPr>
+            <a:r>
+              <a:t>Each patient has a personal transfusion cadence stored as frequency_in_days and last_transfusion_date from the Blood Warriors dataset.</a:t>
+            </a:r>
+          </a:p>
+          <a:p>
+            <a:pPr>
+              <a:lnSpc>
+                <a:spcPct val="125000"/>
+              </a:lnSpc>
+              <a:spcAft>
+                <a:spcPts val="1400"/>
+              </a:spcAft>
+              <a:defRPr sz="1700">
+                <a:solidFill>
+                  <a:srgbClr val="22222B"/>
+                </a:solidFill>
+              </a:defRPr>
+            </a:pPr>
+            <a:r>
+              <a:t>Our forecasting module rolls that cadence forward: if historical dates are in the past, we project to the next future date so the dashboard shows a realistic 90-day pipeline.</a:t>
+            </a:r>
+          </a:p>
+          <a:p>
+            <a:pPr>
+              <a:lnSpc>
+                <a:spcPct val="125000"/>
+              </a:lnSpc>
+              <a:spcAft>
+                <a:spcPts val="1400"/>
+              </a:spcAft>
+              <a:defRPr sz="1700">
+                <a:solidFill>
+                  <a:srgbClr val="22222B"/>
+                </a:solidFill>
+              </a:defRPr>
+            </a:pPr>
+            <a:r>
+              <a:t>The autonomous agent does not work on random patients — it pulls from this urgency queue, sorted by days_until transfusion, and skips patients already served in the last 24 hours.</a:t>
+            </a:r>
+          </a:p>
+          <a:p>
+            <a:pPr>
+              <a:lnSpc>
+                <a:spcPct val="125000"/>
+              </a:lnSpc>
+              <a:spcAft>
+                <a:spcPts val="1400"/>
+              </a:spcAft>
+              <a:defRPr sz="1700">
+                <a:solidFill>
+                  <a:srgbClr val="22222B"/>
+                </a:solidFill>
+              </a:defRPr>
+            </a:pPr>
+            <a:r>
+              <a:t>This is rule-based clinical cadence math, not black-box ML — because transfusion timing is driven by known intervals, not guesswork.</a:t>
+            </a:r>
+          </a:p>
+        </p:txBody>
+      </p:sp>
+      <p:sp>
+        <p:nvSpPr>
+          <p:cNvPr id="5" name="Rounded Rectangle 4"/>
+          <p:cNvSpPr/>
+          <p:nvPr/>
+        </p:nvSpPr>
+        <p:spPr>
+          <a:xfrm>
+            <a:off x="594360" y="5394960"/>
+            <a:ext cx="10972800" cy="777240"/>
+          </a:xfrm>
+          <a:prstGeom prst="roundRect">
+            <a:avLst/>
+          </a:prstGeom>
+          <a:solidFill>
+            <a:srgbClr val="FDE8EA"/>
+          </a:solidFill>
+          <a:ln>
+            <a:noFill/>
+          </a:ln>
+        </p:spPr>
+        <p:style>
+          <a:lnRef idx="1">
+            <a:schemeClr val="accent1"/>
+          </a:lnRef>
+          <a:fillRef idx="3">
+            <a:schemeClr val="accent1"/>
+          </a:fillRef>
+          <a:effectRef idx="2">
+            <a:schemeClr val="accent1"/>
+          </a:effectRef>
+          <a:fontRef idx="minor">
+            <a:schemeClr val="lt1"/>
+          </a:fontRef>
+        </p:style>
+        <p:txBody>
+          <a:bodyPr rtlCol="0" anchor="ctr"/>
+          <a:lstStyle/>
+          <a:p>
+            <a:pPr algn="ctr"/>
+          </a:p>
+        </p:txBody>
+      </p:sp>
+      <p:sp>
+        <p:nvSpPr>
+          <p:cNvPr id="6" name="TextBox 5"/>
+          <p:cNvSpPr txBox="1"/>
+          <p:nvPr/>
+        </p:nvSpPr>
+        <p:spPr>
+          <a:xfrm>
+            <a:off x="777240" y="5532120"/>
+            <a:ext cx="10607040" cy="548640"/>
+          </a:xfrm>
+          <a:prstGeom prst="rect">
+            <a:avLst/>
+          </a:prstGeom>
+          <a:noFill/>
+        </p:spPr>
+        <p:txBody>
+          <a:bodyPr wrap="none">
+            <a:spAutoFit/>
+          </a:bodyPr>
+          <a:lstStyle/>
+          <a:p>
+            <a:pPr algn="ctr">
+              <a:defRPr sz="1400" i="1">
+                <a:solidFill>
+                  <a:srgbClr val="C8102E"/>
+                </a:solidFill>
+              </a:defRPr>
+            </a:pPr>
+            <a:r>
+              <a:t>Result: proactive outreach days before crisis, not reactive panic.</a:t>
             </a:r>
           </a:p>
         </p:txBody>
@@ -5430,7 +8529,7 @@
     <p:bg>
       <p:bgPr>
         <a:solidFill>
-          <a:srgbClr val="FFFFFF"/>
+          <a:srgbClr val="F8F9FB"/>
         </a:solidFill>
         <a:effectLst/>
       </p:bgPr>
@@ -5493,8 +8592,8 @@
         </p:nvSpPr>
         <p:spPr>
           <a:xfrm>
-            <a:off x="548640" y="502920"/>
-            <a:ext cx="11064240" cy="1097280"/>
+            <a:off x="594360" y="457200"/>
+            <a:ext cx="11155680" cy="1051560"/>
           </a:xfrm>
           <a:prstGeom prst="rect">
             <a:avLst/>
@@ -5508,250 +8607,54 @@
           <a:lstStyle/>
           <a:p>
             <a:pPr>
-              <a:defRPr sz="3600" b="1">
+              <a:defRPr sz="3400" b="1">
                 <a:solidFill>
                   <a:srgbClr val="C8102E"/>
                 </a:solidFill>
               </a:defRPr>
             </a:pPr>
             <a:r>
-              <a:t>Live demo — scan to try</a:t>
-            </a:r>
-          </a:p>
-        </p:txBody>
-      </p:sp>
-      <p:pic>
-        <p:nvPicPr>
-          <p:cNvPr id="4" name="Picture 3" descr="qr-dashboard.png"/>
-          <p:cNvPicPr>
-            <a:picLocks noChangeAspect="1"/>
-          </p:cNvPicPr>
-          <p:nvPr/>
-        </p:nvPicPr>
-        <p:blipFill>
-          <a:blip r:embed="rId2"/>
-          <a:stretch>
-            <a:fillRect/>
-          </a:stretch>
-        </p:blipFill>
-        <p:spPr>
-          <a:xfrm>
-            <a:off x="777240" y="1600200"/>
-            <a:ext cx="2148840" cy="2148840"/>
-          </a:xfrm>
-          <a:prstGeom prst="rect">
-            <a:avLst/>
-          </a:prstGeom>
-        </p:spPr>
-      </p:pic>
-      <p:sp>
-        <p:nvSpPr>
-          <p:cNvPr id="5" name="TextBox 4"/>
-          <p:cNvSpPr txBox="1"/>
-          <p:nvPr/>
-        </p:nvSpPr>
-        <p:spPr>
-          <a:xfrm>
-            <a:off x="685800" y="3886200"/>
-            <a:ext cx="2377440" cy="1005840"/>
-          </a:xfrm>
-          <a:prstGeom prst="rect">
-            <a:avLst/>
-          </a:prstGeom>
-          <a:noFill/>
-        </p:spPr>
-        <p:txBody>
-          <a:bodyPr wrap="none">
-            <a:spAutoFit/>
-          </a:bodyPr>
-          <a:lstStyle/>
-          <a:p>
-            <a:pPr algn="ctr">
-              <a:defRPr sz="1300" b="1">
-                <a:solidFill>
-                  <a:srgbClr val="C8102E"/>
-                </a:solidFill>
-              </a:defRPr>
-            </a:pPr>
-            <a:r>
-              <a:t>Dashboard</a:t>
-            </a:r>
-          </a:p>
-          <a:p>
-            <a:pPr algn="ctr">
-              <a:defRPr sz="900">
+              <a:t>ML donor ranking</a:t>
+            </a:r>
+          </a:p>
+          <a:p>
+            <a:pPr>
+              <a:spcBef>
+                <a:spcPts val="400"/>
+              </a:spcBef>
+              <a:defRPr sz="1500">
                 <a:solidFill>
                   <a:srgbClr val="5A6068"/>
                 </a:solidFill>
               </a:defRPr>
             </a:pPr>
             <a:r>
-              <a:t>98.84.159.117</a:t>
-            </a:r>
-          </a:p>
-        </p:txBody>
-      </p:sp>
-      <p:pic>
-        <p:nvPicPr>
-          <p:cNvPr id="6" name="Picture 5" descr="qr-mailpit.png"/>
-          <p:cNvPicPr>
-            <a:picLocks noChangeAspect="1"/>
-          </p:cNvPicPr>
-          <p:nvPr/>
-        </p:nvPicPr>
-        <p:blipFill>
-          <a:blip r:embed="rId3"/>
-          <a:stretch>
-            <a:fillRect/>
-          </a:stretch>
-        </p:blipFill>
-        <p:spPr>
-          <a:xfrm>
-            <a:off x="3977639" y="1600200"/>
-            <a:ext cx="2148840" cy="2148840"/>
-          </a:xfrm>
-          <a:prstGeom prst="rect">
-            <a:avLst/>
-          </a:prstGeom>
-        </p:spPr>
-      </p:pic>
-      <p:sp>
-        <p:nvSpPr>
-          <p:cNvPr id="7" name="TextBox 6"/>
-          <p:cNvSpPr txBox="1"/>
-          <p:nvPr/>
-        </p:nvSpPr>
-        <p:spPr>
-          <a:xfrm>
-            <a:off x="3886200" y="3886200"/>
-            <a:ext cx="2377440" cy="1005840"/>
-          </a:xfrm>
-          <a:prstGeom prst="rect">
-            <a:avLst/>
-          </a:prstGeom>
-          <a:noFill/>
-        </p:spPr>
-        <p:txBody>
-          <a:bodyPr wrap="none">
-            <a:spAutoFit/>
-          </a:bodyPr>
-          <a:lstStyle/>
-          <a:p>
-            <a:pPr algn="ctr">
-              <a:defRPr sz="1300" b="1">
-                <a:solidFill>
-                  <a:srgbClr val="C8102E"/>
-                </a:solidFill>
-              </a:defRPr>
-            </a:pPr>
-            <a:r>
-              <a:t>MailPit inbox</a:t>
-            </a:r>
-          </a:p>
-          <a:p>
-            <a:pPr algn="ctr">
-              <a:defRPr sz="900">
-                <a:solidFill>
-                  <a:srgbClr val="5A6068"/>
-                </a:solidFill>
-              </a:defRPr>
-            </a:pPr>
-            <a:r>
-              <a:t>98.84.159.117/mail</a:t>
-            </a:r>
-          </a:p>
-        </p:txBody>
-      </p:sp>
-      <p:pic>
-        <p:nvPicPr>
-          <p:cNvPr id="8" name="Picture 7" descr="qr-github.png"/>
-          <p:cNvPicPr>
-            <a:picLocks noChangeAspect="1"/>
-          </p:cNvPicPr>
-          <p:nvPr/>
-        </p:nvPicPr>
-        <p:blipFill>
-          <a:blip r:embed="rId4"/>
-          <a:stretch>
-            <a:fillRect/>
-          </a:stretch>
-        </p:blipFill>
-        <p:spPr>
-          <a:xfrm>
-            <a:off x="7178040" y="1600200"/>
-            <a:ext cx="2148840" cy="2148840"/>
-          </a:xfrm>
-          <a:prstGeom prst="rect">
-            <a:avLst/>
-          </a:prstGeom>
-        </p:spPr>
-      </p:pic>
-      <p:sp>
-        <p:nvSpPr>
-          <p:cNvPr id="9" name="TextBox 8"/>
-          <p:cNvSpPr txBox="1"/>
-          <p:nvPr/>
-        </p:nvSpPr>
-        <p:spPr>
-          <a:xfrm>
-            <a:off x="7086600" y="3886200"/>
-            <a:ext cx="2377440" cy="1005840"/>
-          </a:xfrm>
-          <a:prstGeom prst="rect">
-            <a:avLst/>
-          </a:prstGeom>
-          <a:noFill/>
-        </p:spPr>
-        <p:txBody>
-          <a:bodyPr wrap="none">
-            <a:spAutoFit/>
-          </a:bodyPr>
-          <a:lstStyle/>
-          <a:p>
-            <a:pPr algn="ctr">
-              <a:defRPr sz="1300" b="1">
-                <a:solidFill>
-                  <a:srgbClr val="C8102E"/>
-                </a:solidFill>
-              </a:defRPr>
-            </a:pPr>
-            <a:r>
-              <a:t>GitHub repo</a:t>
-            </a:r>
-          </a:p>
-          <a:p>
-            <a:pPr algn="ctr">
-              <a:defRPr sz="900">
-                <a:solidFill>
-                  <a:srgbClr val="5A6068"/>
-                </a:solidFill>
-              </a:defRPr>
-            </a:pPr>
-            <a:r>
-              <a:t>github.com/madhuri-gande/spandan</a:t>
-            </a:r>
-          </a:p>
-        </p:txBody>
-      </p:sp>
-      <p:sp>
-        <p:nvSpPr>
-          <p:cNvPr id="10" name="Rounded Rectangle 9"/>
+              <a:t>Who to ask first — learned from real behaviour</a:t>
+            </a:r>
+          </a:p>
+        </p:txBody>
+      </p:sp>
+      <p:sp>
+        <p:nvSpPr>
+          <p:cNvPr id="4" name="Rounded Rectangle 3"/>
           <p:cNvSpPr/>
           <p:nvPr/>
         </p:nvSpPr>
         <p:spPr>
           <a:xfrm>
-            <a:off x="9601200" y="1508760"/>
-            <a:ext cx="2286000" cy="4389120"/>
+            <a:off x="594360" y="1417320"/>
+            <a:ext cx="5486400" cy="4892040"/>
           </a:xfrm>
           <a:prstGeom prst="roundRect">
             <a:avLst/>
           </a:prstGeom>
           <a:solidFill>
-            <a:srgbClr val="FDE8EA"/>
+            <a:srgbClr val="FFFFFF"/>
           </a:solidFill>
-          <a:ln>
-            <a:noFill/>
+          <a:ln w="15240">
+            <a:solidFill>
+              <a:srgbClr val="FDE8EA"/>
+            </a:solidFill>
           </a:ln>
         </p:spPr>
         <p:style>
@@ -5778,14 +8681,49 @@
       </p:sp>
       <p:sp>
         <p:nvSpPr>
-          <p:cNvPr id="11" name="TextBox 10"/>
+          <p:cNvPr id="5" name="TextBox 4"/>
           <p:cNvSpPr txBox="1"/>
           <p:nvPr/>
         </p:nvSpPr>
         <p:spPr>
           <a:xfrm>
-            <a:off x="9738360" y="1691640"/>
-            <a:ext cx="2011680" cy="4023360"/>
+            <a:off x="822960" y="1600200"/>
+            <a:ext cx="5029200" cy="411480"/>
+          </a:xfrm>
+          <a:prstGeom prst="rect">
+            <a:avLst/>
+          </a:prstGeom>
+          <a:noFill/>
+        </p:spPr>
+        <p:txBody>
+          <a:bodyPr wrap="none">
+            <a:spAutoFit/>
+          </a:bodyPr>
+          <a:lstStyle/>
+          <a:p>
+            <a:pPr>
+              <a:defRPr sz="1800" b="1">
+                <a:solidFill>
+                  <a:srgbClr val="C8102E"/>
+                </a:solidFill>
+              </a:defRPr>
+            </a:pPr>
+            <a:r>
+              <a:t>The model</a:t>
+            </a:r>
+          </a:p>
+        </p:txBody>
+      </p:sp>
+      <p:sp>
+        <p:nvSpPr>
+          <p:cNvPr id="6" name="TextBox 5"/>
+          <p:cNvSpPr txBox="1"/>
+          <p:nvPr/>
+        </p:nvSpPr>
+        <p:spPr>
+          <a:xfrm>
+            <a:off x="822960" y="2011680"/>
+            <a:ext cx="4983480" cy="5029200"/>
           </a:xfrm>
           <a:prstGeom prst="rect">
             <a:avLst/>
@@ -5799,107 +8737,231 @@
           <a:lstStyle/>
           <a:p>
             <a:pPr>
-              <a:defRPr sz="1200" b="1">
+              <a:lnSpc>
+                <a:spcPct val="125000"/>
+              </a:lnSpc>
+              <a:spcAft>
+                <a:spcPts val="1400"/>
+              </a:spcAft>
+              <a:defRPr sz="1500">
+                <a:solidFill>
+                  <a:srgbClr val="22222B"/>
+                </a:solidFill>
+              </a:defRPr>
+            </a:pPr>
+            <a:r>
+              <a:t>Algorithm: Logistic Regression (scikit-learn) with StandardScaler.</a:t>
+            </a:r>
+          </a:p>
+          <a:p>
+            <a:pPr>
+              <a:lnSpc>
+                <a:spcPct val="125000"/>
+              </a:lnSpc>
+              <a:spcAft>
+                <a:spcPts val="1400"/>
+              </a:spcAft>
+              <a:defRPr sz="1500">
+                <a:solidFill>
+                  <a:srgbClr val="22222B"/>
+                </a:solidFill>
+              </a:defRPr>
+            </a:pPr>
+            <a:r>
+              <a:t>Label: donated_earlier from dataset — proxy for likely YES response.</a:t>
+            </a:r>
+          </a:p>
+          <a:p>
+            <a:pPr>
+              <a:lnSpc>
+                <a:spcPct val="125000"/>
+              </a:lnSpc>
+              <a:spcAft>
+                <a:spcPts val="1400"/>
+              </a:spcAft>
+              <a:defRPr sz="1500">
+                <a:solidFill>
+                  <a:srgbClr val="22222B"/>
+                </a:solidFill>
+              </a:defRPr>
+            </a:pPr>
+            <a:r>
+              <a:t>Trained on 80/20 split; class_weight=balanced; ROC-AUC ~0.7 on holdout.</a:t>
+            </a:r>
+          </a:p>
+          <a:p>
+            <a:pPr>
+              <a:lnSpc>
+                <a:spcPct val="125000"/>
+              </a:lnSpc>
+              <a:spcAft>
+                <a:spcPts val="1400"/>
+              </a:spcAft>
+              <a:defRPr sz="1500">
+                <a:solidFill>
+                  <a:srgbClr val="22222B"/>
+                </a:solidFill>
+              </a:defRPr>
+            </a:pPr>
+            <a:r>
+              <a:t>Artifact: models/donor_ranking.pkl — trained on EC2 at deploy time.</a:t>
+            </a:r>
+          </a:p>
+        </p:txBody>
+      </p:sp>
+      <p:sp>
+        <p:nvSpPr>
+          <p:cNvPr id="7" name="Rounded Rectangle 6"/>
+          <p:cNvSpPr/>
+          <p:nvPr/>
+        </p:nvSpPr>
+        <p:spPr>
+          <a:xfrm>
+            <a:off x="6263640" y="1417320"/>
+            <a:ext cx="5486400" cy="4892040"/>
+          </a:xfrm>
+          <a:prstGeom prst="roundRect">
+            <a:avLst/>
+          </a:prstGeom>
+          <a:solidFill>
+            <a:srgbClr val="FFFFFF"/>
+          </a:solidFill>
+          <a:ln w="15240">
+            <a:solidFill>
+              <a:srgbClr val="FDE8EA"/>
+            </a:solidFill>
+          </a:ln>
+        </p:spPr>
+        <p:style>
+          <a:lnRef idx="1">
+            <a:schemeClr val="accent1"/>
+          </a:lnRef>
+          <a:fillRef idx="3">
+            <a:schemeClr val="accent1"/>
+          </a:fillRef>
+          <a:effectRef idx="2">
+            <a:schemeClr val="accent1"/>
+          </a:effectRef>
+          <a:fontRef idx="minor">
+            <a:schemeClr val="lt1"/>
+          </a:fontRef>
+        </p:style>
+        <p:txBody>
+          <a:bodyPr rtlCol="0" anchor="ctr"/>
+          <a:lstStyle/>
+          <a:p>
+            <a:pPr algn="ctr"/>
+          </a:p>
+        </p:txBody>
+      </p:sp>
+      <p:sp>
+        <p:nvSpPr>
+          <p:cNvPr id="8" name="TextBox 7"/>
+          <p:cNvSpPr txBox="1"/>
+          <p:nvPr/>
+        </p:nvSpPr>
+        <p:spPr>
+          <a:xfrm>
+            <a:off x="6492240" y="1600200"/>
+            <a:ext cx="5029200" cy="411480"/>
+          </a:xfrm>
+          <a:prstGeom prst="rect">
+            <a:avLst/>
+          </a:prstGeom>
+          <a:noFill/>
+        </p:spPr>
+        <p:txBody>
+          <a:bodyPr wrap="none">
+            <a:spAutoFit/>
+          </a:bodyPr>
+          <a:lstStyle/>
+          <a:p>
+            <a:pPr>
+              <a:defRPr sz="1800" b="1">
                 <a:solidFill>
                   <a:srgbClr val="C8102E"/>
                 </a:solidFill>
               </a:defRPr>
             </a:pPr>
             <a:r>
-              <a:t>Login</a:t>
-            </a:r>
-          </a:p>
-          <a:p>
-            <a:pPr>
-              <a:defRPr sz="1200" b="0">
+              <a:t>Features &amp; safety</a:t>
+            </a:r>
+          </a:p>
+        </p:txBody>
+      </p:sp>
+      <p:sp>
+        <p:nvSpPr>
+          <p:cNvPr id="9" name="TextBox 8"/>
+          <p:cNvSpPr txBox="1"/>
+          <p:nvPr/>
+        </p:nvSpPr>
+        <p:spPr>
+          <a:xfrm>
+            <a:off x="6492240" y="2011680"/>
+            <a:ext cx="4983480" cy="5029200"/>
+          </a:xfrm>
+          <a:prstGeom prst="rect">
+            <a:avLst/>
+          </a:prstGeom>
+          <a:noFill/>
+        </p:spPr>
+        <p:txBody>
+          <a:bodyPr wrap="square">
+            <a:spAutoFit/>
+          </a:bodyPr>
+          <a:lstStyle/>
+          <a:p>
+            <a:pPr>
+              <a:lnSpc>
+                <a:spcPct val="125000"/>
+              </a:lnSpc>
+              <a:spcAft>
+                <a:spcPts val="1400"/>
+              </a:spcAft>
+              <a:defRPr sz="1500">
                 <a:solidFill>
                   <a:srgbClr val="22222B"/>
                 </a:solidFill>
               </a:defRPr>
             </a:pPr>
             <a:r>
-              <a:t>coordinator</a:t>
-            </a:r>
-          </a:p>
-          <a:p>
-            <a:pPr>
-              <a:defRPr sz="1200" b="0">
+              <a:t>Features: calls-to-donations ratio, donation history (log), eligibility, donor type (regular/one-time), call frequency.</a:t>
+            </a:r>
+          </a:p>
+          <a:p>
+            <a:pPr>
+              <a:lnSpc>
+                <a:spcPct val="125000"/>
+              </a:lnSpc>
+              <a:spcAft>
+                <a:spcPts val="1400"/>
+              </a:spcAft>
+              <a:defRPr sz="1500">
                 <a:solidFill>
                   <a:srgbClr val="22222B"/>
                 </a:solidFill>
               </a:defRPr>
             </a:pPr>
-          </a:p>
-          <a:p>
-            <a:pPr>
-              <a:defRPr sz="1200" b="1">
-                <a:solidFill>
-                  <a:srgbClr val="C8102E"/>
-                </a:solidFill>
-              </a:defRPr>
-            </a:pPr>
-            <a:r>
-              <a:t>Demo flow</a:t>
-            </a:r>
-          </a:p>
-          <a:p>
-            <a:pPr>
-              <a:defRPr sz="1200" b="0">
+            <a:r>
+              <a:t>Blood compatibility is a hard rule before ML — we never score incompatible pairs.</a:t>
+            </a:r>
+          </a:p>
+          <a:p>
+            <a:pPr>
+              <a:lnSpc>
+                <a:spcPct val="125000"/>
+              </a:lnSpc>
+              <a:spcAft>
+                <a:spcPts val="1400"/>
+              </a:spcAft>
+              <a:defRPr sz="1500">
                 <a:solidFill>
                   <a:srgbClr val="22222B"/>
                 </a:solidFill>
               </a:defRPr>
             </a:pPr>
             <a:r>
-              <a:t>1. Pipeline</a:t>
-            </a:r>
-          </a:p>
-          <a:p>
-            <a:pPr>
-              <a:defRPr sz="1200" b="0">
-                <a:solidFill>
-                  <a:srgbClr val="22222B"/>
-                </a:solidFill>
-              </a:defRPr>
-            </a:pPr>
-            <a:r>
-              <a:t>2. Email donor</a:t>
-            </a:r>
-          </a:p>
-          <a:p>
-            <a:pPr>
-              <a:defRPr sz="1200" b="0">
-                <a:solidFill>
-                  <a:srgbClr val="22222B"/>
-                </a:solidFill>
-              </a:defRPr>
-            </a:pPr>
-            <a:r>
-              <a:t>3. MailPit → YES</a:t>
-            </a:r>
-          </a:p>
-          <a:p>
-            <a:pPr>
-              <a:defRPr sz="1200" b="0">
-                <a:solidFill>
-                  <a:srgbClr val="22222B"/>
-                </a:solidFill>
-              </a:defRPr>
-            </a:pPr>
-            <a:r>
-              <a:t>4. KPI updates</a:t>
-            </a:r>
-          </a:p>
-          <a:p>
-            <a:pPr>
-              <a:defRPr sz="1200" b="0">
-                <a:solidFill>
-                  <a:srgbClr val="22222B"/>
-                </a:solidFill>
-              </a:defRPr>
-            </a:pPr>
-            <a:r>
-              <a:t>5. Surge mode</a:t>
+              <a:t>Runtime skip_score penalises donors who ignore outreach — failure learning on top of the model.</a:t>
             </a:r>
           </a:p>
         </p:txBody>
@@ -5981,8 +9043,8 @@
         </p:nvSpPr>
         <p:spPr>
           <a:xfrm>
-            <a:off x="548640" y="502920"/>
-            <a:ext cx="11064240" cy="1097280"/>
+            <a:off x="594360" y="457200"/>
+            <a:ext cx="11155680" cy="1051560"/>
           </a:xfrm>
           <a:prstGeom prst="rect">
             <a:avLst/>
@@ -5996,80 +9058,43 @@
           <a:lstStyle/>
           <a:p>
             <a:pPr>
-              <a:defRPr sz="3600" b="1">
+              <a:defRPr sz="3400" b="1">
                 <a:solidFill>
                   <a:srgbClr val="C8102E"/>
                 </a:solidFill>
               </a:defRPr>
             </a:pPr>
             <a:r>
-              <a:t>Evaluation criteria mapping</a:t>
-            </a:r>
-          </a:p>
-        </p:txBody>
-      </p:sp>
-      <p:sp>
-        <p:nvSpPr>
-          <p:cNvPr id="4" name="Rounded Rectangle 3"/>
-          <p:cNvSpPr/>
-          <p:nvPr/>
-        </p:nvSpPr>
-        <p:spPr>
-          <a:xfrm>
-            <a:off x="685800" y="1417320"/>
-            <a:ext cx="914400" cy="594360"/>
-          </a:xfrm>
-          <a:prstGeom prst="roundRect">
-            <a:avLst/>
-          </a:prstGeom>
-          <a:solidFill>
-            <a:srgbClr val="C8102E"/>
-          </a:solidFill>
-          <a:ln>
-            <a:noFill/>
-          </a:ln>
-        </p:spPr>
-        <p:style>
-          <a:lnRef idx="1">
-            <a:schemeClr val="accent1"/>
-          </a:lnRef>
-          <a:fillRef idx="3">
-            <a:schemeClr val="accent1"/>
-          </a:fillRef>
-          <a:effectRef idx="2">
-            <a:schemeClr val="accent1"/>
-          </a:effectRef>
-          <a:fontRef idx="minor">
-            <a:schemeClr val="lt1"/>
-          </a:fontRef>
-        </p:style>
-        <p:txBody>
-          <a:bodyPr rtlCol="0" anchor="ctr"/>
-          <a:lstStyle/>
-          <a:p>
-            <a:pPr algn="ctr">
-              <a:defRPr sz="1300" b="1">
-                <a:solidFill>
-                  <a:srgbClr val="FFFFFF"/>
-                </a:solidFill>
-              </a:defRPr>
-            </a:pPr>
-            <a:r>
-              <a:t>20%</a:t>
-            </a:r>
-          </a:p>
-        </p:txBody>
-      </p:sp>
-      <p:sp>
-        <p:nvSpPr>
-          <p:cNvPr id="5" name="TextBox 4"/>
+              <a:t>Generative AI with Amazon Bedrock</a:t>
+            </a:r>
+          </a:p>
+          <a:p>
+            <a:pPr>
+              <a:spcBef>
+                <a:spcPts val="400"/>
+              </a:spcBef>
+              <a:defRPr sz="1500">
+                <a:solidFill>
+                  <a:srgbClr val="5A6068"/>
+                </a:solidFill>
+              </a:defRPr>
+            </a:pPr>
+            <a:r>
+              <a:t>Claude Haiku 4.5 — multilingual &amp; intent-aware</a:t>
+            </a:r>
+          </a:p>
+        </p:txBody>
+      </p:sp>
+      <p:sp>
+        <p:nvSpPr>
+          <p:cNvPr id="4" name="TextBox 3"/>
           <p:cNvSpPr txBox="1"/>
           <p:nvPr/>
         </p:nvSpPr>
         <p:spPr>
           <a:xfrm>
-            <a:off x="1783080" y="1417320"/>
-            <a:ext cx="9601200" cy="640080"/>
+            <a:off x="640080" y="1417320"/>
+            <a:ext cx="10881360" cy="5029200"/>
           </a:xfrm>
           <a:prstGeom prst="rect">
             <a:avLst/>
@@ -6077,12 +9102,18 @@
           <a:noFill/>
         </p:spPr>
         <p:txBody>
-          <a:bodyPr wrap="none">
+          <a:bodyPr wrap="square">
             <a:spAutoFit/>
           </a:bodyPr>
           <a:lstStyle/>
           <a:p>
             <a:pPr>
+              <a:lnSpc>
+                <a:spcPct val="125000"/>
+              </a:lnSpc>
+              <a:spcAft>
+                <a:spcPts val="1400"/>
+              </a:spcAft>
               <a:defRPr sz="1700">
                 <a:solidFill>
                   <a:srgbClr val="22222B"/>
@@ -6090,86 +9121,17 @@
               </a:defRPr>
             </a:pPr>
             <a:r>
-              <a:t>Practicality &amp; scalability  —  Real cadence forecasting, cooldowns, surge, SES-ready</a:t>
-            </a:r>
-          </a:p>
-        </p:txBody>
-      </p:sp>
-      <p:sp>
-        <p:nvSpPr>
-          <p:cNvPr id="6" name="Rounded Rectangle 5"/>
-          <p:cNvSpPr/>
-          <p:nvPr/>
-        </p:nvSpPr>
-        <p:spPr>
-          <a:xfrm>
-            <a:off x="685800" y="2350008"/>
-            <a:ext cx="914400" cy="594360"/>
-          </a:xfrm>
-          <a:prstGeom prst="roundRect">
-            <a:avLst/>
-          </a:prstGeom>
-          <a:solidFill>
-            <a:srgbClr val="C8102E"/>
-          </a:solidFill>
-          <a:ln>
-            <a:noFill/>
-          </a:ln>
-        </p:spPr>
-        <p:style>
-          <a:lnRef idx="1">
-            <a:schemeClr val="accent1"/>
-          </a:lnRef>
-          <a:fillRef idx="3">
-            <a:schemeClr val="accent1"/>
-          </a:fillRef>
-          <a:effectRef idx="2">
-            <a:schemeClr val="accent1"/>
-          </a:effectRef>
-          <a:fontRef idx="minor">
-            <a:schemeClr val="lt1"/>
-          </a:fontRef>
-        </p:style>
-        <p:txBody>
-          <a:bodyPr rtlCol="0" anchor="ctr"/>
-          <a:lstStyle/>
-          <a:p>
-            <a:pPr algn="ctr">
-              <a:defRPr sz="1300" b="1">
-                <a:solidFill>
-                  <a:srgbClr val="FFFFFF"/>
-                </a:solidFill>
-              </a:defRPr>
-            </a:pPr>
-            <a:r>
-              <a:t>20%</a:t>
-            </a:r>
-          </a:p>
-        </p:txBody>
-      </p:sp>
-      <p:sp>
-        <p:nvSpPr>
-          <p:cNvPr id="7" name="TextBox 6"/>
-          <p:cNvSpPr txBox="1"/>
-          <p:nvPr/>
-        </p:nvSpPr>
-        <p:spPr>
-          <a:xfrm>
-            <a:off x="1783080" y="2350008"/>
-            <a:ext cx="9601200" cy="640080"/>
-          </a:xfrm>
-          <a:prstGeom prst="rect">
-            <a:avLst/>
-          </a:prstGeom>
-          <a:noFill/>
-        </p:spPr>
-        <p:txBody>
-          <a:bodyPr wrap="none">
-            <a:spAutoFit/>
-          </a:bodyPr>
-          <a:lstStyle/>
-          <a:p>
-            <a:pPr>
+              <a:t>Outreach: Bedrock drafts a warm, urgent-but-not-alarming donation request in the donor's preferred language — Telugu, Hindi, Tamil, or English — using patient name, hospital, and blood group as context.</a:t>
+            </a:r>
+          </a:p>
+          <a:p>
+            <a:pPr>
+              <a:lnSpc>
+                <a:spcPct val="125000"/>
+              </a:lnSpc>
+              <a:spcAft>
+                <a:spcPts val="1400"/>
+              </a:spcAft>
               <a:defRPr sz="1700">
                 <a:solidFill>
                   <a:srgbClr val="22222B"/>
@@ -6177,86 +9139,17 @@
               </a:defRPr>
             </a:pPr>
             <a:r>
-              <a:t>Innovation  —  Autonomous state machine — not a chatbot wrapper</a:t>
-            </a:r>
-          </a:p>
-        </p:txBody>
-      </p:sp>
-      <p:sp>
-        <p:nvSpPr>
-          <p:cNvPr id="8" name="Rounded Rectangle 7"/>
-          <p:cNvSpPr/>
-          <p:nvPr/>
-        </p:nvSpPr>
-        <p:spPr>
-          <a:xfrm>
-            <a:off x="685800" y="3282696"/>
-            <a:ext cx="914400" cy="594360"/>
-          </a:xfrm>
-          <a:prstGeom prst="roundRect">
-            <a:avLst/>
-          </a:prstGeom>
-          <a:solidFill>
-            <a:srgbClr val="C8102E"/>
-          </a:solidFill>
-          <a:ln>
-            <a:noFill/>
-          </a:ln>
-        </p:spPr>
-        <p:style>
-          <a:lnRef idx="1">
-            <a:schemeClr val="accent1"/>
-          </a:lnRef>
-          <a:fillRef idx="3">
-            <a:schemeClr val="accent1"/>
-          </a:fillRef>
-          <a:effectRef idx="2">
-            <a:schemeClr val="accent1"/>
-          </a:effectRef>
-          <a:fontRef idx="minor">
-            <a:schemeClr val="lt1"/>
-          </a:fontRef>
-        </p:style>
-        <p:txBody>
-          <a:bodyPr rtlCol="0" anchor="ctr"/>
-          <a:lstStyle/>
-          <a:p>
-            <a:pPr algn="ctr">
-              <a:defRPr sz="1300" b="1">
-                <a:solidFill>
-                  <a:srgbClr val="FFFFFF"/>
-                </a:solidFill>
-              </a:defRPr>
-            </a:pPr>
-            <a:r>
-              <a:t>20%</a:t>
-            </a:r>
-          </a:p>
-        </p:txBody>
-      </p:sp>
-      <p:sp>
-        <p:nvSpPr>
-          <p:cNvPr id="9" name="TextBox 8"/>
-          <p:cNvSpPr txBox="1"/>
-          <p:nvPr/>
-        </p:nvSpPr>
-        <p:spPr>
-          <a:xfrm>
-            <a:off x="1783080" y="3282696"/>
-            <a:ext cx="9601200" cy="640080"/>
-          </a:xfrm>
-          <a:prstGeom prst="rect">
-            <a:avLst/>
-          </a:prstGeom>
-          <a:noFill/>
-        </p:spPr>
-        <p:txBody>
-          <a:bodyPr wrap="none">
-            <a:spAutoFit/>
-          </a:bodyPr>
-          <a:lstStyle/>
-          <a:p>
-            <a:pPr>
+              <a:t>Reply intelligence: the same model classifies donor replies as YES, NO, CANCEL, or QUESTION — even when the text is informal or in a regional language.</a:t>
+            </a:r>
+          </a:p>
+          <a:p>
+            <a:pPr>
+              <a:lnSpc>
+                <a:spcPct val="125000"/>
+              </a:lnSpc>
+              <a:spcAft>
+                <a:spcPts val="1400"/>
+              </a:spcAft>
               <a:defRPr sz="1700">
                 <a:solidFill>
                   <a:srgbClr val="22222B"/>
@@ -6264,86 +9157,17 @@
               </a:defRPr>
             </a:pPr>
             <a:r>
-              <a:t>AI component  —  Bedrock multilingual + ML ranking on organiser dataset</a:t>
-            </a:r>
-          </a:p>
-        </p:txBody>
-      </p:sp>
-      <p:sp>
-        <p:nvSpPr>
-          <p:cNvPr id="10" name="Rounded Rectangle 9"/>
-          <p:cNvSpPr/>
-          <p:nvPr/>
-        </p:nvSpPr>
-        <p:spPr>
-          <a:xfrm>
-            <a:off x="685800" y="4215384"/>
-            <a:ext cx="914400" cy="594360"/>
-          </a:xfrm>
-          <a:prstGeom prst="roundRect">
-            <a:avLst/>
-          </a:prstGeom>
-          <a:solidFill>
-            <a:srgbClr val="C8102E"/>
-          </a:solidFill>
-          <a:ln>
-            <a:noFill/>
-          </a:ln>
-        </p:spPr>
-        <p:style>
-          <a:lnRef idx="1">
-            <a:schemeClr val="accent1"/>
-          </a:lnRef>
-          <a:fillRef idx="3">
-            <a:schemeClr val="accent1"/>
-          </a:fillRef>
-          <a:effectRef idx="2">
-            <a:schemeClr val="accent1"/>
-          </a:effectRef>
-          <a:fontRef idx="minor">
-            <a:schemeClr val="lt1"/>
-          </a:fontRef>
-        </p:style>
-        <p:txBody>
-          <a:bodyPr rtlCol="0" anchor="ctr"/>
-          <a:lstStyle/>
-          <a:p>
-            <a:pPr algn="ctr">
-              <a:defRPr sz="1300" b="1">
-                <a:solidFill>
-                  <a:srgbClr val="FFFFFF"/>
-                </a:solidFill>
-              </a:defRPr>
-            </a:pPr>
-            <a:r>
-              <a:t>20%</a:t>
-            </a:r>
-          </a:p>
-        </p:txBody>
-      </p:sp>
-      <p:sp>
-        <p:nvSpPr>
-          <p:cNvPr id="11" name="TextBox 10"/>
-          <p:cNvSpPr txBox="1"/>
-          <p:nvPr/>
-        </p:nvSpPr>
-        <p:spPr>
-          <a:xfrm>
-            <a:off x="1783080" y="4215384"/>
-            <a:ext cx="9601200" cy="640080"/>
-          </a:xfrm>
-          <a:prstGeom prst="rect">
-            <a:avLst/>
-          </a:prstGeom>
-          <a:noFill/>
-        </p:spPr>
-        <p:txBody>
-          <a:bodyPr wrap="none">
-            <a:spAutoFit/>
-          </a:bodyPr>
-          <a:lstStyle/>
-          <a:p>
-            <a:pPr>
+              <a:t>Follow-ups: auto-generated reminders after confirmation, polite 'already covered' messages when enough donors have said yes, and empathetic answers when donors ask questions.</a:t>
+            </a:r>
+          </a:p>
+          <a:p>
+            <a:pPr>
+              <a:lnSpc>
+                <a:spcPct val="125000"/>
+              </a:lnSpc>
+              <a:spcAft>
+                <a:spcPts val="1400"/>
+              </a:spcAft>
               <a:defRPr sz="1700">
                 <a:solidFill>
                   <a:srgbClr val="22222B"/>
@@ -6351,94 +9175,7 @@
               </a:defRPr>
             </a:pPr>
             <a:r>
-              <a:t>Real implementation  —  Live emails, magic links, DynamoDB — not mock UI</a:t>
-            </a:r>
-          </a:p>
-        </p:txBody>
-      </p:sp>
-      <p:sp>
-        <p:nvSpPr>
-          <p:cNvPr id="12" name="Rounded Rectangle 11"/>
-          <p:cNvSpPr/>
-          <p:nvPr/>
-        </p:nvSpPr>
-        <p:spPr>
-          <a:xfrm>
-            <a:off x="685800" y="5148072"/>
-            <a:ext cx="914400" cy="594360"/>
-          </a:xfrm>
-          <a:prstGeom prst="roundRect">
-            <a:avLst/>
-          </a:prstGeom>
-          <a:solidFill>
-            <a:srgbClr val="C8102E"/>
-          </a:solidFill>
-          <a:ln>
-            <a:noFill/>
-          </a:ln>
-        </p:spPr>
-        <p:style>
-          <a:lnRef idx="1">
-            <a:schemeClr val="accent1"/>
-          </a:lnRef>
-          <a:fillRef idx="3">
-            <a:schemeClr val="accent1"/>
-          </a:fillRef>
-          <a:effectRef idx="2">
-            <a:schemeClr val="accent1"/>
-          </a:effectRef>
-          <a:fontRef idx="minor">
-            <a:schemeClr val="lt1"/>
-          </a:fontRef>
-        </p:style>
-        <p:txBody>
-          <a:bodyPr rtlCol="0" anchor="ctr"/>
-          <a:lstStyle/>
-          <a:p>
-            <a:pPr algn="ctr">
-              <a:defRPr sz="1300" b="1">
-                <a:solidFill>
-                  <a:srgbClr val="FFFFFF"/>
-                </a:solidFill>
-              </a:defRPr>
-            </a:pPr>
-            <a:r>
-              <a:t>20%</a:t>
-            </a:r>
-          </a:p>
-        </p:txBody>
-      </p:sp>
-      <p:sp>
-        <p:nvSpPr>
-          <p:cNvPr id="13" name="TextBox 12"/>
-          <p:cNvSpPr txBox="1"/>
-          <p:nvPr/>
-        </p:nvSpPr>
-        <p:spPr>
-          <a:xfrm>
-            <a:off x="1783080" y="5148072"/>
-            <a:ext cx="9601200" cy="640080"/>
-          </a:xfrm>
-          <a:prstGeom prst="rect">
-            <a:avLst/>
-          </a:prstGeom>
-          <a:noFill/>
-        </p:spPr>
-        <p:txBody>
-          <a:bodyPr wrap="none">
-            <a:spAutoFit/>
-          </a:bodyPr>
-          <a:lstStyle/>
-          <a:p>
-            <a:pPr>
-              <a:defRPr sz="1700">
-                <a:solidFill>
-                  <a:srgbClr val="22222B"/>
-                </a:solidFill>
-              </a:defRPr>
-            </a:pPr>
-            <a:r>
-              <a:t>End-to-end deployment  —  GitHub + EC2 + systemd + nginx + IAM role</a:t>
+              <a:t>This is not template mail merge — every message is generated fresh, while the agent state machine decides when to send it.</a:t>
             </a:r>
           </a:p>
         </p:txBody>
